--- a/AMO_case_presentation.pptx
+++ b/AMO_case_presentation.pptx
@@ -4,9 +4,6 @@
   <p:sldMasterIdLst>
     <p:sldMasterId id="2147483648" r:id="rId1"/>
   </p:sldMasterIdLst>
-  <p:notesMasterIdLst>
-    <p:notesMasterId r:id="rId15"/>
-  </p:notesMasterIdLst>
   <p:sldIdLst>
     <p:sldId id="256" r:id="rId2"/>
     <p:sldId id="257" r:id="rId3"/>
@@ -22,6 +19,9 @@
     <p:sldId id="267" r:id="rId13"/>
     <p:sldId id="268" r:id="rId14"/>
   </p:sldIdLst>
+  <p:notesMasterIdLst>
+    <p:notesMasterId r:id="rId15"/>
+  </p:notesMasterIdLst>
   <p:sldSz cx="12192000" cy="6858000"/>
   <p:notesSz cx="6858000" cy="12192000"/>
   <p:defaultTextStyle>
@@ -116,11 +116,6 @@
       </a:defRPr>
     </a:lvl9pPr>
   </p:defaultTextStyle>
-  <p:extLst>
-    <p:ext uri="{EFAFB233-063F-42B5-8137-9DF3F51BA10A}">
-      <p15:sldGuideLst xmlns:p15="http://schemas.microsoft.com/office/powerpoint/2012/main"/>
-    </p:ext>
-  </p:extLst>
 </p:presentation>
 </file>
 
@@ -146,10 +141,234 @@
           <a:chExt cx="0" cy="0"/>
         </a:xfrm>
       </p:grpSpPr>
+      <p:sp>
+        <p:nvSpPr>
+          <p:cNvPr id="2" name="Header Placeholder 1"/>
+          <p:cNvSpPr>
+            <a:spLocks noGrp="1"/>
+          </p:cNvSpPr>
+          <p:nvPr>
+            <p:ph type="hdr" sz="quarter"/>
+          </p:nvPr>
+        </p:nvSpPr>
+        <p:spPr>
+          <a:xfrm>
+            <a:off x="0" y="0"/>
+            <a:ext cx="2971800" cy="458788"/>
+          </a:xfrm>
+          <a:prstGeom prst="rect">
+            <a:avLst/>
+          </a:prstGeom>
+        </p:spPr>
+        <p:txBody>
+          <a:bodyPr vert="horz" lIns="91440" tIns="45720" rIns="91440" bIns="45720" rtlCol="0"/>
+          <a:lstStyle>
+            <a:lvl1pPr algn="l">
+              <a:defRPr sz="1200"/>
+            </a:lvl1pPr>
+          </a:lstStyle>
+          <a:p>
+            <a:endParaRPr lang="en-US"/>
+          </a:p>
+        </p:txBody>
+      </p:sp>
+      <p:sp>
+        <p:nvSpPr>
+          <p:cNvPr id="3" name="Date Placeholder 2"/>
+          <p:cNvSpPr>
+            <a:spLocks noGrp="1"/>
+          </p:cNvSpPr>
+          <p:nvPr>
+            <p:ph type="dt" idx="1"/>
+          </p:nvPr>
+        </p:nvSpPr>
+        <p:spPr>
+          <a:xfrm>
+            <a:off x="3884613" y="0"/>
+            <a:ext cx="2971800" cy="458788"/>
+          </a:xfrm>
+          <a:prstGeom prst="rect">
+            <a:avLst/>
+          </a:prstGeom>
+        </p:spPr>
+        <p:txBody>
+          <a:bodyPr vert="horz" lIns="91440" tIns="45720" rIns="91440" bIns="45720" rtlCol="0"/>
+          <a:lstStyle>
+            <a:lvl1pPr algn="r">
+              <a:defRPr sz="1200"/>
+            </a:lvl1pPr>
+          </a:lstStyle>
+          <a:p>
+            <a:fld id="{5282F153-3F37-0F45-9E97-73ACFA13230C}" type="datetimeFigureOut">
+              <a:rPr lang="en-US"/>
+              <a:t>7/23/19</a:t>
+            </a:fld>
+            <a:endParaRPr lang="en-US"/>
+          </a:p>
+        </p:txBody>
+      </p:sp>
+      <p:sp>
+        <p:nvSpPr>
+          <p:cNvPr id="4" name="Slide Image Placeholder 3"/>
+          <p:cNvSpPr>
+            <a:spLocks noGrp="1" noRot="1" noChangeAspect="1"/>
+          </p:cNvSpPr>
+          <p:nvPr>
+            <p:ph type="sldImg" idx="2"/>
+          </p:nvPr>
+        </p:nvSpPr>
+        <p:spPr>
+          <a:xfrm>
+            <a:off x="685800" y="1143000"/>
+            <a:ext cx="5486400" cy="3086100"/>
+          </a:xfrm>
+          <a:prstGeom prst="rect">
+            <a:avLst/>
+          </a:prstGeom>
+          <a:noFill/>
+          <a:ln w="12700">
+            <a:solidFill>
+              <a:prstClr val="black"/>
+            </a:solidFill>
+          </a:ln>
+        </p:spPr>
+        <p:txBody>
+          <a:bodyPr vert="horz" lIns="91440" tIns="45720" rIns="91440" bIns="45720" rtlCol="0" anchor="ctr"/>
+          <a:lstStyle/>
+          <a:p>
+            <a:endParaRPr lang="en-US"/>
+          </a:p>
+        </p:txBody>
+      </p:sp>
+      <p:sp>
+        <p:nvSpPr>
+          <p:cNvPr id="5" name="Notes Placeholder 4"/>
+          <p:cNvSpPr>
+            <a:spLocks noGrp="1"/>
+          </p:cNvSpPr>
+          <p:nvPr>
+            <p:ph type="body" sz="quarter" idx="3"/>
+          </p:nvPr>
+        </p:nvSpPr>
+        <p:spPr>
+          <a:xfrm>
+            <a:off x="685800" y="4400550"/>
+            <a:ext cx="5486400" cy="3600450"/>
+          </a:xfrm>
+          <a:prstGeom prst="rect">
+            <a:avLst/>
+          </a:prstGeom>
+        </p:spPr>
+        <p:txBody>
+          <a:bodyPr vert="horz" lIns="91440" tIns="45720" rIns="91440" bIns="45720" rtlCol="0"/>
+          <a:lstStyle/>
+          <a:p>
+            <a:pPr lvl="0"/>
+            <a:r>
+              <a:rPr lang="en-US"/>
+              <a:t>Click to edit Master text styles</a:t>
+            </a:r>
+          </a:p>
+          <a:p>
+            <a:pPr lvl="1"/>
+            <a:r>
+              <a:rPr lang="en-US"/>
+              <a:t>Second level</a:t>
+            </a:r>
+          </a:p>
+          <a:p>
+            <a:pPr lvl="2"/>
+            <a:r>
+              <a:rPr lang="en-US"/>
+              <a:t>Third level</a:t>
+            </a:r>
+          </a:p>
+          <a:p>
+            <a:pPr lvl="3"/>
+            <a:r>
+              <a:rPr lang="en-US"/>
+              <a:t>Fourth level</a:t>
+            </a:r>
+          </a:p>
+          <a:p>
+            <a:pPr lvl="4"/>
+            <a:r>
+              <a:rPr lang="en-US"/>
+              <a:t>Fifth level</a:t>
+            </a:r>
+          </a:p>
+        </p:txBody>
+      </p:sp>
+      <p:sp>
+        <p:nvSpPr>
+          <p:cNvPr id="6" name="Footer Placeholder 5"/>
+          <p:cNvSpPr>
+            <a:spLocks noGrp="1"/>
+          </p:cNvSpPr>
+          <p:nvPr>
+            <p:ph type="ftr" sz="quarter" idx="4"/>
+          </p:nvPr>
+        </p:nvSpPr>
+        <p:spPr>
+          <a:xfrm>
+            <a:off x="0" y="8685213"/>
+            <a:ext cx="2971800" cy="458787"/>
+          </a:xfrm>
+          <a:prstGeom prst="rect">
+            <a:avLst/>
+          </a:prstGeom>
+        </p:spPr>
+        <p:txBody>
+          <a:bodyPr vert="horz" lIns="91440" tIns="45720" rIns="91440" bIns="45720" rtlCol="0" anchor="b"/>
+          <a:lstStyle>
+            <a:lvl1pPr algn="l">
+              <a:defRPr sz="1200"/>
+            </a:lvl1pPr>
+          </a:lstStyle>
+          <a:p>
+            <a:endParaRPr lang="en-US"/>
+          </a:p>
+        </p:txBody>
+      </p:sp>
+      <p:sp>
+        <p:nvSpPr>
+          <p:cNvPr id="7" name="Slide Number Placeholder 6"/>
+          <p:cNvSpPr>
+            <a:spLocks noGrp="1"/>
+          </p:cNvSpPr>
+          <p:nvPr>
+            <p:ph type="sldNum" sz="quarter" idx="5"/>
+          </p:nvPr>
+        </p:nvSpPr>
+        <p:spPr>
+          <a:xfrm>
+            <a:off x="3884613" y="8685213"/>
+            <a:ext cx="2971800" cy="458787"/>
+          </a:xfrm>
+          <a:prstGeom prst="rect">
+            <a:avLst/>
+          </a:prstGeom>
+        </p:spPr>
+        <p:txBody>
+          <a:bodyPr vert="horz" lIns="91440" tIns="45720" rIns="91440" bIns="45720" rtlCol="0" anchor="b"/>
+          <a:lstStyle>
+            <a:lvl1pPr algn="r">
+              <a:defRPr sz="1200"/>
+            </a:lvl1pPr>
+          </a:lstStyle>
+          <a:p>
+            <a:fld id="{CE5E9CC1-C706-0F49-92D6-E571CC5EEA8F}" type="slidenum">
+              <a:rPr lang="en-US"/>
+              <a:t>‹#›</a:t>
+            </a:fld>
+            <a:endParaRPr lang="en-US"/>
+          </a:p>
+        </p:txBody>
+      </p:sp>
     </p:spTree>
     <p:extLst>
       <p:ext uri="{BB962C8B-B14F-4D97-AF65-F5344CB8AC3E}">
-        <p14:creationId xmlns:p14="http://schemas.microsoft.com/office/powerpoint/2010/main" val="2868133325"/>
+        <p14:creationId xmlns:p14="http://schemas.microsoft.com/office/powerpoint/2010/main" val="1024086991"/>
       </p:ext>
     </p:extLst>
   </p:cSld>
@@ -297,6 +516,7 @@
               <a:rPr lang="en-US" dirty="0"/>
               <a:t>Пів року тому компанія підняла ціну на 42.9%, бо тест показав, що конверсія не впала. CEO не бачить цих відсотків у виручці. Я перевірив повний ланцюжок: конверсію, LTV, фактичний Revenue і окупність реклами. Коротка відповідь: гроші виросли, але в 17 разів слабше за обіцянку, а в Європі нова ціна взагалі шкодить.</a:t>
             </a:r>
+            <a:endParaRPr lang="en-US" dirty="0"/>
           </a:p>
         </p:txBody>
       </p:sp>
@@ -384,6 +604,7 @@
               <a:rPr lang="en-US" dirty="0"/>
               <a:t>У розрізі регіонів вся проблема сидить у Європі: мінус 2.3% LTV. Штати і Other у плюсі, хоч і далеко від обіцянки. Це той самий регіон, де обвалився апсел — реакція ринку на ціну послідовна.</a:t>
             </a:r>
+            <a:endParaRPr lang="en-US" dirty="0"/>
           </a:p>
         </p:txBody>
       </p:sp>
@@ -469,8 +690,9 @@
           <a:p>
             <a:r>
               <a:rPr lang="en-US" dirty="0"/>
-              <a:t>Третє питання: скільки грошей. Рахую по датах фактичних списань. Порівняно зі світом без підвищення компанія у плюсі на 93 тисячі — рішення не провальне. Але обіцянка +42.9% коштувала б +584 тисячі. Отримали 16% обіцяного.</a:t>
-            </a:r>
+              <a:t>Третє питання: скільки грошей. Тут два різні питання, і я їх розділяю: повна календарна каса за вікно — звірена в ноутбуці по всіх списаннях; а для чесного порівняння цін беру зіставні когорти вікна — стартерів 26.01–16.03 та їхні списання. Порівняно зі світом без підвищення компанія у плюсі на 93 тисячі — рішення не провальне. Але обіцянка +42.9% коштувала б +584 тисячі, отримали 16% обіцяного. Оцінка — на спостережених платниках; конверсію тріал-платіж по армах дані не показують.</a:t>
+            </a:r>
+            <a:endParaRPr lang="en-US" dirty="0"/>
           </a:p>
         </p:txBody>
       </p:sp>
@@ -556,8 +778,9 @@
           <a:p>
             <a:r>
               <a:rPr lang="en-US" dirty="0"/>
-              <a:t>Останнє питання — окупність залучення. Скарга маркетингу підтверджена і локалізована: подорожчав лише Facebook, і лише в армі з реальною ціною 9.99 — в A/A-регіоні росту немає. Підсумковий ROAS: у EU окупність погіршилась, у USA — покращилась. Все окупається, питання лише де нова ціна зробила гірше. Відповідь — EU.</a:t>
-            </a:r>
+              <a:t>Останнє питання — окупність залучення. По регіонах: у EU окупність погіршилась з обох боків дробу, в USA — покращилась. Але канальний розріз показує головне: Google-EU нижче одиниці на обох цінах — це збитковий канал незалежно від цінового рішення, окремий кандидат на оптимізацію закупівлі. Щодо CPC: дорожчим у test-армі був лише Facebook; формулюю це як кореляцію — узгоджену з value-based bidding — а не доведену причинність. Застереження: канального LTV у даних немає, цінність переношу з регіон-ціна.</a:t>
+            </a:r>
+            <a:endParaRPr lang="en-US" dirty="0"/>
           </a:p>
         </p:txBody>
       </p:sp>
@@ -643,8 +866,9 @@
           <a:p>
             <a:r>
               <a:rPr lang="en-US" dirty="0"/>
-              <a:t>Підсумок. Диференціювати ціни: Європі нова ціна шкодить — відкат або тест проміжної. Штатам — лишити. Tier1 — спершу полагодити доставку ціни, він нову ціну ще не бачив. І процесний висновок: цінові рішення ухвалювати за повною економікою, а не за однією метрикою. Дякую — готовий до питань.</a:t>
-            </a:r>
+              <a:t>Підсумок. Диференціювати ціни: у Європі нова ціна знижує і цінність юзера, і окупність — відкат або тест проміжної ціни; конкретний рівень (наприклад 7.99) — гіпотеза для наступного тесту, а не розрахунок. Штатам — лишити 9.99. Tier1 — спершу полагодити доставку ціни, він нову ціну ще не бачив. І процесний висновок: цінові рішення ухвалювати за повною економікою — апсел, retention, рефанди, CAC — а не за однією метрикою. Дякую — готовий до питань.</a:t>
+            </a:r>
+            <a:endParaRPr lang="en-US" dirty="0"/>
           </a:p>
         </p:txBody>
       </p:sp>
@@ -732,6 +956,7 @@
               <a:rPr lang="en-US" dirty="0"/>
               <a:t>Контекст: рішення ухвалили за однією метрикою — конверсією. Одночасно три команди скаржаться на симптоми. Моє завдання — перевірити рішення по всьому ланцюжку грошей.</a:t>
             </a:r>
+            <a:endParaRPr lang="en-US" dirty="0"/>
           </a:p>
         </p:txBody>
       </p:sp>
@@ -819,6 +1044,7 @@
               <a:rPr lang="en-US" dirty="0"/>
               <a:t>Якщо запам'ятати один слайд — цей. LTV виріс на 2.5% замість 42.9%. Грошей за вікно отримали 16% від обіцяного приросту. А в Європі нова ціна знищує цінність юзера — там LTV нижчий, ніж на старій ціні.</a:t>
             </a:r>
+            <a:endParaRPr lang="en-US" dirty="0"/>
           </a:p>
         </p:txBody>
       </p:sp>
@@ -906,6 +1132,7 @@
               <a:rPr lang="en-US" dirty="0"/>
               <a:t>Чотири проблеми даних знайдено і виправлено. Найцінніша — контамінація Tier1: регіон не отримав нову ціну, тож став природним A/A-контролем. Він тричі підтвердив, що методологія чиста: скрізь, де ефекту бути не повинно, його й немає.</a:t>
             </a:r>
+            <a:endParaRPr lang="en-US" dirty="0"/>
           </a:p>
         </p:txBody>
       </p:sp>
@@ -991,8 +1218,9 @@
           <a:p>
             <a:r>
               <a:rPr lang="en-US" dirty="0"/>
-              <a:t>Перше питання кейсу: чи правильно тоді прочитали тест? Так — конверсія в покупку не змінилась, підтверджую z-тестами. Різниці скрізь у межах шуму, і в A/A-групі «ефект» навіть більший, ніж у реальних порівняннях. Але це була єдина метрика, яку вони дивились.</a:t>
-            </a:r>
+              <a:t>Перше питання кейсу: чи правильно тоді прочитали тест? Формулюю акуратно: статистично значущого погіршення конверсії не виявлено, а довірчий інтервал виключає падіння більше ніж 0.17 пункта в EU і 0.33 в USA. Тобто помітного падіння точно немає — у цій частині компанія була права. Але це була єдина метрика, яку вони дивились.</a:t>
+            </a:r>
+            <a:endParaRPr lang="en-US" dirty="0"/>
           </a:p>
         </p:txBody>
       </p:sp>
@@ -1080,6 +1308,7 @@
               <a:rPr lang="en-US" dirty="0"/>
               <a:t>А ось що не перевірили. Апсел показують лише покупцям, і в EU його attach упав з 24.6% до 16.4% — мінус третина, p менше 0.0001. Це перший механізм, через який +42.9% не могли справдитись.</a:t>
             </a:r>
+            <a:endParaRPr lang="en-US" dirty="0"/>
           </a:p>
         </p:txBody>
       </p:sp>
@@ -1165,8 +1394,9 @@
           <a:p>
             <a:r>
               <a:rPr lang="en-US" dirty="0"/>
-              <a:t>Важливий момент для очікувань: третина виручки покупця — фіксований апсел $15, який з ціною не росте. Тому навіть в ідеальному світі максимум був +28-30%, а не +42.9%. Частина «недобору» — не проблема, а хибний бенчмарк.</a:t>
-            </a:r>
+              <a:t>Важливий момент для очікувань: п'ята частина цінності юзера — фіксований апсел $15, який з ціною не росте. Тому навіть без жодних змін поведінки максимум був близько +34%, а не +42.9%. Частина «недобору» — не проблема бізнесу, а хибний бенчмарк. Рахую на зрілій когорті розкатки, узгоджено з водоспадом LTV на наступному слайді.</a:t>
+            </a:r>
+            <a:endParaRPr lang="en-US" dirty="0"/>
           </a:p>
         </p:txBody>
       </p:sp>
@@ -1254,6 +1484,7 @@
               <a:rPr lang="en-US" dirty="0"/>
               <a:t>Друге питання кейсу — LTV на 1.5 місяця, з рефандами, чарджбеками і апселом. Наївне очікування $24.71, факт $17.72. Водоспад показує внесок кожної причини: retention коштує вчетверо дорожче за все інше. Скарга сапорту реальна, але фінансово другорядна.</a:t>
             </a:r>
+            <a:endParaRPr lang="en-US" dirty="0"/>
           </a:p>
         </p:txBody>
       </p:sp>
@@ -1341,6 +1572,7 @@
               <a:rPr lang="en-US" dirty="0"/>
               <a:t>Ось він — головний механізм. До другого списання на старій ціні доживає 49%, на новій — 31%. Я перевірив по тижневих когортах: розрив стабільний, це системна поведінка, а не разовий сплеск.</a:t>
             </a:r>
+            <a:endParaRPr lang="en-US" dirty="0"/>
           </a:p>
         </p:txBody>
       </p:sp>
@@ -1413,11 +1645,6 @@
 <file path=ppt/slideMasters/slideMaster1.xml><?xml version="1.0" encoding="utf-8"?>
 <p:sldMaster xmlns:a="http://schemas.openxmlformats.org/drawingml/2006/main" xmlns:r="http://schemas.openxmlformats.org/officeDocument/2006/relationships" xmlns:p="http://schemas.openxmlformats.org/presentationml/2006/main">
   <p:cSld>
-    <p:bg>
-      <p:bgRef idx="1001">
-        <a:schemeClr val="bg1"/>
-      </p:bgRef>
-    </p:bg>
     <p:spTree>
       <p:nvGrpSpPr>
         <p:cNvPr id="1" name=""/>
@@ -1700,7 +1927,6 @@
         <a:solidFill>
           <a:srgbClr val="14212B"/>
         </a:solidFill>
-        <a:effectLst/>
       </p:bgPr>
     </p:bg>
     <p:spTree>
@@ -1738,7 +1964,7 @@
           <a:bodyPr wrap="square" lIns="0" tIns="0" rIns="0" bIns="0" rtlCol="0" anchor="ctr"/>
           <a:lstStyle/>
           <a:p>
-            <a:pPr marL="0" indent="0">
+            <a:pPr indent="0" marL="0">
               <a:lnSpc>
                 <a:spcPts val="5200"/>
               </a:lnSpc>
@@ -1758,7 +1984,7 @@
             <a:endParaRPr lang="en-US" sz="4400" dirty="0"/>
           </a:p>
           <a:p>
-            <a:pPr marL="0" indent="0">
+            <a:pPr indent="0" marL="0">
               <a:lnSpc>
                 <a:spcPts val="5200"/>
               </a:lnSpc>
@@ -1800,7 +2026,7 @@
           <a:bodyPr wrap="square" lIns="0" tIns="0" rIns="0" bIns="0" rtlCol="0" anchor="ctr"/>
           <a:lstStyle/>
           <a:p>
-            <a:pPr marL="0" indent="0">
+            <a:pPr indent="0" marL="0">
               <a:buNone/>
             </a:pPr>
             <a:r>
@@ -1839,7 +2065,7 @@
           <a:bodyPr wrap="square" lIns="0" tIns="0" rIns="0" bIns="0" rtlCol="0" anchor="ctr"/>
           <a:lstStyle/>
           <a:p>
-            <a:pPr marL="0" indent="0">
+            <a:pPr indent="0" marL="0">
               <a:buNone/>
             </a:pPr>
             <a:r>
@@ -1878,7 +2104,7 @@
           <a:bodyPr wrap="square" lIns="0" tIns="0" rIns="0" bIns="0" rtlCol="0" anchor="ctr"/>
           <a:lstStyle/>
           <a:p>
-            <a:pPr marL="0" indent="0">
+            <a:pPr indent="0" marL="0">
               <a:buNone/>
             </a:pPr>
             <a:r>
@@ -1917,7 +2143,7 @@
           <a:bodyPr wrap="square" lIns="0" tIns="0" rIns="0" bIns="0" rtlCol="0" anchor="ctr"/>
           <a:lstStyle/>
           <a:p>
-            <a:pPr marL="0" indent="0">
+            <a:pPr indent="0" marL="0">
               <a:buNone/>
             </a:pPr>
             <a:r>
@@ -1956,7 +2182,7 @@
           <a:bodyPr wrap="square" lIns="0" tIns="0" rIns="0" bIns="0" rtlCol="0" anchor="ctr"/>
           <a:lstStyle/>
           <a:p>
-            <a:pPr marL="0" indent="0">
+            <a:pPr indent="0" marL="0">
               <a:buNone/>
             </a:pPr>
             <a:r>
@@ -1968,7 +2194,7 @@
                 <a:ea typeface="Calibri" pitchFamily="34" charset="-122"/>
                 <a:cs typeface="Calibri" pitchFamily="34" charset="-120"/>
               </a:rPr>
-              <a:t>отримали</a:t>
+              <a:t>отримали (ріст LTV49)</a:t>
             </a:r>
             <a:endParaRPr lang="en-US" sz="1400" dirty="0"/>
           </a:p>
@@ -1995,7 +2221,7 @@
           <a:bodyPr wrap="square" lIns="0" tIns="0" rIns="0" bIns="0" rtlCol="0" anchor="ctr"/>
           <a:lstStyle/>
           <a:p>
-            <a:pPr marL="0" indent="0">
+            <a:pPr indent="0" marL="0">
               <a:buNone/>
             </a:pPr>
             <a:r>
@@ -2057,13 +2283,6 @@
           </a:solidFill>
           <a:ln/>
         </p:spPr>
-        <p:txBody>
-          <a:bodyPr/>
-          <a:lstStyle/>
-          <a:p>
-            <a:endParaRPr lang="uk-UA"/>
-          </a:p>
-        </p:txBody>
       </p:sp>
       <p:sp>
         <p:nvSpPr>
@@ -2086,11 +2305,11 @@
           <a:bodyPr wrap="square" lIns="0" tIns="0" rIns="0" bIns="0" rtlCol="0" anchor="ctr"/>
           <a:lstStyle/>
           <a:p>
-            <a:pPr marL="0" indent="0">
-              <a:buNone/>
-            </a:pPr>
-            <a:r>
-              <a:rPr lang="en-US" sz="1200" b="1" kern="0" spc="200" dirty="0">
+            <a:pPr indent="0" marL="0">
+              <a:buNone/>
+            </a:pPr>
+            <a:r>
+              <a:rPr lang="en-US" sz="1200" b="1" spc="200" kern="0" dirty="0">
                 <a:solidFill>
                   <a:srgbClr val="D55E00"/>
                 </a:solidFill>
@@ -2125,7 +2344,7 @@
           <a:bodyPr wrap="square" lIns="0" tIns="0" rIns="0" bIns="0" rtlCol="0" anchor="ctr"/>
           <a:lstStyle/>
           <a:p>
-            <a:pPr marL="0" indent="0">
+            <a:pPr indent="0" marL="0">
               <a:buNone/>
             </a:pPr>
             <a:r>
@@ -2145,14 +2364,14 @@
       </p:sp>
       <p:pic>
         <p:nvPicPr>
-          <p:cNvPr id="5" name="Image 0" descr="C:\Users\Miller\AppData\Local\Temp\claude\C--Users-Miller-Desktop-amo-case-nepop\aec1882d-a317-45bb-b012-96f699d178f4\scratchpad\pptx_build\c_ltv_region.png"/>
+          <p:cNvPr id="5" name="Image 0" descr="C:\Users\Miller\AppData\Local\Temp\claude\C--Users-Miller-Desktop-amo-case-nepop\aec1882d-a317-45bb-b012-96f699d178f4\scratchpad\pptx_build\c_ltv_region.png">    </p:cNvPr>
           <p:cNvPicPr>
             <a:picLocks noChangeAspect="1"/>
           </p:cNvPicPr>
           <p:nvPr/>
         </p:nvPicPr>
         <p:blipFill>
-          <a:blip r:embed="rId3"/>
+          <a:blip r:embed="rId1"/>
           <a:stretch>
             <a:fillRect/>
           </a:stretch>
@@ -2188,7 +2407,7 @@
           <a:bodyPr wrap="square" lIns="0" tIns="0" rIns="0" bIns="0" rtlCol="0" anchor="ctr"/>
           <a:lstStyle/>
           <a:p>
-            <a:pPr marL="0" indent="0">
+            <a:pPr indent="0" marL="0">
               <a:buNone/>
             </a:pPr>
             <a:r>
@@ -2227,7 +2446,7 @@
           <a:bodyPr wrap="square" lIns="0" tIns="0" rIns="0" bIns="0" rtlCol="0" anchor="ctr"/>
           <a:lstStyle/>
           <a:p>
-            <a:pPr marL="0" indent="0">
+            <a:pPr indent="0" marL="0">
               <a:buNone/>
             </a:pPr>
             <a:r>
@@ -2239,7 +2458,7 @@
                 <a:ea typeface="Calibri" pitchFamily="34" charset="-122"/>
                 <a:cs typeface="Calibri" pitchFamily="34" charset="-120"/>
               </a:rPr>
-              <a:t>LTV на 9.99 НИЖЧИЙ, ніж на 6.99 — нова ціна в EU збиткова відносно старої</a:t>
+              <a:t>LTV на 9.99 нижчий: −$0.40/юзера, 95% CI [−0.71; −0.09] — зниження статистично підтверджене</a:t>
             </a:r>
             <a:endParaRPr lang="en-US" sz="1350" dirty="0"/>
           </a:p>
@@ -2266,7 +2485,7 @@
           <a:bodyPr wrap="square" rtlCol="0" anchor="t"/>
           <a:lstStyle/>
           <a:p>
-            <a:pPr marL="0" indent="0">
+            <a:pPr indent="0" marL="0">
               <a:spcAft>
                 <a:spcPts val="400"/>
               </a:spcAft>
@@ -2286,7 +2505,7 @@
             <a:endParaRPr lang="en-US" sz="1400" dirty="0"/>
           </a:p>
           <a:p>
-            <a:pPr marL="0" indent="0">
+            <a:pPr indent="0" marL="0">
               <a:spcAft>
                 <a:spcPts val="1000"/>
               </a:spcAft>
@@ -2306,7 +2525,7 @@
             <a:endParaRPr lang="en-US" sz="1400" dirty="0"/>
           </a:p>
           <a:p>
-            <a:pPr marL="0" indent="0">
+            <a:pPr indent="0" marL="0">
               <a:buNone/>
             </a:pPr>
             <a:r>
@@ -2368,13 +2587,6 @@
           </a:solidFill>
           <a:ln/>
         </p:spPr>
-        <p:txBody>
-          <a:bodyPr/>
-          <a:lstStyle/>
-          <a:p>
-            <a:endParaRPr lang="uk-UA"/>
-          </a:p>
-        </p:txBody>
       </p:sp>
       <p:sp>
         <p:nvSpPr>
@@ -2397,11 +2609,11 @@
           <a:bodyPr wrap="square" lIns="0" tIns="0" rIns="0" bIns="0" rtlCol="0" anchor="ctr"/>
           <a:lstStyle/>
           <a:p>
-            <a:pPr marL="0" indent="0">
-              <a:buNone/>
-            </a:pPr>
-            <a:r>
-              <a:rPr lang="en-US" sz="1200" b="1" kern="0" spc="200" dirty="0">
+            <a:pPr indent="0" marL="0">
+              <a:buNone/>
+            </a:pPr>
+            <a:r>
+              <a:rPr lang="en-US" sz="1200" b="1" spc="200" kern="0" dirty="0">
                 <a:solidFill>
                   <a:srgbClr val="0072B2"/>
                 </a:solidFill>
@@ -2436,7 +2648,7 @@
           <a:bodyPr wrap="square" lIns="0" tIns="0" rIns="0" bIns="0" rtlCol="0" anchor="ctr"/>
           <a:lstStyle/>
           <a:p>
-            <a:pPr marL="0" indent="0">
+            <a:pPr indent="0" marL="0">
               <a:buNone/>
             </a:pPr>
             <a:r>
@@ -2456,14 +2668,14 @@
       </p:sp>
       <p:pic>
         <p:nvPicPr>
-          <p:cNvPr id="5" name="Image 0" descr="C:\Users\Miller\AppData\Local\Temp\claude\C--Users-Miller-Desktop-amo-case-nepop\aec1882d-a317-45bb-b012-96f699d178f4\scratchpad\pptx_build\c_worlds.png"/>
+          <p:cNvPr id="5" name="Image 0" descr="C:\Users\Miller\AppData\Local\Temp\claude\C--Users-Miller-Desktop-amo-case-nepop\aec1882d-a317-45bb-b012-96f699d178f4\scratchpad\pptx_build\c_worlds.png">    </p:cNvPr>
           <p:cNvPicPr>
             <a:picLocks noChangeAspect="1"/>
           </p:cNvPicPr>
           <p:nvPr/>
         </p:nvPicPr>
         <p:blipFill>
-          <a:blip r:embed="rId3"/>
+          <a:blip r:embed="rId1"/>
           <a:stretch>
             <a:fillRect/>
           </a:stretch>
@@ -2499,7 +2711,7 @@
           <a:bodyPr wrap="square" rtlCol="0" anchor="t"/>
           <a:lstStyle/>
           <a:p>
-            <a:pPr marL="0" indent="0">
+            <a:pPr indent="0" marL="0">
               <a:buNone/>
             </a:pPr>
             <a:r>
@@ -2516,7 +2728,7 @@
             <a:endParaRPr lang="en-US" sz="3000" dirty="0"/>
           </a:p>
           <a:p>
-            <a:pPr marL="0" indent="0">
+            <a:pPr indent="0" marL="0">
               <a:spcAft>
                 <a:spcPts val="1400"/>
               </a:spcAft>
@@ -2536,7 +2748,7 @@
             <a:endParaRPr lang="en-US" sz="3000" dirty="0"/>
           </a:p>
           <a:p>
-            <a:pPr marL="0" indent="0">
+            <a:pPr indent="0" marL="0">
               <a:buNone/>
             </a:pPr>
             <a:r>
@@ -2553,7 +2765,7 @@
             <a:endParaRPr lang="en-US" sz="3000" dirty="0"/>
           </a:p>
           <a:p>
-            <a:pPr marL="0" indent="0">
+            <a:pPr indent="0" marL="0">
               <a:buNone/>
             </a:pPr>
             <a:r>
@@ -2615,13 +2827,6 @@
           </a:solidFill>
           <a:ln/>
         </p:spPr>
-        <p:txBody>
-          <a:bodyPr/>
-          <a:lstStyle/>
-          <a:p>
-            <a:endParaRPr lang="uk-UA"/>
-          </a:p>
-        </p:txBody>
       </p:sp>
       <p:sp>
         <p:nvSpPr>
@@ -2644,11 +2849,11 @@
           <a:bodyPr wrap="square" lIns="0" tIns="0" rIns="0" bIns="0" rtlCol="0" anchor="ctr"/>
           <a:lstStyle/>
           <a:p>
-            <a:pPr marL="0" indent="0">
-              <a:buNone/>
-            </a:pPr>
-            <a:r>
-              <a:rPr lang="en-US" sz="1200" b="1" kern="0" spc="200" dirty="0">
+            <a:pPr indent="0" marL="0">
+              <a:buNone/>
+            </a:pPr>
+            <a:r>
+              <a:rPr lang="en-US" sz="1200" b="1" spc="200" kern="0" dirty="0">
                 <a:solidFill>
                   <a:srgbClr val="0072B2"/>
                 </a:solidFill>
@@ -2683,7 +2888,7 @@
           <a:bodyPr wrap="square" lIns="0" tIns="0" rIns="0" bIns="0" rtlCol="0" anchor="ctr"/>
           <a:lstStyle/>
           <a:p>
-            <a:pPr marL="0" indent="0">
+            <a:pPr indent="0" marL="0">
               <a:buNone/>
             </a:pPr>
             <a:r>
@@ -2695,7 +2900,7 @@
                 <a:ea typeface="Calibri" pitchFamily="34" charset="-122"/>
                 <a:cs typeface="Calibri" pitchFamily="34" charset="-120"/>
               </a:rPr>
-              <a:t>ROAS: EU гіршає з обох боків, USA — росте</a:t>
+              <a:t>ROAS: регіони окупні, але Google-EU — ні</a:t>
             </a:r>
             <a:endParaRPr lang="en-US" sz="3000" dirty="0"/>
           </a:p>
@@ -2703,14 +2908,14 @@
       </p:sp>
       <p:pic>
         <p:nvPicPr>
-          <p:cNvPr id="5" name="Image 0" descr="C:\Users\Miller\AppData\Local\Temp\claude\C--Users-Miller-Desktop-amo-case-nepop\aec1882d-a317-45bb-b012-96f699d178f4\scratchpad\pptx_build\c_roas.png"/>
+          <p:cNvPr id="5" name="Image 0" descr="C:\Users\Miller\AppData\Local\Temp\claude\C--Users-Miller-Desktop-amo-case-nepop\aec1882d-a317-45bb-b012-96f699d178f4\scratchpad\pptx_build\c_roas.png">    </p:cNvPr>
           <p:cNvPicPr>
             <a:picLocks noChangeAspect="1"/>
           </p:cNvPicPr>
           <p:nvPr/>
         </p:nvPicPr>
         <p:blipFill>
-          <a:blip r:embed="rId3"/>
+          <a:blip r:embed="rId1"/>
           <a:stretch>
             <a:fillRect/>
           </a:stretch>
@@ -2718,46 +2923,1768 @@
         <p:spPr>
           <a:xfrm>
             <a:off x="457200" y="1691640"/>
-            <a:ext cx="5623560" cy="2880360"/>
+            <a:ext cx="5760720" cy="2944368"/>
           </a:xfrm>
           <a:prstGeom prst="rect">
             <a:avLst/>
           </a:prstGeom>
         </p:spPr>
       </p:pic>
-      <p:pic>
-        <p:nvPicPr>
-          <p:cNvPr id="6" name="Image 1" descr="C:\Users\Miller\AppData\Local\Temp\claude\C--Users-Miller-Desktop-amo-case-nepop\aec1882d-a317-45bb-b012-96f699d178f4\scratchpad\pptx_build\c_cpc.png"/>
-          <p:cNvPicPr>
-            <a:picLocks noChangeAspect="1"/>
-          </p:cNvPicPr>
-          <p:nvPr/>
-        </p:nvPicPr>
-        <p:blipFill>
-          <a:blip r:embed="rId4"/>
-          <a:stretch>
-            <a:fillRect/>
-          </a:stretch>
-        </p:blipFill>
-        <p:spPr>
-          <a:xfrm>
-            <a:off x="6172200" y="1691640"/>
-            <a:ext cx="5623560" cy="2880360"/>
+      <p:sp>
+        <p:nvSpPr>
+          <p:cNvPr id="6" name="Text 3"/>
+          <p:cNvSpPr/>
+          <p:nvPr/>
+        </p:nvSpPr>
+        <p:spPr>
+          <a:xfrm>
+            <a:off x="6492240" y="1691640"/>
+            <a:ext cx="5120640" cy="320040"/>
           </a:xfrm>
           <a:prstGeom prst="rect">
             <a:avLst/>
           </a:prstGeom>
-        </p:spPr>
-      </p:pic>
-      <p:sp>
-        <p:nvSpPr>
-          <p:cNvPr id="7" name="Text 3"/>
-          <p:cNvSpPr/>
-          <p:nvPr/>
-        </p:nvSpPr>
-        <p:spPr>
-          <a:xfrm>
-            <a:off x="548640" y="4846320"/>
+          <a:noFill/>
+          <a:ln/>
+        </p:spPr>
+        <p:txBody>
+          <a:bodyPr wrap="square" lIns="0" tIns="0" rIns="0" bIns="0" rtlCol="0" anchor="ctr"/>
+          <a:lstStyle/>
+          <a:p>
+            <a:pPr indent="0" marL="0">
+              <a:buNone/>
+            </a:pPr>
+            <a:r>
+              <a:rPr lang="en-US" sz="1300" b="1" dirty="0">
+                <a:solidFill>
+                  <a:srgbClr val="26313B"/>
+                </a:solidFill>
+                <a:latin typeface="Calibri" pitchFamily="34" charset="0"/>
+                <a:ea typeface="Calibri" pitchFamily="34" charset="-122"/>
+                <a:cs typeface="Calibri" pitchFamily="34" charset="-120"/>
+              </a:rPr>
+              <a:t>ROAS49 по каналах:</a:t>
+            </a:r>
+            <a:endParaRPr lang="en-US" sz="1300" dirty="0"/>
+          </a:p>
+        </p:txBody>
+      </p:sp>
+      <p:graphicFrame>
+        <p:nvGraphicFramePr>
+          <p:cNvPr id="13" name="Table 0"/>
+          <p:cNvGraphicFramePr>
+            <a:graphicFrameLocks noGrp="1"/>
+          </p:cNvGraphicFramePr>
+          <p:nvPr>
+            <p:extLst>
+              <p:ext uri="{D42A27DB-BD31-4B8C-83A1-F6EECF244321}">
+                <p14:modId xmlns:p14="http://schemas.microsoft.com/office/powerpoint/2010/main" val="1579011935"/>
+              </p:ext>
+            </p:extLst>
+          </p:nvPr>
+        </p:nvGraphicFramePr>
+        <p:xfrm>
+          <a:off x="6492240" y="2057400"/>
+          <a:ext cx="5166360" cy="914400"/>
+        </p:xfrm>
+        <a:graphic>
+          <a:graphicData uri="http://schemas.openxmlformats.org/drawingml/2006/table">
+            <a:tbl>
+              <a:tblPr/>
+              <a:tblGrid>
+                <a:gridCol w="1033272"/>
+                <a:gridCol w="1033272"/>
+                <a:gridCol w="1033272"/>
+                <a:gridCol w="1033272"/>
+                <a:gridCol w="1033272"/>
+              </a:tblGrid>
+              <a:tr h="438912">
+                <a:tc>
+                  <a:txBody>
+                    <a:bodyPr/>
+                    <a:lstStyle/>
+                    <a:p>
+                      <a:pPr algn="l" indent="0" marL="0">
+                        <a:buNone/>
+                      </a:pPr>
+                      <a:r>
+                        <a:rPr lang="en-US" sz="1250" b="1" dirty="0">
+                          <a:solidFill>
+                            <a:srgbClr val="26313B"/>
+                          </a:solidFill>
+                          <a:latin typeface="Calibri" pitchFamily="34" charset="0"/>
+                          <a:ea typeface="Calibri" pitchFamily="34" charset="-122"/>
+                          <a:cs typeface="Calibri" pitchFamily="34" charset="-120"/>
+                        </a:rPr>
+                        <a:t>Канал</a:t>
+                      </a:r>
+                      <a:endParaRPr lang="en-US" sz="1250" dirty="0">
+                        <a:latin typeface="Calibri" charset="0"/>
+                        <a:ea typeface="Calibri" charset="0"/>
+                        <a:cs typeface="Calibri" charset="0"/>
+                      </a:endParaRPr>
+                    </a:p>
+                  </a:txBody>
+                  <a:tcPr marL="91440" marR="91440" marT="45720" marB="45720" anchor="ctr">
+                    <a:lnL w="6350" cap="flat" cmpd="sng" algn="ctr">
+                      <a:solidFill>
+                        <a:srgbClr val="DDDDDD"/>
+                      </a:solidFill>
+                      <a:prstDash val="solid"/>
+                      <a:round/>
+                      <a:headEnd type="none" w="med" len="med"/>
+                      <a:tailEnd type="none" w="med" len="med"/>
+                    </a:lnL>
+                    <a:lnR w="6350" cap="flat" cmpd="sng" algn="ctr">
+                      <a:solidFill>
+                        <a:srgbClr val="DDDDDD"/>
+                      </a:solidFill>
+                      <a:prstDash val="solid"/>
+                      <a:round/>
+                      <a:headEnd type="none" w="med" len="med"/>
+                      <a:tailEnd type="none" w="med" len="med"/>
+                    </a:lnR>
+                    <a:lnT w="6350" cap="flat" cmpd="sng" algn="ctr">
+                      <a:solidFill>
+                        <a:srgbClr val="DDDDDD"/>
+                      </a:solidFill>
+                      <a:prstDash val="solid"/>
+                      <a:round/>
+                      <a:headEnd type="none" w="med" len="med"/>
+                      <a:tailEnd type="none" w="med" len="med"/>
+                    </a:lnT>
+                    <a:lnB w="6350" cap="flat" cmpd="sng" algn="ctr">
+                      <a:solidFill>
+                        <a:srgbClr val="DDDDDD"/>
+                      </a:solidFill>
+                      <a:prstDash val="solid"/>
+                      <a:round/>
+                      <a:headEnd type="none" w="med" len="med"/>
+                      <a:tailEnd type="none" w="med" len="med"/>
+                    </a:lnB>
+                  </a:tcPr>
+                </a:tc>
+                <a:tc>
+                  <a:txBody>
+                    <a:bodyPr/>
+                    <a:lstStyle/>
+                    <a:p>
+                      <a:pPr algn="l" indent="0" marL="0">
+                        <a:buNone/>
+                      </a:pPr>
+                      <a:r>
+                        <a:rPr lang="en-US" sz="1250" b="1" dirty="0">
+                          <a:solidFill>
+                            <a:srgbClr val="26313B"/>
+                          </a:solidFill>
+                          <a:latin typeface="Calibri" pitchFamily="34" charset="0"/>
+                          <a:ea typeface="Calibri" pitchFamily="34" charset="-122"/>
+                          <a:cs typeface="Calibri" pitchFamily="34" charset="-120"/>
+                        </a:rPr>
+                        <a:t>EU 6.99</a:t>
+                      </a:r>
+                      <a:endParaRPr lang="en-US" sz="1250" dirty="0">
+                        <a:latin typeface="Calibri" charset="0"/>
+                        <a:ea typeface="Calibri" charset="0"/>
+                        <a:cs typeface="Calibri" charset="0"/>
+                      </a:endParaRPr>
+                    </a:p>
+                  </a:txBody>
+                  <a:tcPr marL="91440" marR="91440" marT="45720" marB="45720" anchor="ctr">
+                    <a:lnL w="6350" cap="flat" cmpd="sng" algn="ctr">
+                      <a:solidFill>
+                        <a:srgbClr val="DDDDDD"/>
+                      </a:solidFill>
+                      <a:prstDash val="solid"/>
+                      <a:round/>
+                      <a:headEnd type="none" w="med" len="med"/>
+                      <a:tailEnd type="none" w="med" len="med"/>
+                    </a:lnL>
+                    <a:lnR w="6350" cap="flat" cmpd="sng" algn="ctr">
+                      <a:solidFill>
+                        <a:srgbClr val="DDDDDD"/>
+                      </a:solidFill>
+                      <a:prstDash val="solid"/>
+                      <a:round/>
+                      <a:headEnd type="none" w="med" len="med"/>
+                      <a:tailEnd type="none" w="med" len="med"/>
+                    </a:lnR>
+                    <a:lnT w="6350" cap="flat" cmpd="sng" algn="ctr">
+                      <a:solidFill>
+                        <a:srgbClr val="DDDDDD"/>
+                      </a:solidFill>
+                      <a:prstDash val="solid"/>
+                      <a:round/>
+                      <a:headEnd type="none" w="med" len="med"/>
+                      <a:tailEnd type="none" w="med" len="med"/>
+                    </a:lnT>
+                    <a:lnB w="6350" cap="flat" cmpd="sng" algn="ctr">
+                      <a:solidFill>
+                        <a:srgbClr val="DDDDDD"/>
+                      </a:solidFill>
+                      <a:prstDash val="solid"/>
+                      <a:round/>
+                      <a:headEnd type="none" w="med" len="med"/>
+                      <a:tailEnd type="none" w="med" len="med"/>
+                    </a:lnB>
+                  </a:tcPr>
+                </a:tc>
+                <a:tc>
+                  <a:txBody>
+                    <a:bodyPr/>
+                    <a:lstStyle/>
+                    <a:p>
+                      <a:pPr algn="l" indent="0" marL="0">
+                        <a:buNone/>
+                      </a:pPr>
+                      <a:r>
+                        <a:rPr lang="en-US" sz="1250" b="1" dirty="0">
+                          <a:solidFill>
+                            <a:srgbClr val="26313B"/>
+                          </a:solidFill>
+                          <a:latin typeface="Calibri" pitchFamily="34" charset="0"/>
+                          <a:ea typeface="Calibri" pitchFamily="34" charset="-122"/>
+                          <a:cs typeface="Calibri" pitchFamily="34" charset="-120"/>
+                        </a:rPr>
+                        <a:t>EU 9.99</a:t>
+                      </a:r>
+                      <a:endParaRPr lang="en-US" sz="1250" dirty="0">
+                        <a:latin typeface="Calibri" charset="0"/>
+                        <a:ea typeface="Calibri" charset="0"/>
+                        <a:cs typeface="Calibri" charset="0"/>
+                      </a:endParaRPr>
+                    </a:p>
+                  </a:txBody>
+                  <a:tcPr marL="91440" marR="91440" marT="45720" marB="45720" anchor="ctr">
+                    <a:lnL w="6350" cap="flat" cmpd="sng" algn="ctr">
+                      <a:solidFill>
+                        <a:srgbClr val="DDDDDD"/>
+                      </a:solidFill>
+                      <a:prstDash val="solid"/>
+                      <a:round/>
+                      <a:headEnd type="none" w="med" len="med"/>
+                      <a:tailEnd type="none" w="med" len="med"/>
+                    </a:lnL>
+                    <a:lnR w="6350" cap="flat" cmpd="sng" algn="ctr">
+                      <a:solidFill>
+                        <a:srgbClr val="DDDDDD"/>
+                      </a:solidFill>
+                      <a:prstDash val="solid"/>
+                      <a:round/>
+                      <a:headEnd type="none" w="med" len="med"/>
+                      <a:tailEnd type="none" w="med" len="med"/>
+                    </a:lnR>
+                    <a:lnT w="6350" cap="flat" cmpd="sng" algn="ctr">
+                      <a:solidFill>
+                        <a:srgbClr val="DDDDDD"/>
+                      </a:solidFill>
+                      <a:prstDash val="solid"/>
+                      <a:round/>
+                      <a:headEnd type="none" w="med" len="med"/>
+                      <a:tailEnd type="none" w="med" len="med"/>
+                    </a:lnT>
+                    <a:lnB w="6350" cap="flat" cmpd="sng" algn="ctr">
+                      <a:solidFill>
+                        <a:srgbClr val="DDDDDD"/>
+                      </a:solidFill>
+                      <a:prstDash val="solid"/>
+                      <a:round/>
+                      <a:headEnd type="none" w="med" len="med"/>
+                      <a:tailEnd type="none" w="med" len="med"/>
+                    </a:lnB>
+                  </a:tcPr>
+                </a:tc>
+                <a:tc>
+                  <a:txBody>
+                    <a:bodyPr/>
+                    <a:lstStyle/>
+                    <a:p>
+                      <a:pPr algn="l" indent="0" marL="0">
+                        <a:buNone/>
+                      </a:pPr>
+                      <a:r>
+                        <a:rPr lang="en-US" sz="1250" b="1" dirty="0">
+                          <a:solidFill>
+                            <a:srgbClr val="26313B"/>
+                          </a:solidFill>
+                          <a:latin typeface="Calibri" pitchFamily="34" charset="0"/>
+                          <a:ea typeface="Calibri" pitchFamily="34" charset="-122"/>
+                          <a:cs typeface="Calibri" pitchFamily="34" charset="-120"/>
+                        </a:rPr>
+                        <a:t>USA 6.99</a:t>
+                      </a:r>
+                      <a:endParaRPr lang="en-US" sz="1250" dirty="0">
+                        <a:latin typeface="Calibri" charset="0"/>
+                        <a:ea typeface="Calibri" charset="0"/>
+                        <a:cs typeface="Calibri" charset="0"/>
+                      </a:endParaRPr>
+                    </a:p>
+                  </a:txBody>
+                  <a:tcPr marL="91440" marR="91440" marT="45720" marB="45720" anchor="ctr">
+                    <a:lnL w="6350" cap="flat" cmpd="sng" algn="ctr">
+                      <a:solidFill>
+                        <a:srgbClr val="DDDDDD"/>
+                      </a:solidFill>
+                      <a:prstDash val="solid"/>
+                      <a:round/>
+                      <a:headEnd type="none" w="med" len="med"/>
+                      <a:tailEnd type="none" w="med" len="med"/>
+                    </a:lnL>
+                    <a:lnR w="6350" cap="flat" cmpd="sng" algn="ctr">
+                      <a:solidFill>
+                        <a:srgbClr val="DDDDDD"/>
+                      </a:solidFill>
+                      <a:prstDash val="solid"/>
+                      <a:round/>
+                      <a:headEnd type="none" w="med" len="med"/>
+                      <a:tailEnd type="none" w="med" len="med"/>
+                    </a:lnR>
+                    <a:lnT w="6350" cap="flat" cmpd="sng" algn="ctr">
+                      <a:solidFill>
+                        <a:srgbClr val="DDDDDD"/>
+                      </a:solidFill>
+                      <a:prstDash val="solid"/>
+                      <a:round/>
+                      <a:headEnd type="none" w="med" len="med"/>
+                      <a:tailEnd type="none" w="med" len="med"/>
+                    </a:lnT>
+                    <a:lnB w="6350" cap="flat" cmpd="sng" algn="ctr">
+                      <a:solidFill>
+                        <a:srgbClr val="DDDDDD"/>
+                      </a:solidFill>
+                      <a:prstDash val="solid"/>
+                      <a:round/>
+                      <a:headEnd type="none" w="med" len="med"/>
+                      <a:tailEnd type="none" w="med" len="med"/>
+                    </a:lnB>
+                  </a:tcPr>
+                </a:tc>
+                <a:tc>
+                  <a:txBody>
+                    <a:bodyPr/>
+                    <a:lstStyle/>
+                    <a:p>
+                      <a:pPr algn="l" indent="0" marL="0">
+                        <a:buNone/>
+                      </a:pPr>
+                      <a:r>
+                        <a:rPr lang="en-US" sz="1250" b="1" dirty="0">
+                          <a:solidFill>
+                            <a:srgbClr val="26313B"/>
+                          </a:solidFill>
+                          <a:latin typeface="Calibri" pitchFamily="34" charset="0"/>
+                          <a:ea typeface="Calibri" pitchFamily="34" charset="-122"/>
+                          <a:cs typeface="Calibri" pitchFamily="34" charset="-120"/>
+                        </a:rPr>
+                        <a:t>USA 9.99</a:t>
+                      </a:r>
+                      <a:endParaRPr lang="en-US" sz="1250" dirty="0">
+                        <a:latin typeface="Calibri" charset="0"/>
+                        <a:ea typeface="Calibri" charset="0"/>
+                        <a:cs typeface="Calibri" charset="0"/>
+                      </a:endParaRPr>
+                    </a:p>
+                  </a:txBody>
+                  <a:tcPr marL="91440" marR="91440" marT="45720" marB="45720" anchor="ctr">
+                    <a:lnL w="6350" cap="flat" cmpd="sng" algn="ctr">
+                      <a:solidFill>
+                        <a:srgbClr val="DDDDDD"/>
+                      </a:solidFill>
+                      <a:prstDash val="solid"/>
+                      <a:round/>
+                      <a:headEnd type="none" w="med" len="med"/>
+                      <a:tailEnd type="none" w="med" len="med"/>
+                    </a:lnL>
+                    <a:lnR w="6350" cap="flat" cmpd="sng" algn="ctr">
+                      <a:solidFill>
+                        <a:srgbClr val="DDDDDD"/>
+                      </a:solidFill>
+                      <a:prstDash val="solid"/>
+                      <a:round/>
+                      <a:headEnd type="none" w="med" len="med"/>
+                      <a:tailEnd type="none" w="med" len="med"/>
+                    </a:lnR>
+                    <a:lnT w="6350" cap="flat" cmpd="sng" algn="ctr">
+                      <a:solidFill>
+                        <a:srgbClr val="DDDDDD"/>
+                      </a:solidFill>
+                      <a:prstDash val="solid"/>
+                      <a:round/>
+                      <a:headEnd type="none" w="med" len="med"/>
+                      <a:tailEnd type="none" w="med" len="med"/>
+                    </a:lnT>
+                    <a:lnB w="6350" cap="flat" cmpd="sng" algn="ctr">
+                      <a:solidFill>
+                        <a:srgbClr val="DDDDDD"/>
+                      </a:solidFill>
+                      <a:prstDash val="solid"/>
+                      <a:round/>
+                      <a:headEnd type="none" w="med" len="med"/>
+                      <a:tailEnd type="none" w="med" len="med"/>
+                    </a:lnB>
+                  </a:tcPr>
+                </a:tc>
+              </a:tr>
+              <a:tr h="438912">
+                <a:tc>
+                  <a:txBody>
+                    <a:bodyPr/>
+                    <a:lstStyle/>
+                    <a:p>
+                      <a:pPr algn="l" indent="0" marL="0">
+                        <a:buNone/>
+                      </a:pPr>
+                      <a:r>
+                        <a:rPr lang="en-US" sz="1250" dirty="0">
+                          <a:solidFill>
+                            <a:srgbClr val="26313B"/>
+                          </a:solidFill>
+                          <a:latin typeface="Calibri" pitchFamily="34" charset="0"/>
+                          <a:ea typeface="Calibri" pitchFamily="34" charset="-122"/>
+                          <a:cs typeface="Calibri" pitchFamily="34" charset="-120"/>
+                        </a:rPr>
+                        <a:t>Facebook</a:t>
+                      </a:r>
+                      <a:endParaRPr lang="en-US" sz="1250" dirty="0">
+                        <a:latin typeface="Calibri" charset="0"/>
+                        <a:ea typeface="Calibri" charset="0"/>
+                        <a:cs typeface="Calibri" charset="0"/>
+                      </a:endParaRPr>
+                    </a:p>
+                  </a:txBody>
+                  <a:tcPr marL="91440" marR="91440" marT="45720" marB="45720" anchor="ctr">
+                    <a:lnL w="6350" cap="flat" cmpd="sng" algn="ctr">
+                      <a:solidFill>
+                        <a:srgbClr val="DDDDDD"/>
+                      </a:solidFill>
+                      <a:prstDash val="solid"/>
+                      <a:round/>
+                      <a:headEnd type="none" w="med" len="med"/>
+                      <a:tailEnd type="none" w="med" len="med"/>
+                    </a:lnL>
+                    <a:lnR w="6350" cap="flat" cmpd="sng" algn="ctr">
+                      <a:solidFill>
+                        <a:srgbClr val="DDDDDD"/>
+                      </a:solidFill>
+                      <a:prstDash val="solid"/>
+                      <a:round/>
+                      <a:headEnd type="none" w="med" len="med"/>
+                      <a:tailEnd type="none" w="med" len="med"/>
+                    </a:lnR>
+                    <a:lnT w="6350" cap="flat" cmpd="sng" algn="ctr">
+                      <a:solidFill>
+                        <a:srgbClr val="DDDDDD"/>
+                      </a:solidFill>
+                      <a:prstDash val="solid"/>
+                      <a:round/>
+                      <a:headEnd type="none" w="med" len="med"/>
+                      <a:tailEnd type="none" w="med" len="med"/>
+                    </a:lnT>
+                    <a:lnB w="6350" cap="flat" cmpd="sng" algn="ctr">
+                      <a:solidFill>
+                        <a:srgbClr val="DDDDDD"/>
+                      </a:solidFill>
+                      <a:prstDash val="solid"/>
+                      <a:round/>
+                      <a:headEnd type="none" w="med" len="med"/>
+                      <a:tailEnd type="none" w="med" len="med"/>
+                    </a:lnB>
+                  </a:tcPr>
+                </a:tc>
+                <a:tc>
+                  <a:txBody>
+                    <a:bodyPr/>
+                    <a:lstStyle/>
+                    <a:p>
+                      <a:pPr algn="l" indent="0" marL="0">
+                        <a:buNone/>
+                      </a:pPr>
+                      <a:r>
+                        <a:rPr lang="en-US" sz="1250" dirty="0">
+                          <a:solidFill>
+                            <a:srgbClr val="26313B"/>
+                          </a:solidFill>
+                          <a:latin typeface="Calibri" pitchFamily="34" charset="0"/>
+                          <a:ea typeface="Calibri" pitchFamily="34" charset="-122"/>
+                          <a:cs typeface="Calibri" pitchFamily="34" charset="-120"/>
+                        </a:rPr>
+                        <a:t>1.47</a:t>
+                      </a:r>
+                      <a:endParaRPr lang="en-US" sz="1250" dirty="0">
+                        <a:latin typeface="Calibri" charset="0"/>
+                        <a:ea typeface="Calibri" charset="0"/>
+                        <a:cs typeface="Calibri" charset="0"/>
+                      </a:endParaRPr>
+                    </a:p>
+                  </a:txBody>
+                  <a:tcPr marL="91440" marR="91440" marT="45720" marB="45720" anchor="ctr">
+                    <a:lnL w="6350" cap="flat" cmpd="sng" algn="ctr">
+                      <a:solidFill>
+                        <a:srgbClr val="DDDDDD"/>
+                      </a:solidFill>
+                      <a:prstDash val="solid"/>
+                      <a:round/>
+                      <a:headEnd type="none" w="med" len="med"/>
+                      <a:tailEnd type="none" w="med" len="med"/>
+                    </a:lnL>
+                    <a:lnR w="6350" cap="flat" cmpd="sng" algn="ctr">
+                      <a:solidFill>
+                        <a:srgbClr val="DDDDDD"/>
+                      </a:solidFill>
+                      <a:prstDash val="solid"/>
+                      <a:round/>
+                      <a:headEnd type="none" w="med" len="med"/>
+                      <a:tailEnd type="none" w="med" len="med"/>
+                    </a:lnR>
+                    <a:lnT w="6350" cap="flat" cmpd="sng" algn="ctr">
+                      <a:solidFill>
+                        <a:srgbClr val="DDDDDD"/>
+                      </a:solidFill>
+                      <a:prstDash val="solid"/>
+                      <a:round/>
+                      <a:headEnd type="none" w="med" len="med"/>
+                      <a:tailEnd type="none" w="med" len="med"/>
+                    </a:lnT>
+                    <a:lnB w="6350" cap="flat" cmpd="sng" algn="ctr">
+                      <a:solidFill>
+                        <a:srgbClr val="DDDDDD"/>
+                      </a:solidFill>
+                      <a:prstDash val="solid"/>
+                      <a:round/>
+                      <a:headEnd type="none" w="med" len="med"/>
+                      <a:tailEnd type="none" w="med" len="med"/>
+                    </a:lnB>
+                  </a:tcPr>
+                </a:tc>
+                <a:tc>
+                  <a:txBody>
+                    <a:bodyPr/>
+                    <a:lstStyle/>
+                    <a:p>
+                      <a:pPr algn="l" indent="0" marL="0">
+                        <a:buNone/>
+                      </a:pPr>
+                      <a:r>
+                        <a:rPr lang="en-US" sz="1250" dirty="0">
+                          <a:solidFill>
+                            <a:srgbClr val="26313B"/>
+                          </a:solidFill>
+                          <a:latin typeface="Calibri" pitchFamily="34" charset="0"/>
+                          <a:ea typeface="Calibri" pitchFamily="34" charset="-122"/>
+                          <a:cs typeface="Calibri" pitchFamily="34" charset="-120"/>
+                        </a:rPr>
+                        <a:t>1.24</a:t>
+                      </a:r>
+                      <a:endParaRPr lang="en-US" sz="1250" dirty="0">
+                        <a:latin typeface="Calibri" charset="0"/>
+                        <a:ea typeface="Calibri" charset="0"/>
+                        <a:cs typeface="Calibri" charset="0"/>
+                      </a:endParaRPr>
+                    </a:p>
+                  </a:txBody>
+                  <a:tcPr marL="91440" marR="91440" marT="45720" marB="45720" anchor="ctr">
+                    <a:lnL w="6350" cap="flat" cmpd="sng" algn="ctr">
+                      <a:solidFill>
+                        <a:srgbClr val="DDDDDD"/>
+                      </a:solidFill>
+                      <a:prstDash val="solid"/>
+                      <a:round/>
+                      <a:headEnd type="none" w="med" len="med"/>
+                      <a:tailEnd type="none" w="med" len="med"/>
+                    </a:lnL>
+                    <a:lnR w="6350" cap="flat" cmpd="sng" algn="ctr">
+                      <a:solidFill>
+                        <a:srgbClr val="DDDDDD"/>
+                      </a:solidFill>
+                      <a:prstDash val="solid"/>
+                      <a:round/>
+                      <a:headEnd type="none" w="med" len="med"/>
+                      <a:tailEnd type="none" w="med" len="med"/>
+                    </a:lnR>
+                    <a:lnT w="6350" cap="flat" cmpd="sng" algn="ctr">
+                      <a:solidFill>
+                        <a:srgbClr val="DDDDDD"/>
+                      </a:solidFill>
+                      <a:prstDash val="solid"/>
+                      <a:round/>
+                      <a:headEnd type="none" w="med" len="med"/>
+                      <a:tailEnd type="none" w="med" len="med"/>
+                    </a:lnT>
+                    <a:lnB w="6350" cap="flat" cmpd="sng" algn="ctr">
+                      <a:solidFill>
+                        <a:srgbClr val="DDDDDD"/>
+                      </a:solidFill>
+                      <a:prstDash val="solid"/>
+                      <a:round/>
+                      <a:headEnd type="none" w="med" len="med"/>
+                      <a:tailEnd type="none" w="med" len="med"/>
+                    </a:lnB>
+                  </a:tcPr>
+                </a:tc>
+                <a:tc>
+                  <a:txBody>
+                    <a:bodyPr/>
+                    <a:lstStyle/>
+                    <a:p>
+                      <a:pPr algn="l" indent="0" marL="0">
+                        <a:buNone/>
+                      </a:pPr>
+                      <a:r>
+                        <a:rPr lang="en-US" sz="1250" dirty="0">
+                          <a:solidFill>
+                            <a:srgbClr val="26313B"/>
+                          </a:solidFill>
+                          <a:latin typeface="Calibri" pitchFamily="34" charset="0"/>
+                          <a:ea typeface="Calibri" pitchFamily="34" charset="-122"/>
+                          <a:cs typeface="Calibri" pitchFamily="34" charset="-120"/>
+                        </a:rPr>
+                        <a:t>1.86</a:t>
+                      </a:r>
+                      <a:endParaRPr lang="en-US" sz="1250" dirty="0">
+                        <a:latin typeface="Calibri" charset="0"/>
+                        <a:ea typeface="Calibri" charset="0"/>
+                        <a:cs typeface="Calibri" charset="0"/>
+                      </a:endParaRPr>
+                    </a:p>
+                  </a:txBody>
+                  <a:tcPr marL="91440" marR="91440" marT="45720" marB="45720" anchor="ctr">
+                    <a:lnL w="6350" cap="flat" cmpd="sng" algn="ctr">
+                      <a:solidFill>
+                        <a:srgbClr val="DDDDDD"/>
+                      </a:solidFill>
+                      <a:prstDash val="solid"/>
+                      <a:round/>
+                      <a:headEnd type="none" w="med" len="med"/>
+                      <a:tailEnd type="none" w="med" len="med"/>
+                    </a:lnL>
+                    <a:lnR w="6350" cap="flat" cmpd="sng" algn="ctr">
+                      <a:solidFill>
+                        <a:srgbClr val="DDDDDD"/>
+                      </a:solidFill>
+                      <a:prstDash val="solid"/>
+                      <a:round/>
+                      <a:headEnd type="none" w="med" len="med"/>
+                      <a:tailEnd type="none" w="med" len="med"/>
+                    </a:lnR>
+                    <a:lnT w="6350" cap="flat" cmpd="sng" algn="ctr">
+                      <a:solidFill>
+                        <a:srgbClr val="DDDDDD"/>
+                      </a:solidFill>
+                      <a:prstDash val="solid"/>
+                      <a:round/>
+                      <a:headEnd type="none" w="med" len="med"/>
+                      <a:tailEnd type="none" w="med" len="med"/>
+                    </a:lnT>
+                    <a:lnB w="6350" cap="flat" cmpd="sng" algn="ctr">
+                      <a:solidFill>
+                        <a:srgbClr val="DDDDDD"/>
+                      </a:solidFill>
+                      <a:prstDash val="solid"/>
+                      <a:round/>
+                      <a:headEnd type="none" w="med" len="med"/>
+                      <a:tailEnd type="none" w="med" len="med"/>
+                    </a:lnB>
+                  </a:tcPr>
+                </a:tc>
+                <a:tc>
+                  <a:txBody>
+                    <a:bodyPr/>
+                    <a:lstStyle/>
+                    <a:p>
+                      <a:pPr algn="l" indent="0" marL="0">
+                        <a:buNone/>
+                      </a:pPr>
+                      <a:r>
+                        <a:rPr lang="en-US" sz="1250" dirty="0">
+                          <a:solidFill>
+                            <a:srgbClr val="26313B"/>
+                          </a:solidFill>
+                          <a:latin typeface="Calibri" pitchFamily="34" charset="0"/>
+                          <a:ea typeface="Calibri" pitchFamily="34" charset="-122"/>
+                          <a:cs typeface="Calibri" pitchFamily="34" charset="-120"/>
+                        </a:rPr>
+                        <a:t>2.00</a:t>
+                      </a:r>
+                      <a:endParaRPr lang="en-US" sz="1250" dirty="0">
+                        <a:latin typeface="Calibri" charset="0"/>
+                        <a:ea typeface="Calibri" charset="0"/>
+                        <a:cs typeface="Calibri" charset="0"/>
+                      </a:endParaRPr>
+                    </a:p>
+                  </a:txBody>
+                  <a:tcPr marL="91440" marR="91440" marT="45720" marB="45720" anchor="ctr">
+                    <a:lnL w="6350" cap="flat" cmpd="sng" algn="ctr">
+                      <a:solidFill>
+                        <a:srgbClr val="DDDDDD"/>
+                      </a:solidFill>
+                      <a:prstDash val="solid"/>
+                      <a:round/>
+                      <a:headEnd type="none" w="med" len="med"/>
+                      <a:tailEnd type="none" w="med" len="med"/>
+                    </a:lnL>
+                    <a:lnR w="6350" cap="flat" cmpd="sng" algn="ctr">
+                      <a:solidFill>
+                        <a:srgbClr val="DDDDDD"/>
+                      </a:solidFill>
+                      <a:prstDash val="solid"/>
+                      <a:round/>
+                      <a:headEnd type="none" w="med" len="med"/>
+                      <a:tailEnd type="none" w="med" len="med"/>
+                    </a:lnR>
+                    <a:lnT w="6350" cap="flat" cmpd="sng" algn="ctr">
+                      <a:solidFill>
+                        <a:srgbClr val="DDDDDD"/>
+                      </a:solidFill>
+                      <a:prstDash val="solid"/>
+                      <a:round/>
+                      <a:headEnd type="none" w="med" len="med"/>
+                      <a:tailEnd type="none" w="med" len="med"/>
+                    </a:lnT>
+                    <a:lnB w="6350" cap="flat" cmpd="sng" algn="ctr">
+                      <a:solidFill>
+                        <a:srgbClr val="DDDDDD"/>
+                      </a:solidFill>
+                      <a:prstDash val="solid"/>
+                      <a:round/>
+                      <a:headEnd type="none" w="med" len="med"/>
+                      <a:tailEnd type="none" w="med" len="med"/>
+                    </a:lnB>
+                  </a:tcPr>
+                </a:tc>
+              </a:tr>
+              <a:tr h="438912">
+                <a:tc>
+                  <a:txBody>
+                    <a:bodyPr/>
+                    <a:lstStyle/>
+                    <a:p>
+                      <a:pPr algn="l" indent="0" marL="0">
+                        <a:buNone/>
+                      </a:pPr>
+                      <a:r>
+                        <a:rPr lang="en-US" sz="1250" dirty="0">
+                          <a:solidFill>
+                            <a:srgbClr val="26313B"/>
+                          </a:solidFill>
+                          <a:latin typeface="Calibri" pitchFamily="34" charset="0"/>
+                          <a:ea typeface="Calibri" pitchFamily="34" charset="-122"/>
+                          <a:cs typeface="Calibri" pitchFamily="34" charset="-120"/>
+                        </a:rPr>
+                        <a:t>Google</a:t>
+                      </a:r>
+                      <a:endParaRPr lang="en-US" sz="1250" dirty="0">
+                        <a:latin typeface="Calibri" charset="0"/>
+                        <a:ea typeface="Calibri" charset="0"/>
+                        <a:cs typeface="Calibri" charset="0"/>
+                      </a:endParaRPr>
+                    </a:p>
+                  </a:txBody>
+                  <a:tcPr marL="91440" marR="91440" marT="45720" marB="45720" anchor="ctr">
+                    <a:lnL w="6350" cap="flat" cmpd="sng" algn="ctr">
+                      <a:solidFill>
+                        <a:srgbClr val="DDDDDD"/>
+                      </a:solidFill>
+                      <a:prstDash val="solid"/>
+                      <a:round/>
+                      <a:headEnd type="none" w="med" len="med"/>
+                      <a:tailEnd type="none" w="med" len="med"/>
+                    </a:lnL>
+                    <a:lnR w="6350" cap="flat" cmpd="sng" algn="ctr">
+                      <a:solidFill>
+                        <a:srgbClr val="DDDDDD"/>
+                      </a:solidFill>
+                      <a:prstDash val="solid"/>
+                      <a:round/>
+                      <a:headEnd type="none" w="med" len="med"/>
+                      <a:tailEnd type="none" w="med" len="med"/>
+                    </a:lnR>
+                    <a:lnT w="6350" cap="flat" cmpd="sng" algn="ctr">
+                      <a:solidFill>
+                        <a:srgbClr val="DDDDDD"/>
+                      </a:solidFill>
+                      <a:prstDash val="solid"/>
+                      <a:round/>
+                      <a:headEnd type="none" w="med" len="med"/>
+                      <a:tailEnd type="none" w="med" len="med"/>
+                    </a:lnT>
+                    <a:lnB w="6350" cap="flat" cmpd="sng" algn="ctr">
+                      <a:solidFill>
+                        <a:srgbClr val="DDDDDD"/>
+                      </a:solidFill>
+                      <a:prstDash val="solid"/>
+                      <a:round/>
+                      <a:headEnd type="none" w="med" len="med"/>
+                      <a:tailEnd type="none" w="med" len="med"/>
+                    </a:lnB>
+                  </a:tcPr>
+                </a:tc>
+                <a:tc>
+                  <a:txBody>
+                    <a:bodyPr/>
+                    <a:lstStyle/>
+                    <a:p>
+                      <a:pPr algn="l" indent="0" marL="0">
+                        <a:buNone/>
+                      </a:pPr>
+                      <a:r>
+                        <a:rPr lang="en-US" sz="1250" b="1" dirty="0">
+                          <a:solidFill>
+                            <a:srgbClr val="D55E00"/>
+                          </a:solidFill>
+                          <a:latin typeface="Calibri" pitchFamily="34" charset="0"/>
+                          <a:ea typeface="Calibri" pitchFamily="34" charset="-122"/>
+                          <a:cs typeface="Calibri" pitchFamily="34" charset="-120"/>
+                        </a:rPr>
+                        <a:t>0.83</a:t>
+                      </a:r>
+                      <a:endParaRPr lang="en-US" sz="1250" dirty="0">
+                        <a:latin typeface="Calibri" charset="0"/>
+                        <a:ea typeface="Calibri" charset="0"/>
+                        <a:cs typeface="Calibri" charset="0"/>
+                      </a:endParaRPr>
+                    </a:p>
+                  </a:txBody>
+                  <a:tcPr marL="91440" marR="91440" marT="45720" marB="45720" anchor="ctr">
+                    <a:lnL w="6350" cap="flat" cmpd="sng" algn="ctr">
+                      <a:solidFill>
+                        <a:srgbClr val="DDDDDD"/>
+                      </a:solidFill>
+                      <a:prstDash val="solid"/>
+                      <a:round/>
+                      <a:headEnd type="none" w="med" len="med"/>
+                      <a:tailEnd type="none" w="med" len="med"/>
+                    </a:lnL>
+                    <a:lnR w="6350" cap="flat" cmpd="sng" algn="ctr">
+                      <a:solidFill>
+                        <a:srgbClr val="DDDDDD"/>
+                      </a:solidFill>
+                      <a:prstDash val="solid"/>
+                      <a:round/>
+                      <a:headEnd type="none" w="med" len="med"/>
+                      <a:tailEnd type="none" w="med" len="med"/>
+                    </a:lnR>
+                    <a:lnT w="6350" cap="flat" cmpd="sng" algn="ctr">
+                      <a:solidFill>
+                        <a:srgbClr val="DDDDDD"/>
+                      </a:solidFill>
+                      <a:prstDash val="solid"/>
+                      <a:round/>
+                      <a:headEnd type="none" w="med" len="med"/>
+                      <a:tailEnd type="none" w="med" len="med"/>
+                    </a:lnT>
+                    <a:lnB w="6350" cap="flat" cmpd="sng" algn="ctr">
+                      <a:solidFill>
+                        <a:srgbClr val="DDDDDD"/>
+                      </a:solidFill>
+                      <a:prstDash val="solid"/>
+                      <a:round/>
+                      <a:headEnd type="none" w="med" len="med"/>
+                      <a:tailEnd type="none" w="med" len="med"/>
+                    </a:lnB>
+                  </a:tcPr>
+                </a:tc>
+                <a:tc>
+                  <a:txBody>
+                    <a:bodyPr/>
+                    <a:lstStyle/>
+                    <a:p>
+                      <a:pPr algn="l" indent="0" marL="0">
+                        <a:buNone/>
+                      </a:pPr>
+                      <a:r>
+                        <a:rPr lang="en-US" sz="1250" b="1" dirty="0">
+                          <a:solidFill>
+                            <a:srgbClr val="D55E00"/>
+                          </a:solidFill>
+                          <a:latin typeface="Calibri" pitchFamily="34" charset="0"/>
+                          <a:ea typeface="Calibri" pitchFamily="34" charset="-122"/>
+                          <a:cs typeface="Calibri" pitchFamily="34" charset="-120"/>
+                        </a:rPr>
+                        <a:t>0.89</a:t>
+                      </a:r>
+                      <a:endParaRPr lang="en-US" sz="1250" dirty="0">
+                        <a:latin typeface="Calibri" charset="0"/>
+                        <a:ea typeface="Calibri" charset="0"/>
+                        <a:cs typeface="Calibri" charset="0"/>
+                      </a:endParaRPr>
+                    </a:p>
+                  </a:txBody>
+                  <a:tcPr marL="91440" marR="91440" marT="45720" marB="45720" anchor="ctr">
+                    <a:lnL w="6350" cap="flat" cmpd="sng" algn="ctr">
+                      <a:solidFill>
+                        <a:srgbClr val="DDDDDD"/>
+                      </a:solidFill>
+                      <a:prstDash val="solid"/>
+                      <a:round/>
+                      <a:headEnd type="none" w="med" len="med"/>
+                      <a:tailEnd type="none" w="med" len="med"/>
+                    </a:lnL>
+                    <a:lnR w="6350" cap="flat" cmpd="sng" algn="ctr">
+                      <a:solidFill>
+                        <a:srgbClr val="DDDDDD"/>
+                      </a:solidFill>
+                      <a:prstDash val="solid"/>
+                      <a:round/>
+                      <a:headEnd type="none" w="med" len="med"/>
+                      <a:tailEnd type="none" w="med" len="med"/>
+                    </a:lnR>
+                    <a:lnT w="6350" cap="flat" cmpd="sng" algn="ctr">
+                      <a:solidFill>
+                        <a:srgbClr val="DDDDDD"/>
+                      </a:solidFill>
+                      <a:prstDash val="solid"/>
+                      <a:round/>
+                      <a:headEnd type="none" w="med" len="med"/>
+                      <a:tailEnd type="none" w="med" len="med"/>
+                    </a:lnT>
+                    <a:lnB w="6350" cap="flat" cmpd="sng" algn="ctr">
+                      <a:solidFill>
+                        <a:srgbClr val="DDDDDD"/>
+                      </a:solidFill>
+                      <a:prstDash val="solid"/>
+                      <a:round/>
+                      <a:headEnd type="none" w="med" len="med"/>
+                      <a:tailEnd type="none" w="med" len="med"/>
+                    </a:lnB>
+                  </a:tcPr>
+                </a:tc>
+                <a:tc>
+                  <a:txBody>
+                    <a:bodyPr/>
+                    <a:lstStyle/>
+                    <a:p>
+                      <a:pPr algn="l" indent="0" marL="0">
+                        <a:buNone/>
+                      </a:pPr>
+                      <a:r>
+                        <a:rPr lang="en-US" sz="1250" dirty="0">
+                          <a:solidFill>
+                            <a:srgbClr val="26313B"/>
+                          </a:solidFill>
+                          <a:latin typeface="Calibri" pitchFamily="34" charset="0"/>
+                          <a:ea typeface="Calibri" pitchFamily="34" charset="-122"/>
+                          <a:cs typeface="Calibri" pitchFamily="34" charset="-120"/>
+                        </a:rPr>
+                        <a:t>1.10</a:t>
+                      </a:r>
+                      <a:endParaRPr lang="en-US" sz="1250" dirty="0">
+                        <a:latin typeface="Calibri" charset="0"/>
+                        <a:ea typeface="Calibri" charset="0"/>
+                        <a:cs typeface="Calibri" charset="0"/>
+                      </a:endParaRPr>
+                    </a:p>
+                  </a:txBody>
+                  <a:tcPr marL="91440" marR="91440" marT="45720" marB="45720" anchor="ctr">
+                    <a:lnL w="6350" cap="flat" cmpd="sng" algn="ctr">
+                      <a:solidFill>
+                        <a:srgbClr val="DDDDDD"/>
+                      </a:solidFill>
+                      <a:prstDash val="solid"/>
+                      <a:round/>
+                      <a:headEnd type="none" w="med" len="med"/>
+                      <a:tailEnd type="none" w="med" len="med"/>
+                    </a:lnL>
+                    <a:lnR w="6350" cap="flat" cmpd="sng" algn="ctr">
+                      <a:solidFill>
+                        <a:srgbClr val="DDDDDD"/>
+                      </a:solidFill>
+                      <a:prstDash val="solid"/>
+                      <a:round/>
+                      <a:headEnd type="none" w="med" len="med"/>
+                      <a:tailEnd type="none" w="med" len="med"/>
+                    </a:lnR>
+                    <a:lnT w="6350" cap="flat" cmpd="sng" algn="ctr">
+                      <a:solidFill>
+                        <a:srgbClr val="DDDDDD"/>
+                      </a:solidFill>
+                      <a:prstDash val="solid"/>
+                      <a:round/>
+                      <a:headEnd type="none" w="med" len="med"/>
+                      <a:tailEnd type="none" w="med" len="med"/>
+                    </a:lnT>
+                    <a:lnB w="6350" cap="flat" cmpd="sng" algn="ctr">
+                      <a:solidFill>
+                        <a:srgbClr val="DDDDDD"/>
+                      </a:solidFill>
+                      <a:prstDash val="solid"/>
+                      <a:round/>
+                      <a:headEnd type="none" w="med" len="med"/>
+                      <a:tailEnd type="none" w="med" len="med"/>
+                    </a:lnB>
+                  </a:tcPr>
+                </a:tc>
+                <a:tc>
+                  <a:txBody>
+                    <a:bodyPr/>
+                    <a:lstStyle/>
+                    <a:p>
+                      <a:pPr algn="l" indent="0" marL="0">
+                        <a:buNone/>
+                      </a:pPr>
+                      <a:r>
+                        <a:rPr lang="en-US" sz="1250" dirty="0">
+                          <a:solidFill>
+                            <a:srgbClr val="26313B"/>
+                          </a:solidFill>
+                          <a:latin typeface="Calibri" pitchFamily="34" charset="0"/>
+                          <a:ea typeface="Calibri" pitchFamily="34" charset="-122"/>
+                          <a:cs typeface="Calibri" pitchFamily="34" charset="-120"/>
+                        </a:rPr>
+                        <a:t>1.46</a:t>
+                      </a:r>
+                      <a:endParaRPr lang="en-US" sz="1250" dirty="0">
+                        <a:latin typeface="Calibri" charset="0"/>
+                        <a:ea typeface="Calibri" charset="0"/>
+                        <a:cs typeface="Calibri" charset="0"/>
+                      </a:endParaRPr>
+                    </a:p>
+                  </a:txBody>
+                  <a:tcPr marL="91440" marR="91440" marT="45720" marB="45720" anchor="ctr">
+                    <a:lnL w="6350" cap="flat" cmpd="sng" algn="ctr">
+                      <a:solidFill>
+                        <a:srgbClr val="DDDDDD"/>
+                      </a:solidFill>
+                      <a:prstDash val="solid"/>
+                      <a:round/>
+                      <a:headEnd type="none" w="med" len="med"/>
+                      <a:tailEnd type="none" w="med" len="med"/>
+                    </a:lnL>
+                    <a:lnR w="6350" cap="flat" cmpd="sng" algn="ctr">
+                      <a:solidFill>
+                        <a:srgbClr val="DDDDDD"/>
+                      </a:solidFill>
+                      <a:prstDash val="solid"/>
+                      <a:round/>
+                      <a:headEnd type="none" w="med" len="med"/>
+                      <a:tailEnd type="none" w="med" len="med"/>
+                    </a:lnR>
+                    <a:lnT w="6350" cap="flat" cmpd="sng" algn="ctr">
+                      <a:solidFill>
+                        <a:srgbClr val="DDDDDD"/>
+                      </a:solidFill>
+                      <a:prstDash val="solid"/>
+                      <a:round/>
+                      <a:headEnd type="none" w="med" len="med"/>
+                      <a:tailEnd type="none" w="med" len="med"/>
+                    </a:lnT>
+                    <a:lnB w="6350" cap="flat" cmpd="sng" algn="ctr">
+                      <a:solidFill>
+                        <a:srgbClr val="DDDDDD"/>
+                      </a:solidFill>
+                      <a:prstDash val="solid"/>
+                      <a:round/>
+                      <a:headEnd type="none" w="med" len="med"/>
+                      <a:tailEnd type="none" w="med" len="med"/>
+                    </a:lnB>
+                  </a:tcPr>
+                </a:tc>
+              </a:tr>
+              <a:tr h="438912">
+                <a:tc>
+                  <a:txBody>
+                    <a:bodyPr/>
+                    <a:lstStyle/>
+                    <a:p>
+                      <a:pPr algn="l" indent="0" marL="0">
+                        <a:buNone/>
+                      </a:pPr>
+                      <a:r>
+                        <a:rPr lang="en-US" sz="1250" dirty="0">
+                          <a:solidFill>
+                            <a:srgbClr val="26313B"/>
+                          </a:solidFill>
+                          <a:latin typeface="Calibri" pitchFamily="34" charset="0"/>
+                          <a:ea typeface="Calibri" pitchFamily="34" charset="-122"/>
+                          <a:cs typeface="Calibri" pitchFamily="34" charset="-120"/>
+                        </a:rPr>
+                        <a:t>TikTok</a:t>
+                      </a:r>
+                      <a:endParaRPr lang="en-US" sz="1250" dirty="0">
+                        <a:latin typeface="Calibri" charset="0"/>
+                        <a:ea typeface="Calibri" charset="0"/>
+                        <a:cs typeface="Calibri" charset="0"/>
+                      </a:endParaRPr>
+                    </a:p>
+                  </a:txBody>
+                  <a:tcPr marL="91440" marR="91440" marT="45720" marB="45720" anchor="ctr">
+                    <a:lnL w="6350" cap="flat" cmpd="sng" algn="ctr">
+                      <a:solidFill>
+                        <a:srgbClr val="DDDDDD"/>
+                      </a:solidFill>
+                      <a:prstDash val="solid"/>
+                      <a:round/>
+                      <a:headEnd type="none" w="med" len="med"/>
+                      <a:tailEnd type="none" w="med" len="med"/>
+                    </a:lnL>
+                    <a:lnR w="6350" cap="flat" cmpd="sng" algn="ctr">
+                      <a:solidFill>
+                        <a:srgbClr val="DDDDDD"/>
+                      </a:solidFill>
+                      <a:prstDash val="solid"/>
+                      <a:round/>
+                      <a:headEnd type="none" w="med" len="med"/>
+                      <a:tailEnd type="none" w="med" len="med"/>
+                    </a:lnR>
+                    <a:lnT w="6350" cap="flat" cmpd="sng" algn="ctr">
+                      <a:solidFill>
+                        <a:srgbClr val="DDDDDD"/>
+                      </a:solidFill>
+                      <a:prstDash val="solid"/>
+                      <a:round/>
+                      <a:headEnd type="none" w="med" len="med"/>
+                      <a:tailEnd type="none" w="med" len="med"/>
+                    </a:lnT>
+                    <a:lnB w="6350" cap="flat" cmpd="sng" algn="ctr">
+                      <a:solidFill>
+                        <a:srgbClr val="DDDDDD"/>
+                      </a:solidFill>
+                      <a:prstDash val="solid"/>
+                      <a:round/>
+                      <a:headEnd type="none" w="med" len="med"/>
+                      <a:tailEnd type="none" w="med" len="med"/>
+                    </a:lnB>
+                  </a:tcPr>
+                </a:tc>
+                <a:tc>
+                  <a:txBody>
+                    <a:bodyPr/>
+                    <a:lstStyle/>
+                    <a:p>
+                      <a:pPr algn="l" indent="0" marL="0">
+                        <a:buNone/>
+                      </a:pPr>
+                      <a:r>
+                        <a:rPr lang="en-US" sz="1250" dirty="0">
+                          <a:solidFill>
+                            <a:srgbClr val="26313B"/>
+                          </a:solidFill>
+                          <a:latin typeface="Calibri" pitchFamily="34" charset="0"/>
+                          <a:ea typeface="Calibri" pitchFamily="34" charset="-122"/>
+                          <a:cs typeface="Calibri" pitchFamily="34" charset="-120"/>
+                        </a:rPr>
+                        <a:t>1.71</a:t>
+                      </a:r>
+                      <a:endParaRPr lang="en-US" sz="1250" dirty="0">
+                        <a:latin typeface="Calibri" charset="0"/>
+                        <a:ea typeface="Calibri" charset="0"/>
+                        <a:cs typeface="Calibri" charset="0"/>
+                      </a:endParaRPr>
+                    </a:p>
+                  </a:txBody>
+                  <a:tcPr marL="91440" marR="91440" marT="45720" marB="45720" anchor="ctr">
+                    <a:lnL w="6350" cap="flat" cmpd="sng" algn="ctr">
+                      <a:solidFill>
+                        <a:srgbClr val="DDDDDD"/>
+                      </a:solidFill>
+                      <a:prstDash val="solid"/>
+                      <a:round/>
+                      <a:headEnd type="none" w="med" len="med"/>
+                      <a:tailEnd type="none" w="med" len="med"/>
+                    </a:lnL>
+                    <a:lnR w="6350" cap="flat" cmpd="sng" algn="ctr">
+                      <a:solidFill>
+                        <a:srgbClr val="DDDDDD"/>
+                      </a:solidFill>
+                      <a:prstDash val="solid"/>
+                      <a:round/>
+                      <a:headEnd type="none" w="med" len="med"/>
+                      <a:tailEnd type="none" w="med" len="med"/>
+                    </a:lnR>
+                    <a:lnT w="6350" cap="flat" cmpd="sng" algn="ctr">
+                      <a:solidFill>
+                        <a:srgbClr val="DDDDDD"/>
+                      </a:solidFill>
+                      <a:prstDash val="solid"/>
+                      <a:round/>
+                      <a:headEnd type="none" w="med" len="med"/>
+                      <a:tailEnd type="none" w="med" len="med"/>
+                    </a:lnT>
+                    <a:lnB w="6350" cap="flat" cmpd="sng" algn="ctr">
+                      <a:solidFill>
+                        <a:srgbClr val="DDDDDD"/>
+                      </a:solidFill>
+                      <a:prstDash val="solid"/>
+                      <a:round/>
+                      <a:headEnd type="none" w="med" len="med"/>
+                      <a:tailEnd type="none" w="med" len="med"/>
+                    </a:lnB>
+                  </a:tcPr>
+                </a:tc>
+                <a:tc>
+                  <a:txBody>
+                    <a:bodyPr/>
+                    <a:lstStyle/>
+                    <a:p>
+                      <a:pPr algn="l" indent="0" marL="0">
+                        <a:buNone/>
+                      </a:pPr>
+                      <a:r>
+                        <a:rPr lang="en-US" sz="1250" dirty="0">
+                          <a:solidFill>
+                            <a:srgbClr val="26313B"/>
+                          </a:solidFill>
+                          <a:latin typeface="Calibri" pitchFamily="34" charset="0"/>
+                          <a:ea typeface="Calibri" pitchFamily="34" charset="-122"/>
+                          <a:cs typeface="Calibri" pitchFamily="34" charset="-120"/>
+                        </a:rPr>
+                        <a:t>1.55</a:t>
+                      </a:r>
+                      <a:endParaRPr lang="en-US" sz="1250" dirty="0">
+                        <a:latin typeface="Calibri" charset="0"/>
+                        <a:ea typeface="Calibri" charset="0"/>
+                        <a:cs typeface="Calibri" charset="0"/>
+                      </a:endParaRPr>
+                    </a:p>
+                  </a:txBody>
+                  <a:tcPr marL="91440" marR="91440" marT="45720" marB="45720" anchor="ctr">
+                    <a:lnL w="6350" cap="flat" cmpd="sng" algn="ctr">
+                      <a:solidFill>
+                        <a:srgbClr val="DDDDDD"/>
+                      </a:solidFill>
+                      <a:prstDash val="solid"/>
+                      <a:round/>
+                      <a:headEnd type="none" w="med" len="med"/>
+                      <a:tailEnd type="none" w="med" len="med"/>
+                    </a:lnL>
+                    <a:lnR w="6350" cap="flat" cmpd="sng" algn="ctr">
+                      <a:solidFill>
+                        <a:srgbClr val="DDDDDD"/>
+                      </a:solidFill>
+                      <a:prstDash val="solid"/>
+                      <a:round/>
+                      <a:headEnd type="none" w="med" len="med"/>
+                      <a:tailEnd type="none" w="med" len="med"/>
+                    </a:lnR>
+                    <a:lnT w="6350" cap="flat" cmpd="sng" algn="ctr">
+                      <a:solidFill>
+                        <a:srgbClr val="DDDDDD"/>
+                      </a:solidFill>
+                      <a:prstDash val="solid"/>
+                      <a:round/>
+                      <a:headEnd type="none" w="med" len="med"/>
+                      <a:tailEnd type="none" w="med" len="med"/>
+                    </a:lnT>
+                    <a:lnB w="6350" cap="flat" cmpd="sng" algn="ctr">
+                      <a:solidFill>
+                        <a:srgbClr val="DDDDDD"/>
+                      </a:solidFill>
+                      <a:prstDash val="solid"/>
+                      <a:round/>
+                      <a:headEnd type="none" w="med" len="med"/>
+                      <a:tailEnd type="none" w="med" len="med"/>
+                    </a:lnB>
+                  </a:tcPr>
+                </a:tc>
+                <a:tc>
+                  <a:txBody>
+                    <a:bodyPr/>
+                    <a:lstStyle/>
+                    <a:p>
+                      <a:pPr algn="l" indent="0" marL="0">
+                        <a:buNone/>
+                      </a:pPr>
+                      <a:r>
+                        <a:rPr lang="en-US" sz="1250" dirty="0">
+                          <a:solidFill>
+                            <a:srgbClr val="26313B"/>
+                          </a:solidFill>
+                          <a:latin typeface="Calibri" pitchFamily="34" charset="0"/>
+                          <a:ea typeface="Calibri" pitchFamily="34" charset="-122"/>
+                          <a:cs typeface="Calibri" pitchFamily="34" charset="-120"/>
+                        </a:rPr>
+                        <a:t>2.23</a:t>
+                      </a:r>
+                      <a:endParaRPr lang="en-US" sz="1250" dirty="0">
+                        <a:latin typeface="Calibri" charset="0"/>
+                        <a:ea typeface="Calibri" charset="0"/>
+                        <a:cs typeface="Calibri" charset="0"/>
+                      </a:endParaRPr>
+                    </a:p>
+                  </a:txBody>
+                  <a:tcPr marL="91440" marR="91440" marT="45720" marB="45720" anchor="ctr">
+                    <a:lnL w="6350" cap="flat" cmpd="sng" algn="ctr">
+                      <a:solidFill>
+                        <a:srgbClr val="DDDDDD"/>
+                      </a:solidFill>
+                      <a:prstDash val="solid"/>
+                      <a:round/>
+                      <a:headEnd type="none" w="med" len="med"/>
+                      <a:tailEnd type="none" w="med" len="med"/>
+                    </a:lnL>
+                    <a:lnR w="6350" cap="flat" cmpd="sng" algn="ctr">
+                      <a:solidFill>
+                        <a:srgbClr val="DDDDDD"/>
+                      </a:solidFill>
+                      <a:prstDash val="solid"/>
+                      <a:round/>
+                      <a:headEnd type="none" w="med" len="med"/>
+                      <a:tailEnd type="none" w="med" len="med"/>
+                    </a:lnR>
+                    <a:lnT w="6350" cap="flat" cmpd="sng" algn="ctr">
+                      <a:solidFill>
+                        <a:srgbClr val="DDDDDD"/>
+                      </a:solidFill>
+                      <a:prstDash val="solid"/>
+                      <a:round/>
+                      <a:headEnd type="none" w="med" len="med"/>
+                      <a:tailEnd type="none" w="med" len="med"/>
+                    </a:lnT>
+                    <a:lnB w="6350" cap="flat" cmpd="sng" algn="ctr">
+                      <a:solidFill>
+                        <a:srgbClr val="DDDDDD"/>
+                      </a:solidFill>
+                      <a:prstDash val="solid"/>
+                      <a:round/>
+                      <a:headEnd type="none" w="med" len="med"/>
+                      <a:tailEnd type="none" w="med" len="med"/>
+                    </a:lnB>
+                  </a:tcPr>
+                </a:tc>
+                <a:tc>
+                  <a:txBody>
+                    <a:bodyPr/>
+                    <a:lstStyle/>
+                    <a:p>
+                      <a:pPr algn="l" indent="0" marL="0">
+                        <a:buNone/>
+                      </a:pPr>
+                      <a:r>
+                        <a:rPr lang="en-US" sz="1250" dirty="0">
+                          <a:solidFill>
+                            <a:srgbClr val="26313B"/>
+                          </a:solidFill>
+                          <a:latin typeface="Calibri" pitchFamily="34" charset="0"/>
+                          <a:ea typeface="Calibri" pitchFamily="34" charset="-122"/>
+                          <a:cs typeface="Calibri" pitchFamily="34" charset="-120"/>
+                        </a:rPr>
+                        <a:t>2.38</a:t>
+                      </a:r>
+                      <a:endParaRPr lang="en-US" sz="1250" dirty="0">
+                        <a:latin typeface="Calibri" charset="0"/>
+                        <a:ea typeface="Calibri" charset="0"/>
+                        <a:cs typeface="Calibri" charset="0"/>
+                      </a:endParaRPr>
+                    </a:p>
+                  </a:txBody>
+                  <a:tcPr marL="91440" marR="91440" marT="45720" marB="45720" anchor="ctr">
+                    <a:lnL w="6350" cap="flat" cmpd="sng" algn="ctr">
+                      <a:solidFill>
+                        <a:srgbClr val="DDDDDD"/>
+                      </a:solidFill>
+                      <a:prstDash val="solid"/>
+                      <a:round/>
+                      <a:headEnd type="none" w="med" len="med"/>
+                      <a:tailEnd type="none" w="med" len="med"/>
+                    </a:lnL>
+                    <a:lnR w="6350" cap="flat" cmpd="sng" algn="ctr">
+                      <a:solidFill>
+                        <a:srgbClr val="DDDDDD"/>
+                      </a:solidFill>
+                      <a:prstDash val="solid"/>
+                      <a:round/>
+                      <a:headEnd type="none" w="med" len="med"/>
+                      <a:tailEnd type="none" w="med" len="med"/>
+                    </a:lnR>
+                    <a:lnT w="6350" cap="flat" cmpd="sng" algn="ctr">
+                      <a:solidFill>
+                        <a:srgbClr val="DDDDDD"/>
+                      </a:solidFill>
+                      <a:prstDash val="solid"/>
+                      <a:round/>
+                      <a:headEnd type="none" w="med" len="med"/>
+                      <a:tailEnd type="none" w="med" len="med"/>
+                    </a:lnT>
+                    <a:lnB w="6350" cap="flat" cmpd="sng" algn="ctr">
+                      <a:solidFill>
+                        <a:srgbClr val="DDDDDD"/>
+                      </a:solidFill>
+                      <a:prstDash val="solid"/>
+                      <a:round/>
+                      <a:headEnd type="none" w="med" len="med"/>
+                      <a:tailEnd type="none" w="med" len="med"/>
+                    </a:lnB>
+                  </a:tcPr>
+                </a:tc>
+              </a:tr>
+              <a:tr h="438912">
+                <a:tc>
+                  <a:txBody>
+                    <a:bodyPr/>
+                    <a:lstStyle/>
+                    <a:p>
+                      <a:pPr algn="l" indent="0" marL="0">
+                        <a:buNone/>
+                      </a:pPr>
+                      <a:r>
+                        <a:rPr lang="en-US" sz="1250" dirty="0">
+                          <a:solidFill>
+                            <a:srgbClr val="26313B"/>
+                          </a:solidFill>
+                          <a:latin typeface="Calibri" pitchFamily="34" charset="0"/>
+                          <a:ea typeface="Calibri" pitchFamily="34" charset="-122"/>
+                          <a:cs typeface="Calibri" pitchFamily="34" charset="-120"/>
+                        </a:rPr>
+                        <a:t>Organic</a:t>
+                      </a:r>
+                      <a:endParaRPr lang="en-US" sz="1250" dirty="0">
+                        <a:latin typeface="Calibri" charset="0"/>
+                        <a:ea typeface="Calibri" charset="0"/>
+                        <a:cs typeface="Calibri" charset="0"/>
+                      </a:endParaRPr>
+                    </a:p>
+                  </a:txBody>
+                  <a:tcPr marL="91440" marR="91440" marT="45720" marB="45720" anchor="ctr">
+                    <a:lnL w="6350" cap="flat" cmpd="sng" algn="ctr">
+                      <a:solidFill>
+                        <a:srgbClr val="DDDDDD"/>
+                      </a:solidFill>
+                      <a:prstDash val="solid"/>
+                      <a:round/>
+                      <a:headEnd type="none" w="med" len="med"/>
+                      <a:tailEnd type="none" w="med" len="med"/>
+                    </a:lnL>
+                    <a:lnR w="6350" cap="flat" cmpd="sng" algn="ctr">
+                      <a:solidFill>
+                        <a:srgbClr val="DDDDDD"/>
+                      </a:solidFill>
+                      <a:prstDash val="solid"/>
+                      <a:round/>
+                      <a:headEnd type="none" w="med" len="med"/>
+                      <a:tailEnd type="none" w="med" len="med"/>
+                    </a:lnR>
+                    <a:lnT w="6350" cap="flat" cmpd="sng" algn="ctr">
+                      <a:solidFill>
+                        <a:srgbClr val="DDDDDD"/>
+                      </a:solidFill>
+                      <a:prstDash val="solid"/>
+                      <a:round/>
+                      <a:headEnd type="none" w="med" len="med"/>
+                      <a:tailEnd type="none" w="med" len="med"/>
+                    </a:lnT>
+                    <a:lnB w="6350" cap="flat" cmpd="sng" algn="ctr">
+                      <a:solidFill>
+                        <a:srgbClr val="DDDDDD"/>
+                      </a:solidFill>
+                      <a:prstDash val="solid"/>
+                      <a:round/>
+                      <a:headEnd type="none" w="med" len="med"/>
+                      <a:tailEnd type="none" w="med" len="med"/>
+                    </a:lnB>
+                  </a:tcPr>
+                </a:tc>
+                <a:tc>
+                  <a:txBody>
+                    <a:bodyPr/>
+                    <a:lstStyle/>
+                    <a:p>
+                      <a:pPr algn="l" indent="0" marL="0">
+                        <a:buNone/>
+                      </a:pPr>
+                      <a:r>
+                        <a:rPr lang="en-US" sz="1250" dirty="0">
+                          <a:solidFill>
+                            <a:srgbClr val="26313B"/>
+                          </a:solidFill>
+                          <a:latin typeface="Calibri" pitchFamily="34" charset="0"/>
+                          <a:ea typeface="Calibri" pitchFamily="34" charset="-122"/>
+                          <a:cs typeface="Calibri" pitchFamily="34" charset="-120"/>
+                        </a:rPr>
+                        <a:t>10.5</a:t>
+                      </a:r>
+                      <a:endParaRPr lang="en-US" sz="1250" dirty="0">
+                        <a:latin typeface="Calibri" charset="0"/>
+                        <a:ea typeface="Calibri" charset="0"/>
+                        <a:cs typeface="Calibri" charset="0"/>
+                      </a:endParaRPr>
+                    </a:p>
+                  </a:txBody>
+                  <a:tcPr marL="91440" marR="91440" marT="45720" marB="45720" anchor="ctr">
+                    <a:lnL w="6350" cap="flat" cmpd="sng" algn="ctr">
+                      <a:solidFill>
+                        <a:srgbClr val="DDDDDD"/>
+                      </a:solidFill>
+                      <a:prstDash val="solid"/>
+                      <a:round/>
+                      <a:headEnd type="none" w="med" len="med"/>
+                      <a:tailEnd type="none" w="med" len="med"/>
+                    </a:lnL>
+                    <a:lnR w="6350" cap="flat" cmpd="sng" algn="ctr">
+                      <a:solidFill>
+                        <a:srgbClr val="DDDDDD"/>
+                      </a:solidFill>
+                      <a:prstDash val="solid"/>
+                      <a:round/>
+                      <a:headEnd type="none" w="med" len="med"/>
+                      <a:tailEnd type="none" w="med" len="med"/>
+                    </a:lnR>
+                    <a:lnT w="6350" cap="flat" cmpd="sng" algn="ctr">
+                      <a:solidFill>
+                        <a:srgbClr val="DDDDDD"/>
+                      </a:solidFill>
+                      <a:prstDash val="solid"/>
+                      <a:round/>
+                      <a:headEnd type="none" w="med" len="med"/>
+                      <a:tailEnd type="none" w="med" len="med"/>
+                    </a:lnT>
+                    <a:lnB w="6350" cap="flat" cmpd="sng" algn="ctr">
+                      <a:solidFill>
+                        <a:srgbClr val="DDDDDD"/>
+                      </a:solidFill>
+                      <a:prstDash val="solid"/>
+                      <a:round/>
+                      <a:headEnd type="none" w="med" len="med"/>
+                      <a:tailEnd type="none" w="med" len="med"/>
+                    </a:lnB>
+                  </a:tcPr>
+                </a:tc>
+                <a:tc>
+                  <a:txBody>
+                    <a:bodyPr/>
+                    <a:lstStyle/>
+                    <a:p>
+                      <a:pPr algn="l" indent="0" marL="0">
+                        <a:buNone/>
+                      </a:pPr>
+                      <a:r>
+                        <a:rPr lang="en-US" sz="1250" dirty="0">
+                          <a:solidFill>
+                            <a:srgbClr val="26313B"/>
+                          </a:solidFill>
+                          <a:latin typeface="Calibri" pitchFamily="34" charset="0"/>
+                          <a:ea typeface="Calibri" pitchFamily="34" charset="-122"/>
+                          <a:cs typeface="Calibri" pitchFamily="34" charset="-120"/>
+                        </a:rPr>
+                        <a:t>9.9</a:t>
+                      </a:r>
+                      <a:endParaRPr lang="en-US" sz="1250" dirty="0">
+                        <a:latin typeface="Calibri" charset="0"/>
+                        <a:ea typeface="Calibri" charset="0"/>
+                        <a:cs typeface="Calibri" charset="0"/>
+                      </a:endParaRPr>
+                    </a:p>
+                  </a:txBody>
+                  <a:tcPr marL="91440" marR="91440" marT="45720" marB="45720" anchor="ctr">
+                    <a:lnL w="6350" cap="flat" cmpd="sng" algn="ctr">
+                      <a:solidFill>
+                        <a:srgbClr val="DDDDDD"/>
+                      </a:solidFill>
+                      <a:prstDash val="solid"/>
+                      <a:round/>
+                      <a:headEnd type="none" w="med" len="med"/>
+                      <a:tailEnd type="none" w="med" len="med"/>
+                    </a:lnL>
+                    <a:lnR w="6350" cap="flat" cmpd="sng" algn="ctr">
+                      <a:solidFill>
+                        <a:srgbClr val="DDDDDD"/>
+                      </a:solidFill>
+                      <a:prstDash val="solid"/>
+                      <a:round/>
+                      <a:headEnd type="none" w="med" len="med"/>
+                      <a:tailEnd type="none" w="med" len="med"/>
+                    </a:lnR>
+                    <a:lnT w="6350" cap="flat" cmpd="sng" algn="ctr">
+                      <a:solidFill>
+                        <a:srgbClr val="DDDDDD"/>
+                      </a:solidFill>
+                      <a:prstDash val="solid"/>
+                      <a:round/>
+                      <a:headEnd type="none" w="med" len="med"/>
+                      <a:tailEnd type="none" w="med" len="med"/>
+                    </a:lnT>
+                    <a:lnB w="6350" cap="flat" cmpd="sng" algn="ctr">
+                      <a:solidFill>
+                        <a:srgbClr val="DDDDDD"/>
+                      </a:solidFill>
+                      <a:prstDash val="solid"/>
+                      <a:round/>
+                      <a:headEnd type="none" w="med" len="med"/>
+                      <a:tailEnd type="none" w="med" len="med"/>
+                    </a:lnB>
+                  </a:tcPr>
+                </a:tc>
+                <a:tc>
+                  <a:txBody>
+                    <a:bodyPr/>
+                    <a:lstStyle/>
+                    <a:p>
+                      <a:pPr algn="l" indent="0" marL="0">
+                        <a:buNone/>
+                      </a:pPr>
+                      <a:r>
+                        <a:rPr lang="en-US" sz="1250" dirty="0">
+                          <a:solidFill>
+                            <a:srgbClr val="26313B"/>
+                          </a:solidFill>
+                          <a:latin typeface="Calibri" pitchFamily="34" charset="0"/>
+                          <a:ea typeface="Calibri" pitchFamily="34" charset="-122"/>
+                          <a:cs typeface="Calibri" pitchFamily="34" charset="-120"/>
+                        </a:rPr>
+                        <a:t>12.1</a:t>
+                      </a:r>
+                      <a:endParaRPr lang="en-US" sz="1250" dirty="0">
+                        <a:latin typeface="Calibri" charset="0"/>
+                        <a:ea typeface="Calibri" charset="0"/>
+                        <a:cs typeface="Calibri" charset="0"/>
+                      </a:endParaRPr>
+                    </a:p>
+                  </a:txBody>
+                  <a:tcPr marL="91440" marR="91440" marT="45720" marB="45720" anchor="ctr">
+                    <a:lnL w="6350" cap="flat" cmpd="sng" algn="ctr">
+                      <a:solidFill>
+                        <a:srgbClr val="DDDDDD"/>
+                      </a:solidFill>
+                      <a:prstDash val="solid"/>
+                      <a:round/>
+                      <a:headEnd type="none" w="med" len="med"/>
+                      <a:tailEnd type="none" w="med" len="med"/>
+                    </a:lnL>
+                    <a:lnR w="6350" cap="flat" cmpd="sng" algn="ctr">
+                      <a:solidFill>
+                        <a:srgbClr val="DDDDDD"/>
+                      </a:solidFill>
+                      <a:prstDash val="solid"/>
+                      <a:round/>
+                      <a:headEnd type="none" w="med" len="med"/>
+                      <a:tailEnd type="none" w="med" len="med"/>
+                    </a:lnR>
+                    <a:lnT w="6350" cap="flat" cmpd="sng" algn="ctr">
+                      <a:solidFill>
+                        <a:srgbClr val="DDDDDD"/>
+                      </a:solidFill>
+                      <a:prstDash val="solid"/>
+                      <a:round/>
+                      <a:headEnd type="none" w="med" len="med"/>
+                      <a:tailEnd type="none" w="med" len="med"/>
+                    </a:lnT>
+                    <a:lnB w="6350" cap="flat" cmpd="sng" algn="ctr">
+                      <a:solidFill>
+                        <a:srgbClr val="DDDDDD"/>
+                      </a:solidFill>
+                      <a:prstDash val="solid"/>
+                      <a:round/>
+                      <a:headEnd type="none" w="med" len="med"/>
+                      <a:tailEnd type="none" w="med" len="med"/>
+                    </a:lnB>
+                  </a:tcPr>
+                </a:tc>
+                <a:tc>
+                  <a:txBody>
+                    <a:bodyPr/>
+                    <a:lstStyle/>
+                    <a:p>
+                      <a:pPr algn="l" indent="0" marL="0">
+                        <a:buNone/>
+                      </a:pPr>
+                      <a:r>
+                        <a:rPr lang="en-US" sz="1250" dirty="0">
+                          <a:solidFill>
+                            <a:srgbClr val="26313B"/>
+                          </a:solidFill>
+                          <a:latin typeface="Calibri" pitchFamily="34" charset="0"/>
+                          <a:ea typeface="Calibri" pitchFamily="34" charset="-122"/>
+                          <a:cs typeface="Calibri" pitchFamily="34" charset="-120"/>
+                        </a:rPr>
+                        <a:t>11.9</a:t>
+                      </a:r>
+                      <a:endParaRPr lang="en-US" sz="1250" dirty="0">
+                        <a:latin typeface="Calibri" charset="0"/>
+                        <a:ea typeface="Calibri" charset="0"/>
+                        <a:cs typeface="Calibri" charset="0"/>
+                      </a:endParaRPr>
+                    </a:p>
+                  </a:txBody>
+                  <a:tcPr marL="91440" marR="91440" marT="45720" marB="45720" anchor="ctr">
+                    <a:lnL w="6350" cap="flat" cmpd="sng" algn="ctr">
+                      <a:solidFill>
+                        <a:srgbClr val="DDDDDD"/>
+                      </a:solidFill>
+                      <a:prstDash val="solid"/>
+                      <a:round/>
+                      <a:headEnd type="none" w="med" len="med"/>
+                      <a:tailEnd type="none" w="med" len="med"/>
+                    </a:lnL>
+                    <a:lnR w="6350" cap="flat" cmpd="sng" algn="ctr">
+                      <a:solidFill>
+                        <a:srgbClr val="DDDDDD"/>
+                      </a:solidFill>
+                      <a:prstDash val="solid"/>
+                      <a:round/>
+                      <a:headEnd type="none" w="med" len="med"/>
+                      <a:tailEnd type="none" w="med" len="med"/>
+                    </a:lnR>
+                    <a:lnT w="6350" cap="flat" cmpd="sng" algn="ctr">
+                      <a:solidFill>
+                        <a:srgbClr val="DDDDDD"/>
+                      </a:solidFill>
+                      <a:prstDash val="solid"/>
+                      <a:round/>
+                      <a:headEnd type="none" w="med" len="med"/>
+                      <a:tailEnd type="none" w="med" len="med"/>
+                    </a:lnT>
+                    <a:lnB w="6350" cap="flat" cmpd="sng" algn="ctr">
+                      <a:solidFill>
+                        <a:srgbClr val="DDDDDD"/>
+                      </a:solidFill>
+                      <a:prstDash val="solid"/>
+                      <a:round/>
+                      <a:headEnd type="none" w="med" len="med"/>
+                      <a:tailEnd type="none" w="med" len="med"/>
+                    </a:lnB>
+                  </a:tcPr>
+                </a:tc>
+              </a:tr>
+            </a:tbl>
+          </a:graphicData>
+        </a:graphic>
+      </p:graphicFrame>
+      <p:sp>
+        <p:nvSpPr>
+          <p:cNvPr id="8" name="Text 4"/>
+          <p:cNvSpPr/>
+          <p:nvPr/>
+        </p:nvSpPr>
+        <p:spPr>
+          <a:xfrm>
+            <a:off x="6492240" y="4389120"/>
+            <a:ext cx="5120640" cy="548640"/>
+          </a:xfrm>
+          <a:prstGeom prst="rect">
+            <a:avLst/>
+          </a:prstGeom>
+          <a:noFill/>
+          <a:ln/>
+        </p:spPr>
+        <p:txBody>
+          <a:bodyPr wrap="square" lIns="0" tIns="0" rIns="0" bIns="0" rtlCol="0" anchor="ctr"/>
+          <a:lstStyle/>
+          <a:p>
+            <a:pPr indent="0" marL="0">
+              <a:buNone/>
+            </a:pPr>
+            <a:r>
+              <a:rPr lang="en-US" sz="1050" dirty="0">
+                <a:solidFill>
+                  <a:srgbClr val="7A8791"/>
+                </a:solidFill>
+                <a:latin typeface="Calibri" pitchFamily="34" charset="0"/>
+                <a:ea typeface="Calibri" pitchFamily="34" charset="-122"/>
+                <a:cs typeface="Calibri" pitchFamily="34" charset="-120"/>
+              </a:rPr>
+              <a:t>LTV по каналу — міст із регіон × ціна (канального LTV в даних немає). Tier1 не показано: малі вибірки.</a:t>
+            </a:r>
+            <a:endParaRPr lang="en-US" sz="1050" dirty="0"/>
+          </a:p>
+        </p:txBody>
+      </p:sp>
+      <p:sp>
+        <p:nvSpPr>
+          <p:cNvPr id="9" name="Text 5"/>
+          <p:cNvSpPr/>
+          <p:nvPr/>
+        </p:nvSpPr>
+        <p:spPr>
+          <a:xfrm>
+            <a:off x="548640" y="5074920"/>
             <a:ext cx="11155680" cy="822960"/>
           </a:xfrm>
           <a:prstGeom prst="rect">
@@ -2770,7 +4697,7 @@
           <a:bodyPr wrap="square" lIns="0" tIns="0" rIns="0" bIns="0" rtlCol="0" anchor="ctr"/>
           <a:lstStyle/>
           <a:p>
-            <a:pPr marL="0" indent="0">
+            <a:pPr indent="0" marL="0">
               <a:buNone/>
             </a:pPr>
             <a:r>
@@ -2782,18 +4709,35 @@
                 <a:ea typeface="Calibri" pitchFamily="34" charset="-122"/>
                 <a:cs typeface="Calibri" pitchFamily="34" charset="-120"/>
               </a:rPr>
-              <a:t>EU: 1.29 → 1.21 (−6.7%) — цінність юзера впала, а клік подорожчав (CAC +4.7%).  USA: 1.82 → 2.00 (+9.6%).  </a:t>
-            </a:r>
+              <a:t>EU: 1.29 → 1.21 (−6.7%), USA: 1.82 → 2.00 (+9.6%).  </a:t>
+            </a:r>
+            <a:pPr indent="0" marL="0">
+              <a:buNone/>
+            </a:pPr>
             <a:r>
               <a:rPr lang="en-US" sz="1350" b="1" dirty="0">
                 <a:solidFill>
+                  <a:srgbClr val="D55E00"/>
+                </a:solidFill>
+                <a:latin typeface="Calibri" pitchFamily="34" charset="0"/>
+                <a:ea typeface="Calibri" pitchFamily="34" charset="-122"/>
+                <a:cs typeface="Calibri" pitchFamily="34" charset="-120"/>
+              </a:rPr>
+              <a:t>Google-EU нижче одиниці на ОБОХ цінах — збитковий канал незалежно від ціни.  </a:t>
+            </a:r>
+            <a:pPr indent="0" marL="0">
+              <a:buNone/>
+            </a:pPr>
+            <a:r>
+              <a:rPr lang="en-US" sz="1350" dirty="0">
+                <a:solidFill>
                   <a:srgbClr val="26313B"/>
                 </a:solidFill>
                 <a:latin typeface="Calibri" pitchFamily="34" charset="0"/>
                 <a:ea typeface="Calibri" pitchFamily="34" charset="-122"/>
                 <a:cs typeface="Calibri" pitchFamily="34" charset="-120"/>
               </a:rPr>
-              <a:t>Подорожчання приніс лише Facebook (+13.5%) і лише там, де реально доставлено 9.99.</a:t>
+              <a:t>Facebook-кліки в test-армі дорожчі на +13.5% (кореляція: в A/A різниці немає).</a:t>
             </a:r>
             <a:endParaRPr lang="en-US" sz="1350" dirty="0"/>
           </a:p>
@@ -2815,7 +4759,6 @@
         <a:solidFill>
           <a:srgbClr val="14212B"/>
         </a:solidFill>
-        <a:effectLst/>
       </p:bgPr>
     </p:bg>
     <p:spTree>
@@ -2853,7 +4796,7 @@
           <a:bodyPr wrap="square" lIns="0" tIns="0" rIns="0" bIns="0" rtlCol="0" anchor="ctr"/>
           <a:lstStyle/>
           <a:p>
-            <a:pPr marL="0" indent="0">
+            <a:pPr indent="0" marL="0">
               <a:buNone/>
             </a:pPr>
             <a:r>
@@ -2892,13 +4835,6 @@
           </a:solidFill>
           <a:ln/>
         </p:spPr>
-        <p:txBody>
-          <a:bodyPr/>
-          <a:lstStyle/>
-          <a:p>
-            <a:endParaRPr lang="uk-UA"/>
-          </a:p>
-        </p:txBody>
       </p:sp>
       <p:sp>
         <p:nvSpPr>
@@ -2921,7 +4857,7 @@
           <a:bodyPr wrap="square" lIns="0" tIns="0" rIns="0" bIns="0" rtlCol="0" anchor="ctr"/>
           <a:lstStyle/>
           <a:p>
-            <a:pPr marL="0" indent="0">
+            <a:pPr indent="0" marL="0">
               <a:buNone/>
             </a:pPr>
             <a:r>
@@ -2960,7 +4896,7 @@
           <a:bodyPr wrap="square" lIns="0" tIns="0" rIns="0" bIns="0" rtlCol="0" anchor="ctr"/>
           <a:lstStyle/>
           <a:p>
-            <a:pPr marL="0" indent="0">
+            <a:pPr indent="0" marL="0">
               <a:buNone/>
             </a:pPr>
             <a:r>
@@ -2999,7 +4935,7 @@
           <a:bodyPr wrap="square" lIns="0" tIns="0" rIns="0" bIns="0" rtlCol="0" anchor="t"/>
           <a:lstStyle/>
           <a:p>
-            <a:pPr marL="0" indent="0">
+            <a:pPr indent="0" marL="0">
               <a:buNone/>
             </a:pPr>
             <a:r>
@@ -3011,7 +4947,7 @@
                 <a:ea typeface="Calibri" pitchFamily="34" charset="-122"/>
                 <a:cs typeface="Calibri" pitchFamily="34" charset="-120"/>
               </a:rPr>
-              <a:t>9.99 шкодить апселу (−33%), LTV (−2.3%) і ROAS (−6.7%). Кандидат: проміжна ціна 7.99–8.49 через новий тест.</a:t>
+              <a:t>9.99 знижує апсел (−33%), LTV (−$0.40, CI виключає нуль) і ROAS (−6.7%). Наступний крок — тест проміжної ціни (напр., 7.99): це гіпотеза для тесту, а не розрахована рекомендація.</a:t>
             </a:r>
             <a:endParaRPr lang="en-US" sz="1200" dirty="0"/>
           </a:p>
@@ -3038,13 +4974,6 @@
           </a:solidFill>
           <a:ln/>
         </p:spPr>
-        <p:txBody>
-          <a:bodyPr/>
-          <a:lstStyle/>
-          <a:p>
-            <a:endParaRPr lang="uk-UA"/>
-          </a:p>
-        </p:txBody>
       </p:sp>
       <p:sp>
         <p:nvSpPr>
@@ -3067,7 +4996,7 @@
           <a:bodyPr wrap="square" lIns="0" tIns="0" rIns="0" bIns="0" rtlCol="0" anchor="ctr"/>
           <a:lstStyle/>
           <a:p>
-            <a:pPr marL="0" indent="0">
+            <a:pPr indent="0" marL="0">
               <a:buNone/>
             </a:pPr>
             <a:r>
@@ -3106,7 +5035,7 @@
           <a:bodyPr wrap="square" lIns="0" tIns="0" rIns="0" bIns="0" rtlCol="0" anchor="ctr"/>
           <a:lstStyle/>
           <a:p>
-            <a:pPr marL="0" indent="0">
+            <a:pPr indent="0" marL="0">
               <a:buNone/>
             </a:pPr>
             <a:r>
@@ -3145,7 +5074,7 @@
           <a:bodyPr wrap="square" lIns="0" tIns="0" rIns="0" bIns="0" rtlCol="0" anchor="t"/>
           <a:lstStyle/>
           <a:p>
-            <a:pPr marL="0" indent="0">
+            <a:pPr indent="0" marL="0">
               <a:buNone/>
             </a:pPr>
             <a:r>
@@ -3184,13 +5113,6 @@
           </a:solidFill>
           <a:ln/>
         </p:spPr>
-        <p:txBody>
-          <a:bodyPr/>
-          <a:lstStyle/>
-          <a:p>
-            <a:endParaRPr lang="uk-UA"/>
-          </a:p>
-        </p:txBody>
       </p:sp>
       <p:sp>
         <p:nvSpPr>
@@ -3213,7 +5135,7 @@
           <a:bodyPr wrap="square" lIns="0" tIns="0" rIns="0" bIns="0" rtlCol="0" anchor="ctr"/>
           <a:lstStyle/>
           <a:p>
-            <a:pPr marL="0" indent="0">
+            <a:pPr indent="0" marL="0">
               <a:buNone/>
             </a:pPr>
             <a:r>
@@ -3252,7 +5174,7 @@
           <a:bodyPr wrap="square" lIns="0" tIns="0" rIns="0" bIns="0" rtlCol="0" anchor="ctr"/>
           <a:lstStyle/>
           <a:p>
-            <a:pPr marL="0" indent="0">
+            <a:pPr indent="0" marL="0">
               <a:buNone/>
             </a:pPr>
             <a:r>
@@ -3291,7 +5213,7 @@
           <a:bodyPr wrap="square" lIns="0" tIns="0" rIns="0" bIns="0" rtlCol="0" anchor="t"/>
           <a:lstStyle/>
           <a:p>
-            <a:pPr marL="0" indent="0">
+            <a:pPr indent="0" marL="0">
               <a:buNone/>
             </a:pPr>
             <a:r>
@@ -3330,13 +5252,6 @@
           </a:solidFill>
           <a:ln/>
         </p:spPr>
-        <p:txBody>
-          <a:bodyPr/>
-          <a:lstStyle/>
-          <a:p>
-            <a:endParaRPr lang="uk-UA"/>
-          </a:p>
-        </p:txBody>
       </p:sp>
       <p:sp>
         <p:nvSpPr>
@@ -3359,7 +5274,7 @@
           <a:bodyPr wrap="square" lIns="0" tIns="0" rIns="0" bIns="0" rtlCol="0" anchor="ctr"/>
           <a:lstStyle/>
           <a:p>
-            <a:pPr marL="0" indent="0">
+            <a:pPr indent="0" marL="0">
               <a:buNone/>
             </a:pPr>
             <a:r>
@@ -3398,7 +5313,7 @@
           <a:bodyPr wrap="square" lIns="0" tIns="0" rIns="0" bIns="0" rtlCol="0" anchor="ctr"/>
           <a:lstStyle/>
           <a:p>
-            <a:pPr marL="0" indent="0">
+            <a:pPr indent="0" marL="0">
               <a:buNone/>
             </a:pPr>
             <a:r>
@@ -3437,7 +5352,7 @@
           <a:bodyPr wrap="square" lIns="0" tIns="0" rIns="0" bIns="0" rtlCol="0" anchor="t"/>
           <a:lstStyle/>
           <a:p>
-            <a:pPr marL="0" indent="0">
+            <a:pPr indent="0" marL="0">
               <a:buNone/>
             </a:pPr>
             <a:r>
@@ -3476,7 +5391,7 @@
           <a:bodyPr wrap="square" lIns="0" tIns="0" rIns="0" bIns="0" rtlCol="0" anchor="ctr"/>
           <a:lstStyle/>
           <a:p>
-            <a:pPr marL="0" indent="0">
+            <a:pPr indent="0" marL="0">
               <a:buNone/>
             </a:pPr>
             <a:r>
@@ -3488,7 +5403,7 @@
                 <a:ea typeface="Calibri" pitchFamily="34" charset="-122"/>
                 <a:cs typeface="Calibri" pitchFamily="34" charset="-120"/>
               </a:rPr>
-              <a:t>Розрахунки відтворюються: amo_case_analysis.ipynb · Run All  ·  висновки: conclusions_final.md</a:t>
+              <a:t>Розрахунки відтворюються: amo_case_analysis.ipynb (Run All)  ·  методологія і висновки: README.md</a:t>
             </a:r>
             <a:endParaRPr lang="en-US" sz="1100" dirty="0"/>
           </a:p>
@@ -3538,13 +5453,6 @@
           </a:solidFill>
           <a:ln/>
         </p:spPr>
-        <p:txBody>
-          <a:bodyPr/>
-          <a:lstStyle/>
-          <a:p>
-            <a:endParaRPr lang="uk-UA"/>
-          </a:p>
-        </p:txBody>
       </p:sp>
       <p:sp>
         <p:nvSpPr>
@@ -3567,11 +5475,11 @@
           <a:bodyPr wrap="square" lIns="0" tIns="0" rIns="0" bIns="0" rtlCol="0" anchor="ctr"/>
           <a:lstStyle/>
           <a:p>
-            <a:pPr marL="0" indent="0">
-              <a:buNone/>
-            </a:pPr>
-            <a:r>
-              <a:rPr lang="en-US" sz="1200" b="1" kern="0" spc="200" dirty="0">
+            <a:pPr indent="0" marL="0">
+              <a:buNone/>
+            </a:pPr>
+            <a:r>
+              <a:rPr lang="en-US" sz="1200" b="1" spc="200" kern="0" dirty="0">
                 <a:solidFill>
                   <a:srgbClr val="0072B2"/>
                 </a:solidFill>
@@ -3606,7 +5514,7 @@
           <a:bodyPr wrap="square" lIns="0" tIns="0" rIns="0" bIns="0" rtlCol="0" anchor="ctr"/>
           <a:lstStyle/>
           <a:p>
-            <a:pPr marL="0" indent="0">
+            <a:pPr indent="0" marL="0">
               <a:buNone/>
             </a:pPr>
             <a:r>
@@ -3751,13 +5659,6 @@
           </a:solidFill>
           <a:ln/>
         </p:spPr>
-        <p:txBody>
-          <a:bodyPr/>
-          <a:lstStyle/>
-          <a:p>
-            <a:endParaRPr lang="uk-UA"/>
-          </a:p>
-        </p:txBody>
       </p:sp>
       <p:sp>
         <p:nvSpPr>
@@ -3780,7 +5681,7 @@
           <a:bodyPr wrap="square" lIns="0" tIns="0" rIns="0" bIns="0" rtlCol="0" anchor="ctr"/>
           <a:lstStyle/>
           <a:p>
-            <a:pPr marL="0" indent="0">
+            <a:pPr indent="0" marL="0">
               <a:buNone/>
             </a:pPr>
             <a:r>
@@ -3819,7 +5720,7 @@
           <a:bodyPr wrap="square" lIns="0" tIns="0" rIns="0" bIns="0" rtlCol="0" anchor="ctr"/>
           <a:lstStyle/>
           <a:p>
-            <a:pPr marL="0" indent="0">
+            <a:pPr indent="0" marL="0">
               <a:buNone/>
             </a:pPr>
             <a:r>
@@ -3836,13 +5737,13 @@
             <a:endParaRPr lang="en-US" sz="1700" dirty="0"/>
           </a:p>
           <a:p>
-            <a:pPr marL="0" indent="0">
+            <a:pPr indent="0" marL="0">
               <a:buNone/>
             </a:pPr>
             <a:endParaRPr lang="en-US" sz="1700" dirty="0"/>
           </a:p>
           <a:p>
-            <a:pPr marL="0" indent="0">
+            <a:pPr indent="0" marL="0">
               <a:buNone/>
             </a:pPr>
             <a:r>
@@ -3904,13 +5805,6 @@
           </a:solidFill>
           <a:ln/>
         </p:spPr>
-        <p:txBody>
-          <a:bodyPr/>
-          <a:lstStyle/>
-          <a:p>
-            <a:endParaRPr lang="uk-UA"/>
-          </a:p>
-        </p:txBody>
       </p:sp>
       <p:sp>
         <p:nvSpPr>
@@ -3933,11 +5827,11 @@
           <a:bodyPr wrap="square" lIns="0" tIns="0" rIns="0" bIns="0" rtlCol="0" anchor="ctr"/>
           <a:lstStyle/>
           <a:p>
-            <a:pPr marL="0" indent="0">
-              <a:buNone/>
-            </a:pPr>
-            <a:r>
-              <a:rPr lang="en-US" sz="1200" b="1" kern="0" spc="200" dirty="0">
+            <a:pPr indent="0" marL="0">
+              <a:buNone/>
+            </a:pPr>
+            <a:r>
+              <a:rPr lang="en-US" sz="1200" b="1" spc="200" kern="0" dirty="0">
                 <a:solidFill>
                   <a:srgbClr val="E69F00"/>
                 </a:solidFill>
@@ -3972,7 +5866,7 @@
           <a:bodyPr wrap="square" lIns="0" tIns="0" rIns="0" bIns="0" rtlCol="0" anchor="ctr"/>
           <a:lstStyle/>
           <a:p>
-            <a:pPr marL="0" indent="0">
+            <a:pPr indent="0" marL="0">
               <a:buNone/>
             </a:pPr>
             <a:r>
@@ -4011,13 +5905,6 @@
           </a:solidFill>
           <a:ln/>
         </p:spPr>
-        <p:txBody>
-          <a:bodyPr/>
-          <a:lstStyle/>
-          <a:p>
-            <a:endParaRPr lang="uk-UA"/>
-          </a:p>
-        </p:txBody>
       </p:sp>
       <p:sp>
         <p:nvSpPr>
@@ -4040,7 +5927,7 @@
           <a:bodyPr wrap="square" lIns="0" tIns="0" rIns="0" bIns="0" rtlCol="0" anchor="ctr"/>
           <a:lstStyle/>
           <a:p>
-            <a:pPr marL="0" indent="0">
+            <a:pPr indent="0" marL="0">
               <a:buNone/>
             </a:pPr>
             <a:r>
@@ -4079,7 +5966,7 @@
           <a:bodyPr wrap="square" lIns="0" tIns="0" rIns="0" bIns="0" rtlCol="0" anchor="t"/>
           <a:lstStyle/>
           <a:p>
-            <a:pPr marL="0" indent="0">
+            <a:pPr indent="0" marL="0">
               <a:buNone/>
             </a:pPr>
             <a:r>
@@ -4096,7 +5983,7 @@
             <a:endParaRPr lang="en-US" sz="1250" dirty="0"/>
           </a:p>
           <a:p>
-            <a:pPr marL="0" indent="0">
+            <a:pPr indent="0" marL="0">
               <a:buNone/>
             </a:pPr>
             <a:r>
@@ -4135,13 +6022,6 @@
           </a:solidFill>
           <a:ln/>
         </p:spPr>
-        <p:txBody>
-          <a:bodyPr/>
-          <a:lstStyle/>
-          <a:p>
-            <a:endParaRPr lang="uk-UA"/>
-          </a:p>
-        </p:txBody>
       </p:sp>
       <p:sp>
         <p:nvSpPr>
@@ -4164,7 +6044,7 @@
           <a:bodyPr wrap="square" lIns="0" tIns="0" rIns="0" bIns="0" rtlCol="0" anchor="ctr"/>
           <a:lstStyle/>
           <a:p>
-            <a:pPr marL="0" indent="0">
+            <a:pPr indent="0" marL="0">
               <a:buNone/>
             </a:pPr>
             <a:r>
@@ -4203,7 +6083,7 @@
           <a:bodyPr wrap="square" lIns="0" tIns="0" rIns="0" bIns="0" rtlCol="0" anchor="t"/>
           <a:lstStyle/>
           <a:p>
-            <a:pPr marL="0" indent="0">
+            <a:pPr indent="0" marL="0">
               <a:buNone/>
             </a:pPr>
             <a:r>
@@ -4220,7 +6100,7 @@
             <a:endParaRPr lang="en-US" sz="1250" dirty="0"/>
           </a:p>
           <a:p>
-            <a:pPr marL="0" indent="0">
+            <a:pPr indent="0" marL="0">
               <a:buNone/>
             </a:pPr>
             <a:r>
@@ -4259,13 +6139,6 @@
           </a:solidFill>
           <a:ln/>
         </p:spPr>
-        <p:txBody>
-          <a:bodyPr/>
-          <a:lstStyle/>
-          <a:p>
-            <a:endParaRPr lang="uk-UA"/>
-          </a:p>
-        </p:txBody>
       </p:sp>
       <p:sp>
         <p:nvSpPr>
@@ -4288,7 +6161,7 @@
           <a:bodyPr wrap="square" lIns="0" tIns="0" rIns="0" bIns="0" rtlCol="0" anchor="ctr"/>
           <a:lstStyle/>
           <a:p>
-            <a:pPr marL="0" indent="0">
+            <a:pPr indent="0" marL="0">
               <a:buNone/>
             </a:pPr>
             <a:r>
@@ -4327,7 +6200,7 @@
           <a:bodyPr wrap="square" lIns="0" tIns="0" rIns="0" bIns="0" rtlCol="0" anchor="t"/>
           <a:lstStyle/>
           <a:p>
-            <a:pPr marL="0" indent="0">
+            <a:pPr indent="0" marL="0">
               <a:buNone/>
             </a:pPr>
             <a:r>
@@ -4339,12 +6212,12 @@
                 <a:ea typeface="Calibri" pitchFamily="34" charset="-122"/>
                 <a:cs typeface="Calibri" pitchFamily="34" charset="-120"/>
               </a:rPr>
-              <a:t>LTV у EU на новій ціні:</a:t>
+              <a:t>LTV у EU на новій ціні нижчий:</a:t>
             </a:r>
             <a:endParaRPr lang="en-US" sz="1250" dirty="0"/>
           </a:p>
           <a:p>
-            <a:pPr marL="0" indent="0">
+            <a:pPr indent="0" marL="0">
               <a:buNone/>
             </a:pPr>
             <a:r>
@@ -4356,7 +6229,7 @@
                 <a:ea typeface="Calibri" pitchFamily="34" charset="-122"/>
                 <a:cs typeface="Calibri" pitchFamily="34" charset="-120"/>
               </a:rPr>
-              <a:t>там підвищення РУЙНУЄ цінність юзера</a:t>
+              <a:t>−$0.40/юзера (95% CI −0.71…−0.09)</a:t>
             </a:r>
             <a:endParaRPr lang="en-US" sz="1250" dirty="0"/>
           </a:p>
@@ -4383,7 +6256,7 @@
           <a:bodyPr wrap="square" lIns="0" tIns="0" rIns="0" bIns="0" rtlCol="0" anchor="ctr"/>
           <a:lstStyle/>
           <a:p>
-            <a:pPr marL="0" indent="0">
+            <a:pPr indent="0" marL="0">
               <a:buNone/>
             </a:pPr>
             <a:r>
@@ -4397,6 +6270,9 @@
               </a:rPr>
               <a:t>Вердикт: </a:t>
             </a:r>
+            <a:pPr indent="0" marL="0">
+              <a:buNone/>
+            </a:pPr>
             <a:r>
               <a:rPr lang="en-US" sz="1600" dirty="0">
                 <a:solidFill>
@@ -4408,6 +6284,9 @@
               </a:rPr>
               <a:t>рішення не збиткове, але обіцянка була недосяжною, а в EU нова ціна шкодить.  </a:t>
             </a:r>
+            <a:pPr indent="0" marL="0">
+              <a:buNone/>
+            </a:pPr>
             <a:r>
               <a:rPr lang="en-US" sz="1600" b="1" dirty="0">
                 <a:solidFill>
@@ -4467,13 +6346,6 @@
           </a:solidFill>
           <a:ln/>
         </p:spPr>
-        <p:txBody>
-          <a:bodyPr/>
-          <a:lstStyle/>
-          <a:p>
-            <a:endParaRPr lang="uk-UA"/>
-          </a:p>
-        </p:txBody>
       </p:sp>
       <p:sp>
         <p:nvSpPr>
@@ -4496,11 +6368,11 @@
           <a:bodyPr wrap="square" lIns="0" tIns="0" rIns="0" bIns="0" rtlCol="0" anchor="ctr"/>
           <a:lstStyle/>
           <a:p>
-            <a:pPr marL="0" indent="0">
-              <a:buNone/>
-            </a:pPr>
-            <a:r>
-              <a:rPr lang="en-US" sz="1200" b="1" kern="0" spc="200" dirty="0">
+            <a:pPr indent="0" marL="0">
+              <a:buNone/>
+            </a:pPr>
+            <a:r>
+              <a:rPr lang="en-US" sz="1200" b="1" spc="200" kern="0" dirty="0">
                 <a:solidFill>
                   <a:srgbClr val="0072B2"/>
                 </a:solidFill>
@@ -4535,7 +6407,7 @@
           <a:bodyPr wrap="square" lIns="0" tIns="0" rIns="0" bIns="0" rtlCol="0" anchor="ctr"/>
           <a:lstStyle/>
           <a:p>
-            <a:pPr marL="0" indent="0">
+            <a:pPr indent="0" marL="0">
               <a:buNone/>
             </a:pPr>
             <a:r>
@@ -4572,13 +6444,6 @@
           </a:solidFill>
           <a:ln/>
         </p:spPr>
-        <p:txBody>
-          <a:bodyPr/>
-          <a:lstStyle/>
-          <a:p>
-            <a:endParaRPr lang="uk-UA"/>
-          </a:p>
-        </p:txBody>
       </p:sp>
       <p:sp>
         <p:nvSpPr>
@@ -4601,7 +6466,7 @@
           <a:bodyPr wrap="square" lIns="0" tIns="0" rIns="0" bIns="0" rtlCol="0" anchor="ctr"/>
           <a:lstStyle/>
           <a:p>
-            <a:pPr marL="0" indent="0" algn="ctr">
+            <a:pPr algn="ctr" indent="0" marL="0">
               <a:buNone/>
             </a:pPr>
             <a:r>
@@ -4640,7 +6505,7 @@
           <a:bodyPr wrap="square" lIns="0" tIns="0" rIns="0" bIns="0" rtlCol="0" anchor="t"/>
           <a:lstStyle/>
           <a:p>
-            <a:pPr marL="0" indent="0">
+            <a:pPr indent="0" marL="0">
               <a:buNone/>
             </a:pPr>
             <a:r>
@@ -4654,6 +6519,9 @@
               </a:rPr>
               <a:t>Дублі.  </a:t>
             </a:r>
+            <a:pPr indent="0" marL="0">
+              <a:buNone/>
+            </a:pPr>
             <a:r>
               <a:rPr lang="en-US" sz="1350" dirty="0">
                 <a:solidFill>
@@ -4688,13 +6556,6 @@
           </a:solidFill>
           <a:ln/>
         </p:spPr>
-        <p:txBody>
-          <a:bodyPr/>
-          <a:lstStyle/>
-          <a:p>
-            <a:endParaRPr lang="uk-UA"/>
-          </a:p>
-        </p:txBody>
       </p:sp>
       <p:sp>
         <p:nvSpPr>
@@ -4717,7 +6578,7 @@
           <a:bodyPr wrap="square" lIns="0" tIns="0" rIns="0" bIns="0" rtlCol="0" anchor="ctr"/>
           <a:lstStyle/>
           <a:p>
-            <a:pPr marL="0" indent="0" algn="ctr">
+            <a:pPr algn="ctr" indent="0" marL="0">
               <a:buNone/>
             </a:pPr>
             <a:r>
@@ -4756,7 +6617,7 @@
           <a:bodyPr wrap="square" lIns="0" tIns="0" rIns="0" bIns="0" rtlCol="0" anchor="t"/>
           <a:lstStyle/>
           <a:p>
-            <a:pPr marL="0" indent="0">
+            <a:pPr indent="0" marL="0">
               <a:buNone/>
             </a:pPr>
             <a:r>
@@ -4770,6 +6631,9 @@
               </a:rPr>
               <a:t>«Одноногий» день.  </a:t>
             </a:r>
+            <a:pPr indent="0" marL="0">
+              <a:buNone/>
+            </a:pPr>
             <a:r>
               <a:rPr lang="en-US" sz="1350" dirty="0">
                 <a:solidFill>
@@ -4804,13 +6668,6 @@
           </a:solidFill>
           <a:ln/>
         </p:spPr>
-        <p:txBody>
-          <a:bodyPr/>
-          <a:lstStyle/>
-          <a:p>
-            <a:endParaRPr lang="uk-UA"/>
-          </a:p>
-        </p:txBody>
       </p:sp>
       <p:sp>
         <p:nvSpPr>
@@ -4833,7 +6690,7 @@
           <a:bodyPr wrap="square" lIns="0" tIns="0" rIns="0" bIns="0" rtlCol="0" anchor="ctr"/>
           <a:lstStyle/>
           <a:p>
-            <a:pPr marL="0" indent="0" algn="ctr">
+            <a:pPr algn="ctr" indent="0" marL="0">
               <a:buNone/>
             </a:pPr>
             <a:r>
@@ -4872,7 +6729,7 @@
           <a:bodyPr wrap="square" lIns="0" tIns="0" rIns="0" bIns="0" rtlCol="0" anchor="t"/>
           <a:lstStyle/>
           <a:p>
-            <a:pPr marL="0" indent="0">
+            <a:pPr indent="0" marL="0">
               <a:buNone/>
             </a:pPr>
             <a:r>
@@ -4886,6 +6743,9 @@
               </a:rPr>
               <a:t>Валідне вікно тесту.  </a:t>
             </a:r>
+            <a:pPr indent="0" marL="0">
+              <a:buNone/>
+            </a:pPr>
             <a:r>
               <a:rPr lang="en-US" sz="1350" dirty="0">
                 <a:solidFill>
@@ -4920,13 +6780,6 @@
           </a:solidFill>
           <a:ln/>
         </p:spPr>
-        <p:txBody>
-          <a:bodyPr/>
-          <a:lstStyle/>
-          <a:p>
-            <a:endParaRPr lang="uk-UA"/>
-          </a:p>
-        </p:txBody>
       </p:sp>
       <p:sp>
         <p:nvSpPr>
@@ -4949,7 +6802,7 @@
           <a:bodyPr wrap="square" lIns="0" tIns="0" rIns="0" bIns="0" rtlCol="0" anchor="ctr"/>
           <a:lstStyle/>
           <a:p>
-            <a:pPr marL="0" indent="0" algn="ctr">
+            <a:pPr algn="ctr" indent="0" marL="0">
               <a:buNone/>
             </a:pPr>
             <a:r>
@@ -4988,7 +6841,7 @@
           <a:bodyPr wrap="square" lIns="0" tIns="0" rIns="0" bIns="0" rtlCol="0" anchor="t"/>
           <a:lstStyle/>
           <a:p>
-            <a:pPr marL="0" indent="0">
+            <a:pPr indent="0" marL="0">
               <a:buNone/>
             </a:pPr>
             <a:r>
@@ -5002,6 +6855,9 @@
               </a:rPr>
               <a:t>Контамінація Tier1.  </a:t>
             </a:r>
+            <a:pPr indent="0" marL="0">
+              <a:buNone/>
+            </a:pPr>
             <a:r>
               <a:rPr lang="en-US" sz="1350" dirty="0">
                 <a:solidFill>
@@ -5038,13 +6894,6 @@
           </a:solidFill>
           <a:ln/>
         </p:spPr>
-        <p:txBody>
-          <a:bodyPr/>
-          <a:lstStyle/>
-          <a:p>
-            <a:endParaRPr lang="uk-UA"/>
-          </a:p>
-        </p:txBody>
       </p:sp>
       <p:sp>
         <p:nvSpPr>
@@ -5067,7 +6916,7 @@
           <a:bodyPr wrap="square" lIns="0" tIns="0" rIns="0" bIns="0" rtlCol="0" anchor="ctr"/>
           <a:lstStyle/>
           <a:p>
-            <a:pPr marL="0" indent="0">
+            <a:pPr indent="0" marL="0">
               <a:buNone/>
             </a:pPr>
             <a:r>
@@ -5106,7 +6955,7 @@
           <a:bodyPr wrap="square" rtlCol="0" anchor="t"/>
           <a:lstStyle/>
           <a:p>
-            <a:pPr marL="0" indent="0">
+            <a:pPr indent="0" marL="0">
               <a:spcAft>
                 <a:spcPts val="1000"/>
               </a:spcAft>
@@ -5189,7 +7038,7 @@
             <a:endParaRPr lang="en-US" sz="1250" dirty="0"/>
           </a:p>
           <a:p>
-            <a:pPr marL="0" indent="0">
+            <a:pPr indent="0" marL="0">
               <a:buNone/>
             </a:pPr>
             <a:r>
@@ -5201,7 +7050,7 @@
                 <a:ea typeface="Calibri" pitchFamily="34" charset="-122"/>
                 <a:cs typeface="Calibri" pitchFamily="34" charset="-120"/>
               </a:rPr>
-              <a:t>Інструмент вимірювання чистий — цифрам можна вірити.</a:t>
+              <a:t>Хибних спрацювань немає — вимірюванням можна довіряти (sanity-check).</a:t>
             </a:r>
             <a:endParaRPr lang="en-US" sz="1250" dirty="0"/>
           </a:p>
@@ -5251,13 +7100,6 @@
           </a:solidFill>
           <a:ln/>
         </p:spPr>
-        <p:txBody>
-          <a:bodyPr/>
-          <a:lstStyle/>
-          <a:p>
-            <a:endParaRPr lang="uk-UA"/>
-          </a:p>
-        </p:txBody>
       </p:sp>
       <p:sp>
         <p:nvSpPr>
@@ -5280,11 +7122,11 @@
           <a:bodyPr wrap="square" lIns="0" tIns="0" rIns="0" bIns="0" rtlCol="0" anchor="ctr"/>
           <a:lstStyle/>
           <a:p>
-            <a:pPr marL="0" indent="0">
-              <a:buNone/>
-            </a:pPr>
-            <a:r>
-              <a:rPr lang="en-US" sz="1200" b="1" kern="0" spc="200" dirty="0">
+            <a:pPr indent="0" marL="0">
+              <a:buNone/>
+            </a:pPr>
+            <a:r>
+              <a:rPr lang="en-US" sz="1200" b="1" spc="200" kern="0" dirty="0">
                 <a:solidFill>
                   <a:srgbClr val="0072B2"/>
                 </a:solidFill>
@@ -5319,7 +7161,7 @@
           <a:bodyPr wrap="square" lIns="0" tIns="0" rIns="0" bIns="0" rtlCol="0" anchor="ctr"/>
           <a:lstStyle/>
           <a:p>
-            <a:pPr marL="0" indent="0">
+            <a:pPr indent="0" marL="0">
               <a:buNone/>
             </a:pPr>
             <a:r>
@@ -5331,7 +7173,7 @@
                 <a:ea typeface="Calibri" pitchFamily="34" charset="-122"/>
                 <a:cs typeface="Calibri" pitchFamily="34" charset="-120"/>
               </a:rPr>
-              <a:t>«Конверсія не впала» — правда</a:t>
+              <a:t>Значущого падіння конверсії не виявлено</a:t>
             </a:r>
             <a:endParaRPr lang="en-US" sz="3000" dirty="0"/>
           </a:p>
@@ -5346,7 +7188,7 @@
           <p:nvPr>
             <p:extLst>
               <p:ext uri="{D42A27DB-BD31-4B8C-83A1-F6EECF244321}">
-                <p14:modId xmlns:p14="http://schemas.microsoft.com/office/powerpoint/2010/main" val="739232006"/>
+                <p14:modId xmlns:p14="http://schemas.microsoft.com/office/powerpoint/2010/main" val="1579011935"/>
               </p:ext>
             </p:extLst>
           </p:nvPr>
@@ -5360,34 +7202,10 @@
             <a:tbl>
               <a:tblPr/>
               <a:tblGrid>
-                <a:gridCol w="1645920">
-                  <a:extLst>
-                    <a:ext uri="{9D8B030D-6E8A-4147-A177-3AD203B41FA5}">
-                      <a16:colId xmlns:a16="http://schemas.microsoft.com/office/drawing/2014/main" val="20000"/>
-                    </a:ext>
-                  </a:extLst>
-                </a:gridCol>
-                <a:gridCol w="1645920">
-                  <a:extLst>
-                    <a:ext uri="{9D8B030D-6E8A-4147-A177-3AD203B41FA5}">
-                      <a16:colId xmlns:a16="http://schemas.microsoft.com/office/drawing/2014/main" val="20001"/>
-                    </a:ext>
-                  </a:extLst>
-                </a:gridCol>
-                <a:gridCol w="1645920">
-                  <a:extLst>
-                    <a:ext uri="{9D8B030D-6E8A-4147-A177-3AD203B41FA5}">
-                      <a16:colId xmlns:a16="http://schemas.microsoft.com/office/drawing/2014/main" val="20002"/>
-                    </a:ext>
-                  </a:extLst>
-                </a:gridCol>
-                <a:gridCol w="1645920">
-                  <a:extLst>
-                    <a:ext uri="{9D8B030D-6E8A-4147-A177-3AD203B41FA5}">
-                      <a16:colId xmlns:a16="http://schemas.microsoft.com/office/drawing/2014/main" val="20003"/>
-                    </a:ext>
-                  </a:extLst>
-                </a:gridCol>
+                <a:gridCol w="1645920"/>
+                <a:gridCol w="1645920"/>
+                <a:gridCol w="1645920"/>
+                <a:gridCol w="1645920"/>
               </a:tblGrid>
               <a:tr h="594360">
                 <a:tc>
@@ -5395,7 +7213,7 @@
                     <a:bodyPr/>
                     <a:lstStyle/>
                     <a:p>
-                      <a:pPr marL="0" indent="0" algn="l">
+                      <a:pPr algn="l" indent="0" marL="0">
                         <a:buNone/>
                       </a:pPr>
                       <a:r>
@@ -5416,7 +7234,7 @@
                       </a:endParaRPr>
                     </a:p>
                   </a:txBody>
-                  <a:tcPr anchor="ctr">
+                  <a:tcPr marL="91440" marR="91440" marT="45720" marB="45720" anchor="ctr">
                     <a:lnL w="6350" cap="flat" cmpd="sng" algn="ctr">
                       <a:solidFill>
                         <a:srgbClr val="DDDDDD"/>
@@ -5463,7 +7281,7 @@
                     <a:bodyPr/>
                     <a:lstStyle/>
                     <a:p>
-                      <a:pPr marL="0" indent="0" algn="l">
+                      <a:pPr algn="l" indent="0" marL="0">
                         <a:buNone/>
                       </a:pPr>
                       <a:r>
@@ -5475,7 +7293,7 @@
                           <a:ea typeface="Calibri" pitchFamily="34" charset="-122"/>
                           <a:cs typeface="Calibri" pitchFamily="34" charset="-120"/>
                         </a:rPr>
-                        <a:t>CR 6.99</a:t>
+                        <a:t>CR control</a:t>
                       </a:r>
                       <a:endParaRPr lang="en-US" sz="1500" dirty="0">
                         <a:latin typeface="Calibri" charset="0"/>
@@ -5484,7 +7302,7 @@
                       </a:endParaRPr>
                     </a:p>
                   </a:txBody>
-                  <a:tcPr anchor="ctr">
+                  <a:tcPr marL="91440" marR="91440" marT="45720" marB="45720" anchor="ctr">
                     <a:lnL w="6350" cap="flat" cmpd="sng" algn="ctr">
                       <a:solidFill>
                         <a:srgbClr val="DDDDDD"/>
@@ -5531,7 +7349,7 @@
                     <a:bodyPr/>
                     <a:lstStyle/>
                     <a:p>
-                      <a:pPr marL="0" indent="0" algn="l">
+                      <a:pPr algn="l" indent="0" marL="0">
                         <a:buNone/>
                       </a:pPr>
                       <a:r>
@@ -5543,7 +7361,7 @@
                           <a:ea typeface="Calibri" pitchFamily="34" charset="-122"/>
                           <a:cs typeface="Calibri" pitchFamily="34" charset="-120"/>
                         </a:rPr>
-                        <a:t>CR 9.99</a:t>
+                        <a:t>CR test</a:t>
                       </a:r>
                       <a:endParaRPr lang="en-US" sz="1500" dirty="0">
                         <a:latin typeface="Calibri" charset="0"/>
@@ -5552,7 +7370,7 @@
                       </a:endParaRPr>
                     </a:p>
                   </a:txBody>
-                  <a:tcPr anchor="ctr">
+                  <a:tcPr marL="91440" marR="91440" marT="45720" marB="45720" anchor="ctr">
                     <a:lnL w="6350" cap="flat" cmpd="sng" algn="ctr">
                       <a:solidFill>
                         <a:srgbClr val="DDDDDD"/>
@@ -5599,7 +7417,7 @@
                     <a:bodyPr/>
                     <a:lstStyle/>
                     <a:p>
-                      <a:pPr marL="0" indent="0" algn="l">
+                      <a:pPr algn="l" indent="0" marL="0">
                         <a:buNone/>
                       </a:pPr>
                       <a:r>
@@ -5620,7 +7438,7 @@
                       </a:endParaRPr>
                     </a:p>
                   </a:txBody>
-                  <a:tcPr anchor="ctr">
+                  <a:tcPr marL="91440" marR="91440" marT="45720" marB="45720" anchor="ctr">
                     <a:lnL w="6350" cap="flat" cmpd="sng" algn="ctr">
                       <a:solidFill>
                         <a:srgbClr val="DDDDDD"/>
@@ -5662,11 +7480,6 @@
                     </a:solidFill>
                   </a:tcPr>
                 </a:tc>
-                <a:extLst>
-                  <a:ext uri="{0D108BD9-81ED-4DB2-BD59-A6C34878D82A}">
-                    <a16:rowId xmlns:a16="http://schemas.microsoft.com/office/drawing/2014/main" val="10000"/>
-                  </a:ext>
-                </a:extLst>
               </a:tr>
               <a:tr h="594360">
                 <a:tc>
@@ -5674,7 +7487,7 @@
                     <a:bodyPr/>
                     <a:lstStyle/>
                     <a:p>
-                      <a:pPr marL="0" indent="0" algn="l">
+                      <a:pPr algn="l" indent="0" marL="0">
                         <a:buNone/>
                       </a:pPr>
                       <a:r>
@@ -5695,7 +7508,7 @@
                       </a:endParaRPr>
                     </a:p>
                   </a:txBody>
-                  <a:tcPr anchor="ctr">
+                  <a:tcPr marL="91440" marR="91440" marT="45720" marB="45720" anchor="ctr">
                     <a:lnL w="6350" cap="flat" cmpd="sng" algn="ctr">
                       <a:solidFill>
                         <a:srgbClr val="DDDDDD"/>
@@ -5742,7 +7555,7 @@
                     <a:bodyPr/>
                     <a:lstStyle/>
                     <a:p>
-                      <a:pPr marL="0" indent="0" algn="l">
+                      <a:pPr algn="l" indent="0" marL="0">
                         <a:buNone/>
                       </a:pPr>
                       <a:r>
@@ -5763,7 +7576,7 @@
                       </a:endParaRPr>
                     </a:p>
                   </a:txBody>
-                  <a:tcPr anchor="ctr">
+                  <a:tcPr marL="91440" marR="91440" marT="45720" marB="45720" anchor="ctr">
                     <a:lnL w="6350" cap="flat" cmpd="sng" algn="ctr">
                       <a:solidFill>
                         <a:srgbClr val="DDDDDD"/>
@@ -5810,7 +7623,7 @@
                     <a:bodyPr/>
                     <a:lstStyle/>
                     <a:p>
-                      <a:pPr marL="0" indent="0" algn="l">
+                      <a:pPr algn="l" indent="0" marL="0">
                         <a:buNone/>
                       </a:pPr>
                       <a:r>
@@ -5831,7 +7644,7 @@
                       </a:endParaRPr>
                     </a:p>
                   </a:txBody>
-                  <a:tcPr anchor="ctr">
+                  <a:tcPr marL="91440" marR="91440" marT="45720" marB="45720" anchor="ctr">
                     <a:lnL w="6350" cap="flat" cmpd="sng" algn="ctr">
                       <a:solidFill>
                         <a:srgbClr val="DDDDDD"/>
@@ -5878,7 +7691,7 @@
                     <a:bodyPr/>
                     <a:lstStyle/>
                     <a:p>
-                      <a:pPr marL="0" indent="0" algn="l">
+                      <a:pPr algn="l" indent="0" marL="0">
                         <a:buNone/>
                       </a:pPr>
                       <a:r>
@@ -5899,7 +7712,7 @@
                       </a:endParaRPr>
                     </a:p>
                   </a:txBody>
-                  <a:tcPr anchor="ctr">
+                  <a:tcPr marL="91440" marR="91440" marT="45720" marB="45720" anchor="ctr">
                     <a:lnL w="6350" cap="flat" cmpd="sng" algn="ctr">
                       <a:solidFill>
                         <a:srgbClr val="DDDDDD"/>
@@ -5941,11 +7754,6 @@
                     </a:solidFill>
                   </a:tcPr>
                 </a:tc>
-                <a:extLst>
-                  <a:ext uri="{0D108BD9-81ED-4DB2-BD59-A6C34878D82A}">
-                    <a16:rowId xmlns:a16="http://schemas.microsoft.com/office/drawing/2014/main" val="10001"/>
-                  </a:ext>
-                </a:extLst>
               </a:tr>
               <a:tr h="594360">
                 <a:tc>
@@ -5953,7 +7761,7 @@
                     <a:bodyPr/>
                     <a:lstStyle/>
                     <a:p>
-                      <a:pPr marL="0" indent="0" algn="l">
+                      <a:pPr algn="l" indent="0" marL="0">
                         <a:buNone/>
                       </a:pPr>
                       <a:r>
@@ -5974,7 +7782,7 @@
                       </a:endParaRPr>
                     </a:p>
                   </a:txBody>
-                  <a:tcPr anchor="ctr">
+                  <a:tcPr marL="91440" marR="91440" marT="45720" marB="45720" anchor="ctr">
                     <a:lnL w="6350" cap="flat" cmpd="sng" algn="ctr">
                       <a:solidFill>
                         <a:srgbClr val="DDDDDD"/>
@@ -6021,7 +7829,7 @@
                     <a:bodyPr/>
                     <a:lstStyle/>
                     <a:p>
-                      <a:pPr marL="0" indent="0" algn="l">
+                      <a:pPr algn="l" indent="0" marL="0">
                         <a:buNone/>
                       </a:pPr>
                       <a:r>
@@ -6042,7 +7850,7 @@
                       </a:endParaRPr>
                     </a:p>
                   </a:txBody>
-                  <a:tcPr anchor="ctr">
+                  <a:tcPr marL="91440" marR="91440" marT="45720" marB="45720" anchor="ctr">
                     <a:lnL w="6350" cap="flat" cmpd="sng" algn="ctr">
                       <a:solidFill>
                         <a:srgbClr val="DDDDDD"/>
@@ -6089,7 +7897,7 @@
                     <a:bodyPr/>
                     <a:lstStyle/>
                     <a:p>
-                      <a:pPr marL="0" indent="0" algn="l">
+                      <a:pPr algn="l" indent="0" marL="0">
                         <a:buNone/>
                       </a:pPr>
                       <a:r>
@@ -6110,7 +7918,7 @@
                       </a:endParaRPr>
                     </a:p>
                   </a:txBody>
-                  <a:tcPr anchor="ctr">
+                  <a:tcPr marL="91440" marR="91440" marT="45720" marB="45720" anchor="ctr">
                     <a:lnL w="6350" cap="flat" cmpd="sng" algn="ctr">
                       <a:solidFill>
                         <a:srgbClr val="DDDDDD"/>
@@ -6157,7 +7965,7 @@
                     <a:bodyPr/>
                     <a:lstStyle/>
                     <a:p>
-                      <a:pPr marL="0" indent="0" algn="l">
+                      <a:pPr algn="l" indent="0" marL="0">
                         <a:buNone/>
                       </a:pPr>
                       <a:r>
@@ -6178,7 +7986,7 @@
                       </a:endParaRPr>
                     </a:p>
                   </a:txBody>
-                  <a:tcPr anchor="ctr">
+                  <a:tcPr marL="91440" marR="91440" marT="45720" marB="45720" anchor="ctr">
                     <a:lnL w="6350" cap="flat" cmpd="sng" algn="ctr">
                       <a:solidFill>
                         <a:srgbClr val="DDDDDD"/>
@@ -6220,11 +8028,6 @@
                     </a:solidFill>
                   </a:tcPr>
                 </a:tc>
-                <a:extLst>
-                  <a:ext uri="{0D108BD9-81ED-4DB2-BD59-A6C34878D82A}">
-                    <a16:rowId xmlns:a16="http://schemas.microsoft.com/office/drawing/2014/main" val="10002"/>
-                  </a:ext>
-                </a:extLst>
               </a:tr>
               <a:tr h="594360">
                 <a:tc>
@@ -6232,7 +8035,7 @@
                     <a:bodyPr/>
                     <a:lstStyle/>
                     <a:p>
-                      <a:pPr marL="0" indent="0" algn="l">
+                      <a:pPr algn="l" indent="0" marL="0">
                         <a:buNone/>
                       </a:pPr>
                       <a:r>
@@ -6244,27 +8047,16 @@
                           <a:ea typeface="Calibri" pitchFamily="34" charset="-122"/>
                           <a:cs typeface="Calibri" pitchFamily="34" charset="-120"/>
                         </a:rPr>
-                        <a:t>Tier1 </a:t>
+                        <a:t>Tier1 (A/A, обидві 6.99)</a:t>
                       </a:r>
-                      <a:r>
-                        <a:rPr lang="en-US" sz="1500" b="1" dirty="0">
-                          <a:solidFill>
-                            <a:srgbClr val="26313B"/>
-                          </a:solidFill>
-                          <a:latin typeface="Calibri" pitchFamily="34" charset="0"/>
-                          <a:ea typeface="Calibri" pitchFamily="34" charset="-122"/>
-                          <a:cs typeface="Calibri" pitchFamily="34" charset="-120"/>
-                        </a:rPr>
-                        <a:t>(A/A)</a:t>
-                      </a:r>
-                      <a:endParaRPr lang="en-US" sz="1500" b="1" dirty="0">
+                      <a:endParaRPr lang="en-US" sz="1500" dirty="0">
                         <a:latin typeface="Calibri" charset="0"/>
                         <a:ea typeface="Calibri" charset="0"/>
                         <a:cs typeface="Calibri" charset="0"/>
                       </a:endParaRPr>
                     </a:p>
                   </a:txBody>
-                  <a:tcPr anchor="ctr">
+                  <a:tcPr marL="91440" marR="91440" marT="45720" marB="45720" anchor="ctr">
                     <a:lnL w="6350" cap="flat" cmpd="sng" algn="ctr">
                       <a:solidFill>
                         <a:srgbClr val="DDDDDD"/>
@@ -6311,7 +8103,7 @@
                     <a:bodyPr/>
                     <a:lstStyle/>
                     <a:p>
-                      <a:pPr marL="0" indent="0" algn="l">
+                      <a:pPr algn="l" indent="0" marL="0">
                         <a:buNone/>
                       </a:pPr>
                       <a:r>
@@ -6332,7 +8124,7 @@
                       </a:endParaRPr>
                     </a:p>
                   </a:txBody>
-                  <a:tcPr anchor="ctr">
+                  <a:tcPr marL="91440" marR="91440" marT="45720" marB="45720" anchor="ctr">
                     <a:lnL w="6350" cap="flat" cmpd="sng" algn="ctr">
                       <a:solidFill>
                         <a:srgbClr val="DDDDDD"/>
@@ -6379,7 +8171,7 @@
                     <a:bodyPr/>
                     <a:lstStyle/>
                     <a:p>
-                      <a:pPr marL="0" indent="0" algn="l">
+                      <a:pPr algn="l" indent="0" marL="0">
                         <a:buNone/>
                       </a:pPr>
                       <a:r>
@@ -6400,7 +8192,7 @@
                       </a:endParaRPr>
                     </a:p>
                   </a:txBody>
-                  <a:tcPr anchor="ctr">
+                  <a:tcPr marL="91440" marR="91440" marT="45720" marB="45720" anchor="ctr">
                     <a:lnL w="6350" cap="flat" cmpd="sng" algn="ctr">
                       <a:solidFill>
                         <a:srgbClr val="DDDDDD"/>
@@ -6447,7 +8239,7 @@
                     <a:bodyPr/>
                     <a:lstStyle/>
                     <a:p>
-                      <a:pPr marL="0" indent="0" algn="l">
+                      <a:pPr algn="l" indent="0" marL="0">
                         <a:buNone/>
                       </a:pPr>
                       <a:r>
@@ -6468,7 +8260,7 @@
                       </a:endParaRPr>
                     </a:p>
                   </a:txBody>
-                  <a:tcPr anchor="ctr">
+                  <a:tcPr marL="91440" marR="91440" marT="45720" marB="45720" anchor="ctr">
                     <a:lnL w="6350" cap="flat" cmpd="sng" algn="ctr">
                       <a:solidFill>
                         <a:srgbClr val="DDDDDD"/>
@@ -6510,11 +8302,6 @@
                     </a:solidFill>
                   </a:tcPr>
                 </a:tc>
-                <a:extLst>
-                  <a:ext uri="{0D108BD9-81ED-4DB2-BD59-A6C34878D82A}">
-                    <a16:rowId xmlns:a16="http://schemas.microsoft.com/office/drawing/2014/main" val="10003"/>
-                  </a:ext>
-                </a:extLst>
               </a:tr>
             </a:tbl>
           </a:graphicData>
@@ -6522,7 +8309,7 @@
       </p:graphicFrame>
       <p:sp>
         <p:nvSpPr>
-          <p:cNvPr id="5" name="Shape 3"/>
+          <p:cNvPr id="6" name="Shape 3"/>
           <p:cNvSpPr/>
           <p:nvPr/>
         </p:nvSpPr>
@@ -6541,13 +8328,6 @@
           </a:solidFill>
           <a:ln/>
         </p:spPr>
-        <p:txBody>
-          <a:bodyPr/>
-          <a:lstStyle/>
-          <a:p>
-            <a:endParaRPr lang="uk-UA"/>
-          </a:p>
-        </p:txBody>
       </p:sp>
       <p:sp>
         <p:nvSpPr>
@@ -6570,7 +8350,7 @@
           <a:bodyPr wrap="square" lIns="0" tIns="0" rIns="0" bIns="0" rtlCol="0" anchor="ctr"/>
           <a:lstStyle/>
           <a:p>
-            <a:pPr marL="0" indent="0">
+            <a:pPr indent="0" marL="0">
               <a:buNone/>
             </a:pPr>
             <a:r>
@@ -6597,7 +8377,7 @@
         <p:spPr>
           <a:xfrm>
             <a:off x="7863840" y="2880360"/>
-            <a:ext cx="3474720" cy="1280160"/>
+            <a:ext cx="3474720" cy="1371600"/>
           </a:xfrm>
           <a:prstGeom prst="rect">
             <a:avLst/>
@@ -6609,11 +8389,11 @@
           <a:bodyPr wrap="square" lIns="0" tIns="0" rIns="0" bIns="0" rtlCol="0" anchor="ctr"/>
           <a:lstStyle/>
           <a:p>
-            <a:pPr marL="0" indent="0">
-              <a:buNone/>
-            </a:pPr>
-            <a:r>
-              <a:rPr lang="en-US" sz="1450" dirty="0">
+            <a:pPr indent="0" marL="0">
+              <a:buNone/>
+            </a:pPr>
+            <a:r>
+              <a:rPr lang="en-US" sz="1400" dirty="0">
                 <a:solidFill>
                   <a:srgbClr val="26313B"/>
                 </a:solidFill>
@@ -6621,9 +8401,9 @@
                 <a:ea typeface="Calibri" pitchFamily="34" charset="-122"/>
                 <a:cs typeface="Calibri" pitchFamily="34" charset="-120"/>
               </a:rPr>
-              <a:t>У цій частині компанія мала рацію: ціна не вплинула на конверсію в покупку.</a:t>
-            </a:r>
-            <a:endParaRPr lang="en-US" sz="1450" dirty="0"/>
+              <a:t>Компанія прочитала свій тест коректно: значущого погіршення немає, помітне падіння дані виключають.</a:t>
+            </a:r>
+            <a:endParaRPr lang="en-US" sz="1400" dirty="0"/>
           </a:p>
         </p:txBody>
       </p:sp>
@@ -6636,7 +8416,7 @@
         <p:spPr>
           <a:xfrm>
             <a:off x="548640" y="4572000"/>
-            <a:ext cx="10972800" cy="457200"/>
+            <a:ext cx="11155680" cy="640080"/>
           </a:xfrm>
           <a:prstGeom prst="rect">
             <a:avLst/>
@@ -6648,7 +8428,7 @@
           <a:bodyPr wrap="square" lIns="0" tIns="0" rIns="0" bIns="0" rtlCol="0" anchor="ctr"/>
           <a:lstStyle/>
           <a:p>
-            <a:pPr marL="0" indent="0">
+            <a:pPr indent="0" marL="0">
               <a:buNone/>
             </a:pPr>
             <a:r>
@@ -6660,7 +8440,7 @@
                 <a:ea typeface="Calibri" pitchFamily="34" charset="-122"/>
                 <a:cs typeface="Calibri" pitchFamily="34" charset="-120"/>
               </a:rPr>
-              <a:t>Two-proportion z-тест, вікно 10–24.01, унікальні юзери; «дрижання» A/A більше за «ефект» у EU/USA.</a:t>
+              <a:t>Two-proportion z-тест, вікно 10–24.01. 95% CI різниці (test − control): EU [−0.17; +0.57] п.п., USA [−0.33; +0.62] п.п. — тобто падіння більше ~0.2–0.3 п.п. дані виключають; p&gt;0.05 не є «доказом рівності».</a:t>
             </a:r>
             <a:endParaRPr lang="en-US" sz="1200" dirty="0"/>
           </a:p>
@@ -6710,13 +8490,6 @@
           </a:solidFill>
           <a:ln/>
         </p:spPr>
-        <p:txBody>
-          <a:bodyPr/>
-          <a:lstStyle/>
-          <a:p>
-            <a:endParaRPr lang="uk-UA"/>
-          </a:p>
-        </p:txBody>
       </p:sp>
       <p:sp>
         <p:nvSpPr>
@@ -6739,11 +8512,11 @@
           <a:bodyPr wrap="square" lIns="0" tIns="0" rIns="0" bIns="0" rtlCol="0" anchor="ctr"/>
           <a:lstStyle/>
           <a:p>
-            <a:pPr marL="0" indent="0">
-              <a:buNone/>
-            </a:pPr>
-            <a:r>
-              <a:rPr lang="en-US" sz="1200" b="1" kern="0" spc="200" dirty="0">
+            <a:pPr indent="0" marL="0">
+              <a:buNone/>
+            </a:pPr>
+            <a:r>
+              <a:rPr lang="en-US" sz="1200" b="1" spc="200" kern="0" dirty="0">
                 <a:solidFill>
                   <a:srgbClr val="D55E00"/>
                 </a:solidFill>
@@ -6778,7 +8551,7 @@
           <a:bodyPr wrap="square" lIns="0" tIns="0" rIns="0" bIns="0" rtlCol="0" anchor="ctr"/>
           <a:lstStyle/>
           <a:p>
-            <a:pPr marL="0" indent="0">
+            <a:pPr indent="0" marL="0">
               <a:buNone/>
             </a:pPr>
             <a:r>
@@ -6817,7 +8590,7 @@
           <a:bodyPr wrap="square" lIns="0" tIns="0" rIns="0" bIns="0" rtlCol="0" anchor="ctr"/>
           <a:lstStyle/>
           <a:p>
-            <a:pPr marL="0" indent="0">
+            <a:pPr indent="0" marL="0">
               <a:buNone/>
             </a:pPr>
             <a:r>
@@ -6844,7 +8617,7 @@
         <p:spPr>
           <a:xfrm>
             <a:off x="548640" y="3291840"/>
-            <a:ext cx="3840480" cy="822960"/>
+            <a:ext cx="4023360" cy="822960"/>
           </a:xfrm>
           <a:prstGeom prst="rect">
             <a:avLst/>
@@ -6856,7 +8629,7 @@
           <a:bodyPr wrap="square" lIns="0" tIns="0" rIns="0" bIns="0" rtlCol="0" anchor="ctr"/>
           <a:lstStyle/>
           <a:p>
-            <a:pPr marL="0" indent="0">
+            <a:pPr indent="0" marL="0">
               <a:buNone/>
             </a:pPr>
             <a:r>
@@ -6868,12 +8641,12 @@
                 <a:ea typeface="Calibri" pitchFamily="34" charset="-122"/>
                 <a:cs typeface="Calibri" pitchFamily="34" charset="-120"/>
               </a:rPr>
-              <a:t>конверсії в апсел (OTP, $15)</a:t>
+              <a:t>конверсії в апсел (OTP, $15) у EU</a:t>
             </a:r>
             <a:endParaRPr lang="en-US" sz="1400" dirty="0"/>
           </a:p>
           <a:p>
-            <a:pPr marL="0" indent="0">
+            <a:pPr indent="0" marL="0">
               <a:buNone/>
             </a:pPr>
             <a:r>
@@ -6885,7 +8658,7 @@
                 <a:ea typeface="Calibri" pitchFamily="34" charset="-122"/>
                 <a:cs typeface="Calibri" pitchFamily="34" charset="-120"/>
               </a:rPr>
-              <a:t>у EU на ціні 9.99 · p &lt; 0.0001</a:t>
+              <a:t>95% CI [−11.1; −5.4] п.п. · p &lt; 0.0001</a:t>
             </a:r>
             <a:endParaRPr lang="en-US" sz="1400" dirty="0"/>
           </a:p>
@@ -6914,34 +8687,10 @@
             <a:tbl>
               <a:tblPr/>
               <a:tblGrid>
-                <a:gridCol w="1691640">
-                  <a:extLst>
-                    <a:ext uri="{9D8B030D-6E8A-4147-A177-3AD203B41FA5}">
-                      <a16:colId xmlns:a16="http://schemas.microsoft.com/office/drawing/2014/main" val="20000"/>
-                    </a:ext>
-                  </a:extLst>
-                </a:gridCol>
-                <a:gridCol w="1691640">
-                  <a:extLst>
-                    <a:ext uri="{9D8B030D-6E8A-4147-A177-3AD203B41FA5}">
-                      <a16:colId xmlns:a16="http://schemas.microsoft.com/office/drawing/2014/main" val="20001"/>
-                    </a:ext>
-                  </a:extLst>
-                </a:gridCol>
-                <a:gridCol w="1691640">
-                  <a:extLst>
-                    <a:ext uri="{9D8B030D-6E8A-4147-A177-3AD203B41FA5}">
-                      <a16:colId xmlns:a16="http://schemas.microsoft.com/office/drawing/2014/main" val="20002"/>
-                    </a:ext>
-                  </a:extLst>
-                </a:gridCol>
-                <a:gridCol w="1691640">
-                  <a:extLst>
-                    <a:ext uri="{9D8B030D-6E8A-4147-A177-3AD203B41FA5}">
-                      <a16:colId xmlns:a16="http://schemas.microsoft.com/office/drawing/2014/main" val="20003"/>
-                    </a:ext>
-                  </a:extLst>
-                </a:gridCol>
+                <a:gridCol w="1691640"/>
+                <a:gridCol w="1691640"/>
+                <a:gridCol w="1691640"/>
+                <a:gridCol w="1691640"/>
               </a:tblGrid>
               <a:tr h="594360">
                 <a:tc>
@@ -6949,7 +8698,7 @@
                     <a:bodyPr/>
                     <a:lstStyle/>
                     <a:p>
-                      <a:pPr marL="0" indent="0" algn="l">
+                      <a:pPr algn="l" indent="0" marL="0">
                         <a:buNone/>
                       </a:pPr>
                       <a:r>
@@ -6970,7 +8719,7 @@
                       </a:endParaRPr>
                     </a:p>
                   </a:txBody>
-                  <a:tcPr anchor="ctr">
+                  <a:tcPr marL="91440" marR="91440" marT="45720" marB="45720" anchor="ctr">
                     <a:lnL w="6350" cap="flat" cmpd="sng" algn="ctr">
                       <a:solidFill>
                         <a:srgbClr val="DDDDDD"/>
@@ -7014,7 +8763,7 @@
                     <a:bodyPr/>
                     <a:lstStyle/>
                     <a:p>
-                      <a:pPr marL="0" indent="0" algn="l">
+                      <a:pPr algn="l" indent="0" marL="0">
                         <a:buNone/>
                       </a:pPr>
                       <a:r>
@@ -7026,7 +8775,7 @@
                           <a:ea typeface="Calibri" pitchFamily="34" charset="-122"/>
                           <a:cs typeface="Calibri" pitchFamily="34" charset="-120"/>
                         </a:rPr>
-                        <a:t>attach 6.99</a:t>
+                        <a:t>attach control</a:t>
                       </a:r>
                       <a:endParaRPr lang="en-US" sz="1400" dirty="0">
                         <a:latin typeface="Calibri" charset="0"/>
@@ -7035,7 +8784,7 @@
                       </a:endParaRPr>
                     </a:p>
                   </a:txBody>
-                  <a:tcPr anchor="ctr">
+                  <a:tcPr marL="91440" marR="91440" marT="45720" marB="45720" anchor="ctr">
                     <a:lnL w="6350" cap="flat" cmpd="sng" algn="ctr">
                       <a:solidFill>
                         <a:srgbClr val="DDDDDD"/>
@@ -7079,7 +8828,7 @@
                     <a:bodyPr/>
                     <a:lstStyle/>
                     <a:p>
-                      <a:pPr marL="0" indent="0" algn="l">
+                      <a:pPr algn="l" indent="0" marL="0">
                         <a:buNone/>
                       </a:pPr>
                       <a:r>
@@ -7091,7 +8840,7 @@
                           <a:ea typeface="Calibri" pitchFamily="34" charset="-122"/>
                           <a:cs typeface="Calibri" pitchFamily="34" charset="-120"/>
                         </a:rPr>
-                        <a:t>attach 9.99</a:t>
+                        <a:t>attach test</a:t>
                       </a:r>
                       <a:endParaRPr lang="en-US" sz="1400" dirty="0">
                         <a:latin typeface="Calibri" charset="0"/>
@@ -7100,7 +8849,7 @@
                       </a:endParaRPr>
                     </a:p>
                   </a:txBody>
-                  <a:tcPr anchor="ctr">
+                  <a:tcPr marL="91440" marR="91440" marT="45720" marB="45720" anchor="ctr">
                     <a:lnL w="6350" cap="flat" cmpd="sng" algn="ctr">
                       <a:solidFill>
                         <a:srgbClr val="DDDDDD"/>
@@ -7144,7 +8893,7 @@
                     <a:bodyPr/>
                     <a:lstStyle/>
                     <a:p>
-                      <a:pPr marL="0" indent="0" algn="l">
+                      <a:pPr algn="l" indent="0" marL="0">
                         <a:buNone/>
                       </a:pPr>
                       <a:r>
@@ -7165,7 +8914,7 @@
                       </a:endParaRPr>
                     </a:p>
                   </a:txBody>
-                  <a:tcPr anchor="ctr">
+                  <a:tcPr marL="91440" marR="91440" marT="45720" marB="45720" anchor="ctr">
                     <a:lnL w="6350" cap="flat" cmpd="sng" algn="ctr">
                       <a:solidFill>
                         <a:srgbClr val="DDDDDD"/>
@@ -7204,11 +8953,6 @@
                     </a:lnB>
                   </a:tcPr>
                 </a:tc>
-                <a:extLst>
-                  <a:ext uri="{0D108BD9-81ED-4DB2-BD59-A6C34878D82A}">
-                    <a16:rowId xmlns:a16="http://schemas.microsoft.com/office/drawing/2014/main" val="10000"/>
-                  </a:ext>
-                </a:extLst>
               </a:tr>
               <a:tr h="594360">
                 <a:tc>
@@ -7216,7 +8960,7 @@
                     <a:bodyPr/>
                     <a:lstStyle/>
                     <a:p>
-                      <a:pPr marL="0" indent="0" algn="l">
+                      <a:pPr algn="l" indent="0" marL="0">
                         <a:buNone/>
                       </a:pPr>
                       <a:r>
@@ -7237,7 +8981,7 @@
                       </a:endParaRPr>
                     </a:p>
                   </a:txBody>
-                  <a:tcPr anchor="ctr">
+                  <a:tcPr marL="91440" marR="91440" marT="45720" marB="45720" anchor="ctr">
                     <a:lnL w="6350" cap="flat" cmpd="sng" algn="ctr">
                       <a:solidFill>
                         <a:srgbClr val="DDDDDD"/>
@@ -7281,7 +9025,7 @@
                     <a:bodyPr/>
                     <a:lstStyle/>
                     <a:p>
-                      <a:pPr marL="0" indent="0" algn="l">
+                      <a:pPr algn="l" indent="0" marL="0">
                         <a:buNone/>
                       </a:pPr>
                       <a:r>
@@ -7302,7 +9046,7 @@
                       </a:endParaRPr>
                     </a:p>
                   </a:txBody>
-                  <a:tcPr anchor="ctr">
+                  <a:tcPr marL="91440" marR="91440" marT="45720" marB="45720" anchor="ctr">
                     <a:lnL w="6350" cap="flat" cmpd="sng" algn="ctr">
                       <a:solidFill>
                         <a:srgbClr val="DDDDDD"/>
@@ -7346,7 +9090,7 @@
                     <a:bodyPr/>
                     <a:lstStyle/>
                     <a:p>
-                      <a:pPr marL="0" indent="0" algn="l">
+                      <a:pPr algn="l" indent="0" marL="0">
                         <a:buNone/>
                       </a:pPr>
                       <a:r>
@@ -7367,7 +9111,7 @@
                       </a:endParaRPr>
                     </a:p>
                   </a:txBody>
-                  <a:tcPr anchor="ctr">
+                  <a:tcPr marL="91440" marR="91440" marT="45720" marB="45720" anchor="ctr">
                     <a:lnL w="6350" cap="flat" cmpd="sng" algn="ctr">
                       <a:solidFill>
                         <a:srgbClr val="DDDDDD"/>
@@ -7411,7 +9155,7 @@
                     <a:bodyPr/>
                     <a:lstStyle/>
                     <a:p>
-                      <a:pPr marL="0" indent="0" algn="l">
+                      <a:pPr algn="l" indent="0" marL="0">
                         <a:buNone/>
                       </a:pPr>
                       <a:r>
@@ -7432,7 +9176,7 @@
                       </a:endParaRPr>
                     </a:p>
                   </a:txBody>
-                  <a:tcPr anchor="ctr">
+                  <a:tcPr marL="91440" marR="91440" marT="45720" marB="45720" anchor="ctr">
                     <a:lnL w="6350" cap="flat" cmpd="sng" algn="ctr">
                       <a:solidFill>
                         <a:srgbClr val="DDDDDD"/>
@@ -7471,11 +9215,6 @@
                     </a:lnB>
                   </a:tcPr>
                 </a:tc>
-                <a:extLst>
-                  <a:ext uri="{0D108BD9-81ED-4DB2-BD59-A6C34878D82A}">
-                    <a16:rowId xmlns:a16="http://schemas.microsoft.com/office/drawing/2014/main" val="10001"/>
-                  </a:ext>
-                </a:extLst>
               </a:tr>
               <a:tr h="594360">
                 <a:tc>
@@ -7483,7 +9222,7 @@
                     <a:bodyPr/>
                     <a:lstStyle/>
                     <a:p>
-                      <a:pPr marL="0" indent="0" algn="l">
+                      <a:pPr algn="l" indent="0" marL="0">
                         <a:buNone/>
                       </a:pPr>
                       <a:r>
@@ -7504,7 +9243,7 @@
                       </a:endParaRPr>
                     </a:p>
                   </a:txBody>
-                  <a:tcPr anchor="ctr">
+                  <a:tcPr marL="91440" marR="91440" marT="45720" marB="45720" anchor="ctr">
                     <a:lnL w="6350" cap="flat" cmpd="sng" algn="ctr">
                       <a:solidFill>
                         <a:srgbClr val="DDDDDD"/>
@@ -7548,7 +9287,7 @@
                     <a:bodyPr/>
                     <a:lstStyle/>
                     <a:p>
-                      <a:pPr marL="0" indent="0" algn="l">
+                      <a:pPr algn="l" indent="0" marL="0">
                         <a:buNone/>
                       </a:pPr>
                       <a:r>
@@ -7569,7 +9308,7 @@
                       </a:endParaRPr>
                     </a:p>
                   </a:txBody>
-                  <a:tcPr anchor="ctr">
+                  <a:tcPr marL="91440" marR="91440" marT="45720" marB="45720" anchor="ctr">
                     <a:lnL w="6350" cap="flat" cmpd="sng" algn="ctr">
                       <a:solidFill>
                         <a:srgbClr val="DDDDDD"/>
@@ -7613,7 +9352,7 @@
                     <a:bodyPr/>
                     <a:lstStyle/>
                     <a:p>
-                      <a:pPr marL="0" indent="0" algn="l">
+                      <a:pPr algn="l" indent="0" marL="0">
                         <a:buNone/>
                       </a:pPr>
                       <a:r>
@@ -7634,7 +9373,7 @@
                       </a:endParaRPr>
                     </a:p>
                   </a:txBody>
-                  <a:tcPr anchor="ctr">
+                  <a:tcPr marL="91440" marR="91440" marT="45720" marB="45720" anchor="ctr">
                     <a:lnL w="6350" cap="flat" cmpd="sng" algn="ctr">
                       <a:solidFill>
                         <a:srgbClr val="DDDDDD"/>
@@ -7678,7 +9417,7 @@
                     <a:bodyPr/>
                     <a:lstStyle/>
                     <a:p>
-                      <a:pPr marL="0" indent="0" algn="l">
+                      <a:pPr algn="l" indent="0" marL="0">
                         <a:buNone/>
                       </a:pPr>
                       <a:r>
@@ -7699,7 +9438,7 @@
                       </a:endParaRPr>
                     </a:p>
                   </a:txBody>
-                  <a:tcPr anchor="ctr">
+                  <a:tcPr marL="91440" marR="91440" marT="45720" marB="45720" anchor="ctr">
                     <a:lnL w="6350" cap="flat" cmpd="sng" algn="ctr">
                       <a:solidFill>
                         <a:srgbClr val="DDDDDD"/>
@@ -7738,11 +9477,6 @@
                     </a:lnB>
                   </a:tcPr>
                 </a:tc>
-                <a:extLst>
-                  <a:ext uri="{0D108BD9-81ED-4DB2-BD59-A6C34878D82A}">
-                    <a16:rowId xmlns:a16="http://schemas.microsoft.com/office/drawing/2014/main" val="10002"/>
-                  </a:ext>
-                </a:extLst>
               </a:tr>
               <a:tr h="594360">
                 <a:tc>
@@ -7750,7 +9484,7 @@
                     <a:bodyPr/>
                     <a:lstStyle/>
                     <a:p>
-                      <a:pPr marL="0" indent="0" algn="l">
+                      <a:pPr algn="l" indent="0" marL="0">
                         <a:buNone/>
                       </a:pPr>
                       <a:r>
@@ -7762,7 +9496,7 @@
                           <a:ea typeface="Calibri" pitchFamily="34" charset="-122"/>
                           <a:cs typeface="Calibri" pitchFamily="34" charset="-120"/>
                         </a:rPr>
-                        <a:t>Tier1 (A/A)</a:t>
+                        <a:t>Tier1 (A/A, обидві 6.99)</a:t>
                       </a:r>
                       <a:endParaRPr lang="en-US" sz="1400" dirty="0">
                         <a:latin typeface="Calibri" charset="0"/>
@@ -7771,7 +9505,7 @@
                       </a:endParaRPr>
                     </a:p>
                   </a:txBody>
-                  <a:tcPr anchor="ctr">
+                  <a:tcPr marL="91440" marR="91440" marT="45720" marB="45720" anchor="ctr">
                     <a:lnL w="6350" cap="flat" cmpd="sng" algn="ctr">
                       <a:solidFill>
                         <a:srgbClr val="DDDDDD"/>
@@ -7815,7 +9549,7 @@
                     <a:bodyPr/>
                     <a:lstStyle/>
                     <a:p>
-                      <a:pPr marL="0" indent="0" algn="l">
+                      <a:pPr algn="l" indent="0" marL="0">
                         <a:buNone/>
                       </a:pPr>
                       <a:r>
@@ -7836,7 +9570,7 @@
                       </a:endParaRPr>
                     </a:p>
                   </a:txBody>
-                  <a:tcPr anchor="ctr">
+                  <a:tcPr marL="91440" marR="91440" marT="45720" marB="45720" anchor="ctr">
                     <a:lnL w="6350" cap="flat" cmpd="sng" algn="ctr">
                       <a:solidFill>
                         <a:srgbClr val="DDDDDD"/>
@@ -7880,7 +9614,7 @@
                     <a:bodyPr/>
                     <a:lstStyle/>
                     <a:p>
-                      <a:pPr marL="0" indent="0" algn="l">
+                      <a:pPr algn="l" indent="0" marL="0">
                         <a:buNone/>
                       </a:pPr>
                       <a:r>
@@ -7901,7 +9635,7 @@
                       </a:endParaRPr>
                     </a:p>
                   </a:txBody>
-                  <a:tcPr anchor="ctr">
+                  <a:tcPr marL="91440" marR="91440" marT="45720" marB="45720" anchor="ctr">
                     <a:lnL w="6350" cap="flat" cmpd="sng" algn="ctr">
                       <a:solidFill>
                         <a:srgbClr val="DDDDDD"/>
@@ -7945,7 +9679,7 @@
                     <a:bodyPr/>
                     <a:lstStyle/>
                     <a:p>
-                      <a:pPr marL="0" indent="0" algn="l">
+                      <a:pPr algn="l" indent="0" marL="0">
                         <a:buNone/>
                       </a:pPr>
                       <a:r>
@@ -7966,7 +9700,7 @@
                       </a:endParaRPr>
                     </a:p>
                   </a:txBody>
-                  <a:tcPr anchor="ctr">
+                  <a:tcPr marL="91440" marR="91440" marT="45720" marB="45720" anchor="ctr">
                     <a:lnL w="6350" cap="flat" cmpd="sng" algn="ctr">
                       <a:solidFill>
                         <a:srgbClr val="DDDDDD"/>
@@ -8005,11 +9739,6 @@
                     </a:lnB>
                   </a:tcPr>
                 </a:tc>
-                <a:extLst>
-                  <a:ext uri="{0D108BD9-81ED-4DB2-BD59-A6C34878D82A}">
-                    <a16:rowId xmlns:a16="http://schemas.microsoft.com/office/drawing/2014/main" val="10003"/>
-                  </a:ext>
-                </a:extLst>
               </a:tr>
             </a:tbl>
           </a:graphicData>
@@ -8036,7 +9765,7 @@
           <a:bodyPr wrap="square" lIns="0" tIns="0" rIns="0" bIns="0" rtlCol="0" anchor="ctr"/>
           <a:lstStyle/>
           <a:p>
-            <a:pPr marL="0" indent="0">
+            <a:pPr indent="0" marL="0">
               <a:buNone/>
             </a:pPr>
             <a:r>
@@ -8098,13 +9827,6 @@
           </a:solidFill>
           <a:ln/>
         </p:spPr>
-        <p:txBody>
-          <a:bodyPr/>
-          <a:lstStyle/>
-          <a:p>
-            <a:endParaRPr lang="uk-UA"/>
-          </a:p>
-        </p:txBody>
       </p:sp>
       <p:sp>
         <p:nvSpPr>
@@ -8127,11 +9849,11 @@
           <a:bodyPr wrap="square" lIns="0" tIns="0" rIns="0" bIns="0" rtlCol="0" anchor="ctr"/>
           <a:lstStyle/>
           <a:p>
-            <a:pPr marL="0" indent="0">
-              <a:buNone/>
-            </a:pPr>
-            <a:r>
-              <a:rPr lang="en-US" sz="1200" b="1" kern="0" spc="200" dirty="0">
+            <a:pPr indent="0" marL="0">
+              <a:buNone/>
+            </a:pPr>
+            <a:r>
+              <a:rPr lang="en-US" sz="1200" b="1" spc="200" kern="0" dirty="0">
                 <a:solidFill>
                   <a:srgbClr val="0072B2"/>
                 </a:solidFill>
@@ -8166,7 +9888,7 @@
           <a:bodyPr wrap="square" lIns="0" tIns="0" rIns="0" bIns="0" rtlCol="0" anchor="ctr"/>
           <a:lstStyle/>
           <a:p>
-            <a:pPr marL="0" indent="0">
+            <a:pPr indent="0" marL="0">
               <a:buNone/>
             </a:pPr>
             <a:r>
@@ -8193,7 +9915,7 @@
         <p:spPr>
           <a:xfrm>
             <a:off x="548640" y="1874520"/>
-            <a:ext cx="6400800" cy="365760"/>
+            <a:ext cx="7315200" cy="365760"/>
           </a:xfrm>
           <a:prstGeom prst="rect">
             <a:avLst/>
@@ -8205,7 +9927,7 @@
           <a:bodyPr wrap="square" lIns="0" tIns="0" rIns="0" bIns="0" rtlCol="0" anchor="ctr"/>
           <a:lstStyle/>
           <a:p>
-            <a:pPr marL="0" indent="0">
+            <a:pPr indent="0" marL="0">
               <a:buNone/>
             </a:pPr>
             <a:r>
@@ -8217,7 +9939,7 @@
                 <a:ea typeface="Calibri" pitchFamily="34" charset="-122"/>
                 <a:cs typeface="Calibri" pitchFamily="34" charset="-120"/>
               </a:rPr>
-              <a:t>Виручка з покупця (EU, до підвищення):</a:t>
+              <a:t>Структура LTV49 юзера (ціна 6.99, зріла когорта розкатки):</a:t>
             </a:r>
             <a:endParaRPr lang="en-US" sz="1300" dirty="0"/>
           </a:p>
@@ -8232,7 +9954,7 @@
         <p:spPr>
           <a:xfrm>
             <a:off x="548640" y="2286000"/>
-            <a:ext cx="4828032" cy="1005840"/>
+            <a:ext cx="5779008" cy="1005840"/>
           </a:xfrm>
           <a:prstGeom prst="rect">
             <a:avLst/>
@@ -8242,13 +9964,6 @@
           </a:solidFill>
           <a:ln/>
         </p:spPr>
-        <p:txBody>
-          <a:bodyPr/>
-          <a:lstStyle/>
-          <a:p>
-            <a:endParaRPr lang="uk-UA"/>
-          </a:p>
-        </p:txBody>
       </p:sp>
       <p:sp>
         <p:nvSpPr>
@@ -8258,8 +9973,8 @@
         </p:nvSpPr>
         <p:spPr>
           <a:xfrm>
-            <a:off x="5422392" y="2286000"/>
-            <a:ext cx="2487168" cy="1005840"/>
+            <a:off x="6373368" y="2286000"/>
+            <a:ext cx="1563624" cy="1005840"/>
           </a:xfrm>
           <a:prstGeom prst="rect">
             <a:avLst/>
@@ -8269,13 +9984,6 @@
           </a:solidFill>
           <a:ln/>
         </p:spPr>
-        <p:txBody>
-          <a:bodyPr/>
-          <a:lstStyle/>
-          <a:p>
-            <a:endParaRPr lang="uk-UA"/>
-          </a:p>
-        </p:txBody>
       </p:sp>
       <p:sp>
         <p:nvSpPr>
@@ -8286,7 +9994,7 @@
         <p:spPr>
           <a:xfrm>
             <a:off x="731520" y="2395728"/>
-            <a:ext cx="4480560" cy="822960"/>
+            <a:ext cx="5394960" cy="822960"/>
           </a:xfrm>
           <a:prstGeom prst="rect">
             <a:avLst/>
@@ -8298,7 +10006,7 @@
           <a:bodyPr wrap="square" lIns="0" tIns="0" rIns="0" bIns="0" rtlCol="0" anchor="ctr"/>
           <a:lstStyle/>
           <a:p>
-            <a:pPr marL="0" indent="0">
+            <a:pPr indent="0" marL="0">
               <a:buNone/>
             </a:pPr>
             <a:r>
@@ -8310,12 +10018,12 @@
                 <a:ea typeface="Calibri" pitchFamily="34" charset="-122"/>
                 <a:cs typeface="Calibri" pitchFamily="34" charset="-120"/>
               </a:rPr>
-              <a:t>підписка · 66%</a:t>
+              <a:t>підписка · 79%</a:t>
             </a:r>
             <a:endParaRPr lang="en-US" sz="1350" dirty="0"/>
           </a:p>
           <a:p>
-            <a:pPr marL="0" indent="0">
+            <a:pPr indent="0" marL="0">
               <a:buNone/>
             </a:pPr>
             <a:r>
@@ -8341,8 +10049,8 @@
         </p:nvSpPr>
         <p:spPr>
           <a:xfrm>
-            <a:off x="5577840" y="2395728"/>
-            <a:ext cx="2286000" cy="822960"/>
+            <a:off x="6473952" y="2395728"/>
+            <a:ext cx="1417320" cy="822960"/>
           </a:xfrm>
           <a:prstGeom prst="rect">
             <a:avLst/>
@@ -8354,11 +10062,11 @@
           <a:bodyPr wrap="square" lIns="0" tIns="0" rIns="0" bIns="0" rtlCol="0" anchor="ctr"/>
           <a:lstStyle/>
           <a:p>
-            <a:pPr marL="0" indent="0">
-              <a:buNone/>
-            </a:pPr>
-            <a:r>
-              <a:rPr lang="en-US" sz="1350" b="1" dirty="0">
+            <a:pPr indent="0" marL="0">
+              <a:buNone/>
+            </a:pPr>
+            <a:r>
+              <a:rPr lang="en-US" sz="1150" b="1" dirty="0">
                 <a:solidFill>
                   <a:srgbClr val="FFFFFF"/>
                 </a:solidFill>
@@ -8366,16 +10074,16 @@
                 <a:ea typeface="Calibri" pitchFamily="34" charset="-122"/>
                 <a:cs typeface="Calibri" pitchFamily="34" charset="-120"/>
               </a:rPr>
-              <a:t>OTP $15 · 34%</a:t>
-            </a:r>
-            <a:endParaRPr lang="en-US" sz="1350" dirty="0"/>
-          </a:p>
-          <a:p>
-            <a:pPr marL="0" indent="0">
-              <a:buNone/>
-            </a:pPr>
-            <a:r>
-              <a:rPr lang="en-US" sz="1350" b="1" dirty="0">
+              <a:t>OTP · 21%</a:t>
+            </a:r>
+            <a:endParaRPr lang="en-US" sz="1150" dirty="0"/>
+          </a:p>
+          <a:p>
+            <a:pPr indent="0" marL="0">
+              <a:buNone/>
+            </a:pPr>
+            <a:r>
+              <a:rPr lang="en-US" sz="1150" b="1" dirty="0">
                 <a:solidFill>
                   <a:srgbClr val="FFFFFF"/>
                 </a:solidFill>
@@ -8383,9 +10091,9 @@
                 <a:ea typeface="Calibri" pitchFamily="34" charset="-122"/>
                 <a:cs typeface="Calibri" pitchFamily="34" charset="-120"/>
               </a:rPr>
-              <a:t>не росте: 0%</a:t>
-            </a:r>
-            <a:endParaRPr lang="en-US" sz="1350" dirty="0"/>
+              <a:t>$15, не росте</a:t>
+            </a:r>
+            <a:endParaRPr lang="en-US" sz="1150" dirty="0"/>
           </a:p>
         </p:txBody>
       </p:sp>
@@ -8410,7 +10118,7 @@
           <a:bodyPr wrap="square" lIns="0" tIns="0" rIns="0" bIns="0" rtlCol="0" anchor="ctr"/>
           <a:lstStyle/>
           <a:p>
-            <a:pPr marL="0" indent="0">
+            <a:pPr indent="0" marL="0">
               <a:buNone/>
             </a:pPr>
             <a:r>
@@ -8449,7 +10157,7 @@
           <a:bodyPr wrap="square" lIns="0" tIns="0" rIns="0" bIns="0" rtlCol="0" anchor="ctr"/>
           <a:lstStyle/>
           <a:p>
-            <a:pPr marL="0" indent="0">
+            <a:pPr indent="0" marL="0">
               <a:buNone/>
             </a:pPr>
             <a:r>
@@ -8461,7 +10169,7 @@
                 <a:ea typeface="Calibri" pitchFamily="34" charset="-122"/>
                 <a:cs typeface="Calibri" pitchFamily="34" charset="-120"/>
               </a:rPr>
-              <a:t>42.9% × 0.66  +  0% × 0.34  ≈</a:t>
+              <a:t>42.9% × 0.79  +  0% × 0.21  ≈</a:t>
             </a:r>
             <a:endParaRPr lang="en-US" sz="2000" dirty="0"/>
           </a:p>
@@ -8488,7 +10196,7 @@
           <a:bodyPr wrap="square" lIns="0" tIns="0" rIns="0" bIns="0" rtlCol="0" anchor="ctr"/>
           <a:lstStyle/>
           <a:p>
-            <a:pPr marL="0" indent="0">
+            <a:pPr indent="0" marL="0">
               <a:buNone/>
             </a:pPr>
             <a:r>
@@ -8500,7 +10208,7 @@
                 <a:ea typeface="Calibri" pitchFamily="34" charset="-122"/>
                 <a:cs typeface="Calibri" pitchFamily="34" charset="-120"/>
               </a:rPr>
-              <a:t>+28%</a:t>
+              <a:t>+34%</a:t>
             </a:r>
             <a:endParaRPr lang="en-US" sz="5400" dirty="0"/>
           </a:p>
@@ -8515,7 +10223,7 @@
         <p:spPr>
           <a:xfrm>
             <a:off x="8138160" y="3977640"/>
-            <a:ext cx="1645920" cy="731520"/>
+            <a:ext cx="2011680" cy="731520"/>
           </a:xfrm>
           <a:prstGeom prst="rect">
             <a:avLst/>
@@ -8527,7 +10235,7 @@
           <a:bodyPr wrap="square" lIns="0" tIns="0" rIns="0" bIns="0" rtlCol="0" anchor="ctr"/>
           <a:lstStyle/>
           <a:p>
-            <a:pPr marL="0" indent="0">
+            <a:pPr indent="0" marL="0">
               <a:buNone/>
             </a:pPr>
             <a:r>
@@ -8539,12 +10247,12 @@
                 <a:ea typeface="Calibri" pitchFamily="34" charset="-122"/>
                 <a:cs typeface="Calibri" pitchFamily="34" charset="-120"/>
               </a:rPr>
-              <a:t>стеля EU</a:t>
+              <a:t>стеля росту LTV</a:t>
             </a:r>
             <a:endParaRPr lang="en-US" sz="1200" dirty="0"/>
           </a:p>
           <a:p>
-            <a:pPr marL="0" indent="0">
+            <a:pPr indent="0" marL="0">
               <a:buNone/>
             </a:pPr>
             <a:r>
@@ -8556,7 +10264,7 @@
                 <a:ea typeface="Calibri" pitchFamily="34" charset="-122"/>
                 <a:cs typeface="Calibri" pitchFamily="34" charset="-120"/>
               </a:rPr>
-              <a:t>(USA ≈ +30%)</a:t>
+              <a:t>без змін поведінки</a:t>
             </a:r>
             <a:endParaRPr lang="en-US" sz="1200" dirty="0"/>
           </a:p>
@@ -8583,13 +10291,6 @@
           </a:solidFill>
           <a:ln/>
         </p:spPr>
-        <p:txBody>
-          <a:bodyPr/>
-          <a:lstStyle/>
-          <a:p>
-            <a:endParaRPr lang="uk-UA"/>
-          </a:p>
-        </p:txBody>
       </p:sp>
       <p:sp>
         <p:nvSpPr>
@@ -8599,8 +10300,8 @@
         </p:nvSpPr>
         <p:spPr>
           <a:xfrm>
-            <a:off x="8823960" y="2212848"/>
-            <a:ext cx="2651760" cy="1097280"/>
+            <a:off x="8823960" y="2148840"/>
+            <a:ext cx="2651760" cy="1234440"/>
           </a:xfrm>
           <a:prstGeom prst="rect">
             <a:avLst/>
@@ -8612,11 +10313,11 @@
           <a:bodyPr wrap="square" lIns="0" tIns="0" rIns="0" bIns="0" rtlCol="0" anchor="ctr"/>
           <a:lstStyle/>
           <a:p>
-            <a:pPr marL="0" indent="0">
-              <a:buNone/>
-            </a:pPr>
-            <a:r>
-              <a:rPr lang="en-US" sz="1400" b="1" dirty="0">
+            <a:pPr indent="0" marL="0">
+              <a:buNone/>
+            </a:pPr>
+            <a:r>
+              <a:rPr lang="en-US" sz="1350" b="1" dirty="0">
                 <a:solidFill>
                   <a:srgbClr val="D55E00"/>
                 </a:solidFill>
@@ -8624,9 +10325,9 @@
                 <a:ea typeface="Calibri" pitchFamily="34" charset="-122"/>
                 <a:cs typeface="Calibri" pitchFamily="34" charset="-120"/>
               </a:rPr>
-              <a:t>Бенчмарк «+42.9% до виручки» був хибним із самого початку.</a:t>
-            </a:r>
-            <a:endParaRPr lang="en-US" sz="1400" dirty="0"/>
+              <a:t>Бенчмарк «+42.9%» не враховував revenue mix — він був недосяжний від початку.</a:t>
+            </a:r>
+            <a:endParaRPr lang="en-US" sz="1350" dirty="0"/>
           </a:p>
         </p:txBody>
       </p:sp>
@@ -8651,7 +10352,7 @@
           <a:bodyPr wrap="square" lIns="0" tIns="0" rIns="0" bIns="0" rtlCol="0" anchor="ctr"/>
           <a:lstStyle/>
           <a:p>
-            <a:pPr marL="0" indent="0">
+            <a:pPr indent="0" marL="0">
               <a:buNone/>
             </a:pPr>
             <a:r>
@@ -8663,7 +10364,7 @@
                 <a:ea typeface="Calibri" pitchFamily="34" charset="-122"/>
                 <a:cs typeface="Calibri" pitchFamily="34" charset="-120"/>
               </a:rPr>
-              <a:t>Це ще ДО будь-яких змін поведінки юзерів — чиста арифметика структури виручки.</a:t>
+              <a:t>Це ще ДО будь-яких змін поведінки — чиста арифметика. Узгоджено з водоспадом далі: крок «механіка OTP» −$1.53 = ті самі ~9 п.п.</a:t>
             </a:r>
             <a:endParaRPr lang="en-US" sz="1300" dirty="0"/>
           </a:p>
@@ -8713,13 +10414,6 @@
           </a:solidFill>
           <a:ln/>
         </p:spPr>
-        <p:txBody>
-          <a:bodyPr/>
-          <a:lstStyle/>
-          <a:p>
-            <a:endParaRPr lang="uk-UA"/>
-          </a:p>
-        </p:txBody>
       </p:sp>
       <p:sp>
         <p:nvSpPr>
@@ -8742,11 +10436,11 @@
           <a:bodyPr wrap="square" lIns="0" tIns="0" rIns="0" bIns="0" rtlCol="0" anchor="ctr"/>
           <a:lstStyle/>
           <a:p>
-            <a:pPr marL="0" indent="0">
-              <a:buNone/>
-            </a:pPr>
-            <a:r>
-              <a:rPr lang="en-US" sz="1200" b="1" kern="0" spc="200" dirty="0">
+            <a:pPr indent="0" marL="0">
+              <a:buNone/>
+            </a:pPr>
+            <a:r>
+              <a:rPr lang="en-US" sz="1200" b="1" spc="200" kern="0" dirty="0">
                 <a:solidFill>
                   <a:srgbClr val="E69F00"/>
                 </a:solidFill>
@@ -8781,7 +10475,7 @@
           <a:bodyPr wrap="square" lIns="0" tIns="0" rIns="0" bIns="0" rtlCol="0" anchor="ctr"/>
           <a:lstStyle/>
           <a:p>
-            <a:pPr marL="0" indent="0">
+            <a:pPr indent="0" marL="0">
               <a:buNone/>
             </a:pPr>
             <a:r>
@@ -8801,14 +10495,14 @@
       </p:sp>
       <p:pic>
         <p:nvPicPr>
-          <p:cNvPr id="5" name="Image 0" descr="C:\Users\Miller\AppData\Local\Temp\claude\C--Users-Miller-Desktop-amo-case-nepop\aec1882d-a317-45bb-b012-96f699d178f4\scratchpad\pptx_build\c_waterfall.png"/>
+          <p:cNvPr id="5" name="Image 0" descr="C:\Users\Miller\AppData\Local\Temp\claude\C--Users-Miller-Desktop-amo-case-nepop\aec1882d-a317-45bb-b012-96f699d178f4\scratchpad\pptx_build\c_waterfall.png">    </p:cNvPr>
           <p:cNvPicPr>
             <a:picLocks noChangeAspect="1"/>
           </p:cNvPicPr>
           <p:nvPr/>
         </p:nvPicPr>
         <p:blipFill>
-          <a:blip r:embed="rId3"/>
+          <a:blip r:embed="rId1"/>
           <a:stretch>
             <a:fillRect/>
           </a:stretch>
@@ -8844,13 +10538,6 @@
           </a:solidFill>
           <a:ln/>
         </p:spPr>
-        <p:txBody>
-          <a:bodyPr/>
-          <a:lstStyle/>
-          <a:p>
-            <a:endParaRPr lang="uk-UA"/>
-          </a:p>
-        </p:txBody>
       </p:sp>
       <p:sp>
         <p:nvSpPr>
@@ -8873,7 +10560,7 @@
           <a:bodyPr wrap="square" lIns="0" tIns="0" rIns="0" bIns="0" rtlCol="0" anchor="ctr"/>
           <a:lstStyle/>
           <a:p>
-            <a:pPr marL="0" indent="0">
+            <a:pPr indent="0" marL="0">
               <a:buNone/>
             </a:pPr>
             <a:r>
@@ -8912,7 +10599,7 @@
           <a:bodyPr wrap="square" rtlCol="0" anchor="t"/>
           <a:lstStyle/>
           <a:p>
-            <a:pPr marL="0" indent="0">
+            <a:pPr indent="0" marL="0">
               <a:spcAft>
                 <a:spcPts val="600"/>
               </a:spcAft>
@@ -8932,7 +10619,7 @@
             <a:endParaRPr lang="en-US" sz="1300" dirty="0"/>
           </a:p>
           <a:p>
-            <a:pPr marL="0" indent="0">
+            <a:pPr indent="0" marL="0">
               <a:spcAft>
                 <a:spcPts val="600"/>
               </a:spcAft>
@@ -8952,7 +10639,7 @@
             <a:endParaRPr lang="en-US" sz="1300" dirty="0"/>
           </a:p>
           <a:p>
-            <a:pPr marL="0" indent="0">
+            <a:pPr indent="0" marL="0">
               <a:spcAft>
                 <a:spcPts val="600"/>
               </a:spcAft>
@@ -8972,7 +10659,7 @@
             <a:endParaRPr lang="en-US" sz="1300" dirty="0"/>
           </a:p>
           <a:p>
-            <a:pPr marL="0" indent="0">
+            <a:pPr indent="0" marL="0">
               <a:spcAft>
                 <a:spcPts val="600"/>
               </a:spcAft>
@@ -8992,7 +10679,7 @@
             <a:endParaRPr lang="en-US" sz="1300" dirty="0"/>
           </a:p>
           <a:p>
-            <a:pPr marL="0" indent="0">
+            <a:pPr indent="0" marL="0">
               <a:spcAft>
                 <a:spcPts val="1200"/>
               </a:spcAft>
@@ -9012,7 +10699,7 @@
             <a:endParaRPr lang="en-US" sz="1300" dirty="0"/>
           </a:p>
           <a:p>
-            <a:pPr marL="0" indent="0">
+            <a:pPr indent="0" marL="0">
               <a:buNone/>
             </a:pPr>
             <a:r>
@@ -9074,13 +10761,6 @@
           </a:solidFill>
           <a:ln/>
         </p:spPr>
-        <p:txBody>
-          <a:bodyPr/>
-          <a:lstStyle/>
-          <a:p>
-            <a:endParaRPr lang="uk-UA"/>
-          </a:p>
-        </p:txBody>
       </p:sp>
       <p:sp>
         <p:nvSpPr>
@@ -9103,11 +10783,11 @@
           <a:bodyPr wrap="square" lIns="0" tIns="0" rIns="0" bIns="0" rtlCol="0" anchor="ctr"/>
           <a:lstStyle/>
           <a:p>
-            <a:pPr marL="0" indent="0">
-              <a:buNone/>
-            </a:pPr>
-            <a:r>
-              <a:rPr lang="en-US" sz="1200" b="1" kern="0" spc="200" dirty="0">
+            <a:pPr indent="0" marL="0">
+              <a:buNone/>
+            </a:pPr>
+            <a:r>
+              <a:rPr lang="en-US" sz="1200" b="1" spc="200" kern="0" dirty="0">
                 <a:solidFill>
                   <a:srgbClr val="D55E00"/>
                 </a:solidFill>
@@ -9142,7 +10822,7 @@
           <a:bodyPr wrap="square" lIns="0" tIns="0" rIns="0" bIns="0" rtlCol="0" anchor="ctr"/>
           <a:lstStyle/>
           <a:p>
-            <a:pPr marL="0" indent="0">
+            <a:pPr indent="0" marL="0">
               <a:buNone/>
             </a:pPr>
             <a:r>
@@ -9162,14 +10842,14 @@
       </p:sp>
       <p:pic>
         <p:nvPicPr>
-          <p:cNvPr id="5" name="Image 0" descr="C:\Users\Miller\AppData\Local\Temp\claude\C--Users-Miller-Desktop-amo-case-nepop\aec1882d-a317-45bb-b012-96f699d178f4\scratchpad\pptx_build\c_retention.png"/>
+          <p:cNvPr id="5" name="Image 0" descr="C:\Users\Miller\AppData\Local\Temp\claude\C--Users-Miller-Desktop-amo-case-nepop\aec1882d-a317-45bb-b012-96f699d178f4\scratchpad\pptx_build\c_retention.png">    </p:cNvPr>
           <p:cNvPicPr>
             <a:picLocks noChangeAspect="1"/>
           </p:cNvPicPr>
           <p:nvPr/>
         </p:nvPicPr>
         <p:blipFill>
-          <a:blip r:embed="rId3"/>
+          <a:blip r:embed="rId1"/>
           <a:stretch>
             <a:fillRect/>
           </a:stretch>
@@ -9205,7 +10885,7 @@
           <a:bodyPr wrap="square" lIns="0" tIns="0" rIns="0" bIns="0" rtlCol="0" anchor="ctr"/>
           <a:lstStyle/>
           <a:p>
-            <a:pPr marL="0" indent="0">
+            <a:pPr indent="0" marL="0">
               <a:buNone/>
             </a:pPr>
             <a:r>
@@ -9244,7 +10924,7 @@
           <a:bodyPr wrap="square" lIns="0" tIns="0" rIns="0" bIns="0" rtlCol="0" anchor="ctr"/>
           <a:lstStyle/>
           <a:p>
-            <a:pPr marL="0" indent="0">
+            <a:pPr indent="0" marL="0">
               <a:buNone/>
             </a:pPr>
             <a:r>
@@ -9283,7 +10963,7 @@
           <a:bodyPr wrap="square" rtlCol="0" anchor="t"/>
           <a:lstStyle/>
           <a:p>
-            <a:pPr marL="0" indent="0">
+            <a:pPr indent="0" marL="0">
               <a:spcAft>
                 <a:spcPts val="1000"/>
               </a:spcAft>
@@ -9303,7 +10983,7 @@
             <a:endParaRPr lang="en-US" sz="1350" dirty="0"/>
           </a:p>
           <a:p>
-            <a:pPr marL="0" indent="0">
+            <a:pPr indent="0" marL="0">
               <a:buNone/>
             </a:pPr>
             <a:r>
@@ -9622,319 +11302,4 @@
     </a:ext>
   </a:extLst>
 </a:theme>
-</file>
-
-<file path=ppt/theme/theme2.xml><?xml version="1.0" encoding="utf-8"?>
-<a:theme xmlns:a="http://schemas.openxmlformats.org/drawingml/2006/main" name="Тема Office">
-  <a:themeElements>
-    <a:clrScheme name="Стандартная">
-      <a:dk1>
-        <a:sysClr val="windowText" lastClr="000000"/>
-      </a:dk1>
-      <a:lt1>
-        <a:sysClr val="window" lastClr="FFFFFF"/>
-      </a:lt1>
-      <a:dk2>
-        <a:srgbClr val="0E2841"/>
-      </a:dk2>
-      <a:lt2>
-        <a:srgbClr val="E8E8E8"/>
-      </a:lt2>
-      <a:accent1>
-        <a:srgbClr val="156082"/>
-      </a:accent1>
-      <a:accent2>
-        <a:srgbClr val="E97132"/>
-      </a:accent2>
-      <a:accent3>
-        <a:srgbClr val="196B24"/>
-      </a:accent3>
-      <a:accent4>
-        <a:srgbClr val="0F9ED5"/>
-      </a:accent4>
-      <a:accent5>
-        <a:srgbClr val="A02B93"/>
-      </a:accent5>
-      <a:accent6>
-        <a:srgbClr val="4EA72E"/>
-      </a:accent6>
-      <a:hlink>
-        <a:srgbClr val="467886"/>
-      </a:hlink>
-      <a:folHlink>
-        <a:srgbClr val="96607D"/>
-      </a:folHlink>
-    </a:clrScheme>
-    <a:fontScheme name="Стандартная">
-      <a:majorFont>
-        <a:latin typeface="Aptos Display" panose="02110004020202020204"/>
-        <a:ea typeface=""/>
-        <a:cs typeface=""/>
-        <a:font script="Jpan" typeface="游ゴシック Light"/>
-        <a:font script="Hang" typeface="맑은 고딕"/>
-        <a:font script="Hans" typeface="等线 Light"/>
-        <a:font script="Hant" typeface="新細明體"/>
-        <a:font script="Arab" typeface="Times New Roman"/>
-        <a:font script="Hebr" typeface="Times New Roman"/>
-        <a:font script="Thai" typeface="Angsana New"/>
-        <a:font script="Ethi" typeface="Nyala"/>
-        <a:font script="Beng" typeface="Vrinda"/>
-        <a:font script="Gujr" typeface="Shruti"/>
-        <a:font script="Khmr" typeface="MoolBoran"/>
-        <a:font script="Knda" typeface="Tunga"/>
-        <a:font script="Guru" typeface="Raavi"/>
-        <a:font script="Cans" typeface="Euphemia"/>
-        <a:font script="Cher" typeface="Plantagenet Cherokee"/>
-        <a:font script="Yiii" typeface="Microsoft Yi Baiti"/>
-        <a:font script="Tibt" typeface="Microsoft Himalaya"/>
-        <a:font script="Thaa" typeface="MV Boli"/>
-        <a:font script="Deva" typeface="Mangal"/>
-        <a:font script="Telu" typeface="Gautami"/>
-        <a:font script="Taml" typeface="Latha"/>
-        <a:font script="Syrc" typeface="Estrangelo Edessa"/>
-        <a:font script="Orya" typeface="Kalinga"/>
-        <a:font script="Mlym" typeface="Kartika"/>
-        <a:font script="Laoo" typeface="DokChampa"/>
-        <a:font script="Sinh" typeface="Iskoola Pota"/>
-        <a:font script="Mong" typeface="Mongolian Baiti"/>
-        <a:font script="Viet" typeface="Times New Roman"/>
-        <a:font script="Uigh" typeface="Microsoft Uighur"/>
-        <a:font script="Geor" typeface="Sylfaen"/>
-        <a:font script="Armn" typeface="Arial"/>
-        <a:font script="Bugi" typeface="Leelawadee UI"/>
-        <a:font script="Bopo" typeface="Microsoft JhengHei"/>
-        <a:font script="Java" typeface="Javanese Text"/>
-        <a:font script="Lisu" typeface="Segoe UI"/>
-        <a:font script="Mymr" typeface="Myanmar Text"/>
-        <a:font script="Nkoo" typeface="Ebrima"/>
-        <a:font script="Olck" typeface="Nirmala UI"/>
-        <a:font script="Osma" typeface="Ebrima"/>
-        <a:font script="Phag" typeface="Phagspa"/>
-        <a:font script="Syrn" typeface="Estrangelo Edessa"/>
-        <a:font script="Syrj" typeface="Estrangelo Edessa"/>
-        <a:font script="Syre" typeface="Estrangelo Edessa"/>
-        <a:font script="Sora" typeface="Nirmala UI"/>
-        <a:font script="Tale" typeface="Microsoft Tai Le"/>
-        <a:font script="Talu" typeface="Microsoft New Tai Lue"/>
-        <a:font script="Tfng" typeface="Ebrima"/>
-      </a:majorFont>
-      <a:minorFont>
-        <a:latin typeface="Aptos" panose="02110004020202020204"/>
-        <a:ea typeface=""/>
-        <a:cs typeface=""/>
-        <a:font script="Jpan" typeface="游ゴシック"/>
-        <a:font script="Hang" typeface="맑은 고딕"/>
-        <a:font script="Hans" typeface="等线"/>
-        <a:font script="Hant" typeface="新細明體"/>
-        <a:font script="Arab" typeface="Arial"/>
-        <a:font script="Hebr" typeface="Arial"/>
-        <a:font script="Thai" typeface="Cordia New"/>
-        <a:font script="Ethi" typeface="Nyala"/>
-        <a:font script="Beng" typeface="Vrinda"/>
-        <a:font script="Gujr" typeface="Shruti"/>
-        <a:font script="Khmr" typeface="DaunPenh"/>
-        <a:font script="Knda" typeface="Tunga"/>
-        <a:font script="Guru" typeface="Raavi"/>
-        <a:font script="Cans" typeface="Euphemia"/>
-        <a:font script="Cher" typeface="Plantagenet Cherokee"/>
-        <a:font script="Yiii" typeface="Microsoft Yi Baiti"/>
-        <a:font script="Tibt" typeface="Microsoft Himalaya"/>
-        <a:font script="Thaa" typeface="MV Boli"/>
-        <a:font script="Deva" typeface="Mangal"/>
-        <a:font script="Telu" typeface="Gautami"/>
-        <a:font script="Taml" typeface="Latha"/>
-        <a:font script="Syrc" typeface="Estrangelo Edessa"/>
-        <a:font script="Orya" typeface="Kalinga"/>
-        <a:font script="Mlym" typeface="Kartika"/>
-        <a:font script="Laoo" typeface="DokChampa"/>
-        <a:font script="Sinh" typeface="Iskoola Pota"/>
-        <a:font script="Mong" typeface="Mongolian Baiti"/>
-        <a:font script="Viet" typeface="Arial"/>
-        <a:font script="Uigh" typeface="Microsoft Uighur"/>
-        <a:font script="Geor" typeface="Sylfaen"/>
-        <a:font script="Armn" typeface="Arial"/>
-        <a:font script="Bugi" typeface="Leelawadee UI"/>
-        <a:font script="Bopo" typeface="Microsoft JhengHei"/>
-        <a:font script="Java" typeface="Javanese Text"/>
-        <a:font script="Lisu" typeface="Segoe UI"/>
-        <a:font script="Mymr" typeface="Myanmar Text"/>
-        <a:font script="Nkoo" typeface="Ebrima"/>
-        <a:font script="Olck" typeface="Nirmala UI"/>
-        <a:font script="Osma" typeface="Ebrima"/>
-        <a:font script="Phag" typeface="Phagspa"/>
-        <a:font script="Syrn" typeface="Estrangelo Edessa"/>
-        <a:font script="Syrj" typeface="Estrangelo Edessa"/>
-        <a:font script="Syre" typeface="Estrangelo Edessa"/>
-        <a:font script="Sora" typeface="Nirmala UI"/>
-        <a:font script="Tale" typeface="Microsoft Tai Le"/>
-        <a:font script="Talu" typeface="Microsoft New Tai Lue"/>
-        <a:font script="Tfng" typeface="Ebrima"/>
-      </a:minorFont>
-    </a:fontScheme>
-    <a:fmtScheme name="Стандартная">
-      <a:fillStyleLst>
-        <a:solidFill>
-          <a:schemeClr val="phClr"/>
-        </a:solidFill>
-        <a:gradFill rotWithShape="1">
-          <a:gsLst>
-            <a:gs pos="0">
-              <a:schemeClr val="phClr">
-                <a:lumMod val="110000"/>
-                <a:satMod val="105000"/>
-                <a:tint val="67000"/>
-              </a:schemeClr>
-            </a:gs>
-            <a:gs pos="50000">
-              <a:schemeClr val="phClr">
-                <a:lumMod val="105000"/>
-                <a:satMod val="103000"/>
-                <a:tint val="73000"/>
-              </a:schemeClr>
-            </a:gs>
-            <a:gs pos="100000">
-              <a:schemeClr val="phClr">
-                <a:lumMod val="105000"/>
-                <a:satMod val="109000"/>
-                <a:tint val="81000"/>
-              </a:schemeClr>
-            </a:gs>
-          </a:gsLst>
-          <a:lin ang="5400000" scaled="0"/>
-        </a:gradFill>
-        <a:gradFill rotWithShape="1">
-          <a:gsLst>
-            <a:gs pos="0">
-              <a:schemeClr val="phClr">
-                <a:satMod val="103000"/>
-                <a:lumMod val="102000"/>
-                <a:tint val="94000"/>
-              </a:schemeClr>
-            </a:gs>
-            <a:gs pos="50000">
-              <a:schemeClr val="phClr">
-                <a:satMod val="110000"/>
-                <a:lumMod val="100000"/>
-                <a:shade val="100000"/>
-              </a:schemeClr>
-            </a:gs>
-            <a:gs pos="100000">
-              <a:schemeClr val="phClr">
-                <a:lumMod val="99000"/>
-                <a:satMod val="120000"/>
-                <a:shade val="78000"/>
-              </a:schemeClr>
-            </a:gs>
-          </a:gsLst>
-          <a:lin ang="5400000" scaled="0"/>
-        </a:gradFill>
-      </a:fillStyleLst>
-      <a:lnStyleLst>
-        <a:ln w="12700" cap="flat" cmpd="sng" algn="ctr">
-          <a:solidFill>
-            <a:schemeClr val="phClr"/>
-          </a:solidFill>
-          <a:prstDash val="solid"/>
-          <a:miter lim="800000"/>
-        </a:ln>
-        <a:ln w="19050" cap="flat" cmpd="sng" algn="ctr">
-          <a:solidFill>
-            <a:schemeClr val="phClr"/>
-          </a:solidFill>
-          <a:prstDash val="solid"/>
-          <a:miter lim="800000"/>
-        </a:ln>
-        <a:ln w="25400" cap="flat" cmpd="sng" algn="ctr">
-          <a:solidFill>
-            <a:schemeClr val="phClr"/>
-          </a:solidFill>
-          <a:prstDash val="solid"/>
-          <a:miter lim="800000"/>
-        </a:ln>
-      </a:lnStyleLst>
-      <a:effectStyleLst>
-        <a:effectStyle>
-          <a:effectLst/>
-        </a:effectStyle>
-        <a:effectStyle>
-          <a:effectLst/>
-        </a:effectStyle>
-        <a:effectStyle>
-          <a:effectLst>
-            <a:outerShdw blurRad="57150" dist="19050" dir="5400000" algn="ctr" rotWithShape="0">
-              <a:srgbClr val="000000">
-                <a:alpha val="63000"/>
-              </a:srgbClr>
-            </a:outerShdw>
-          </a:effectLst>
-        </a:effectStyle>
-      </a:effectStyleLst>
-      <a:bgFillStyleLst>
-        <a:solidFill>
-          <a:schemeClr val="phClr"/>
-        </a:solidFill>
-        <a:solidFill>
-          <a:schemeClr val="phClr">
-            <a:tint val="95000"/>
-            <a:satMod val="170000"/>
-          </a:schemeClr>
-        </a:solidFill>
-        <a:gradFill rotWithShape="1">
-          <a:gsLst>
-            <a:gs pos="0">
-              <a:schemeClr val="phClr">
-                <a:tint val="93000"/>
-                <a:satMod val="150000"/>
-                <a:shade val="98000"/>
-                <a:lumMod val="102000"/>
-              </a:schemeClr>
-            </a:gs>
-            <a:gs pos="50000">
-              <a:schemeClr val="phClr">
-                <a:tint val="98000"/>
-                <a:satMod val="130000"/>
-                <a:shade val="90000"/>
-                <a:lumMod val="103000"/>
-              </a:schemeClr>
-            </a:gs>
-            <a:gs pos="100000">
-              <a:schemeClr val="phClr">
-                <a:shade val="63000"/>
-                <a:satMod val="120000"/>
-              </a:schemeClr>
-            </a:gs>
-          </a:gsLst>
-          <a:lin ang="5400000" scaled="0"/>
-        </a:gradFill>
-      </a:bgFillStyleLst>
-    </a:fmtScheme>
-  </a:themeElements>
-  <a:objectDefaults>
-    <a:lnDef>
-      <a:spPr/>
-      <a:bodyPr/>
-      <a:lstStyle/>
-      <a:style>
-        <a:lnRef idx="2">
-          <a:schemeClr val="accent1"/>
-        </a:lnRef>
-        <a:fillRef idx="0">
-          <a:schemeClr val="accent1"/>
-        </a:fillRef>
-        <a:effectRef idx="1">
-          <a:schemeClr val="accent1"/>
-        </a:effectRef>
-        <a:fontRef idx="minor">
-          <a:schemeClr val="tx1"/>
-        </a:fontRef>
-      </a:style>
-    </a:lnDef>
-  </a:objectDefaults>
-  <a:extraClrSchemeLst/>
-  <a:extLst>
-    <a:ext uri="{05A4C25C-085E-4340-85A3-A5531E510DB2}">
-      <thm15:themeFamily xmlns:thm15="http://schemas.microsoft.com/office/thememl/2012/main" name="Office Theme" id="{2E142A2C-CD16-42D6-873A-C26D2A0506FA}" vid="{1BDDFF52-6CD6-40A5-AB3C-68EB2F1E4D0A}"/>
-    </a:ext>
-  </a:extLst>
-</a:theme>
 </file>